--- a/LabBook_30.pptx
+++ b/LabBook_30.pptx
@@ -5,10 +5,10 @@
     <p:sldMasterId id="2147483648" r:id="rId1"/>
   </p:sldMasterIdLst>
   <p:notesMasterIdLst>
-    <p:notesMasterId r:id="rId13"/>
+    <p:notesMasterId r:id="rId15"/>
   </p:notesMasterIdLst>
   <p:handoutMasterIdLst>
-    <p:handoutMasterId r:id="rId14"/>
+    <p:handoutMasterId r:id="rId16"/>
   </p:handoutMasterIdLst>
   <p:sldIdLst>
     <p:sldId id="256" r:id="rId2"/>
@@ -17,11 +17,13 @@
     <p:sldId id="296" r:id="rId5"/>
     <p:sldId id="375" r:id="rId6"/>
     <p:sldId id="376" r:id="rId7"/>
-    <p:sldId id="377" r:id="rId8"/>
-    <p:sldId id="388" r:id="rId9"/>
-    <p:sldId id="380" r:id="rId10"/>
-    <p:sldId id="381" r:id="rId11"/>
-    <p:sldId id="288" r:id="rId12"/>
+    <p:sldId id="390" r:id="rId8"/>
+    <p:sldId id="391" r:id="rId9"/>
+    <p:sldId id="377" r:id="rId10"/>
+    <p:sldId id="388" r:id="rId11"/>
+    <p:sldId id="380" r:id="rId12"/>
+    <p:sldId id="381" r:id="rId13"/>
+    <p:sldId id="288" r:id="rId14"/>
   </p:sldIdLst>
   <p:sldSz cx="12192000" cy="6858000"/>
   <p:notesSz cx="12192000" cy="6858000"/>
@@ -236,7 +238,7 @@
           <a:p>
             <a:fld id="{8438F8DC-35B0-48E6-A86E-42F1F08DD00F}" type="datetimeFigureOut">
               <a:rPr lang="es-ES" smtClean="0"/>
-              <a:t>03/05/2026</a:t>
+              <a:t>28/05/2026</a:t>
             </a:fld>
             <a:endParaRPr lang="es-ES"/>
           </a:p>
@@ -413,7 +415,7 @@
           <a:p>
             <a:fld id="{FACBDC12-F39B-4B97-8F4D-6734F9D366FF}" type="datetimeFigureOut">
               <a:rPr lang="es-ES" smtClean="0"/>
-              <a:t>03/05/2026</a:t>
+              <a:t>27/05/2026</a:t>
             </a:fld>
             <a:endParaRPr lang="es-ES"/>
           </a:p>
@@ -2851,7 +2853,13 @@
   <p:cSld>
     <p:spTree>
       <p:nvGrpSpPr>
-        <p:cNvPr id="1" name=""/>
+        <p:cNvPr id="1" name="">
+          <a:extLst>
+            <a:ext uri="{FF2B5EF4-FFF2-40B4-BE49-F238E27FC236}">
+              <a16:creationId xmlns:a16="http://schemas.microsoft.com/office/drawing/2014/main" id="{960CA2DF-810F-7BDA-CFF3-0CFEE760301A}"/>
+            </a:ext>
+          </a:extLst>
+        </p:cNvPr>
         <p:cNvGrpSpPr/>
         <p:nvPr/>
       </p:nvGrpSpPr>
@@ -2868,7 +2876,7 @@
           <p:cNvPr id="5" name="Marcador de pie de página 4">
             <a:extLst>
               <a:ext uri="{FF2B5EF4-FFF2-40B4-BE49-F238E27FC236}">
-                <a16:creationId xmlns:a16="http://schemas.microsoft.com/office/drawing/2014/main" id="{F929251A-3DC4-36B2-3FB3-341378364BED}"/>
+                <a16:creationId xmlns:a16="http://schemas.microsoft.com/office/drawing/2014/main" id="{4915C280-A84A-95DA-94D2-FE062C8ED61F}"/>
               </a:ext>
             </a:extLst>
           </p:cNvPr>
@@ -2896,7 +2904,7 @@
           <p:cNvPr id="6" name="Marcador de número de diapositiva 5">
             <a:extLst>
               <a:ext uri="{FF2B5EF4-FFF2-40B4-BE49-F238E27FC236}">
-                <a16:creationId xmlns:a16="http://schemas.microsoft.com/office/drawing/2014/main" id="{8E91A34C-DF76-97CF-3EFD-546BC64A2184}"/>
+                <a16:creationId xmlns:a16="http://schemas.microsoft.com/office/drawing/2014/main" id="{E919F9EF-02D5-71FC-C2BC-F8EC5B26723E}"/>
               </a:ext>
             </a:extLst>
           </p:cNvPr>
@@ -2926,7 +2934,7 @@
           <p:cNvPr id="8" name="CuadroTexto 7">
             <a:extLst>
               <a:ext uri="{FF2B5EF4-FFF2-40B4-BE49-F238E27FC236}">
-                <a16:creationId xmlns:a16="http://schemas.microsoft.com/office/drawing/2014/main" id="{D9601617-351E-AE1A-1F4D-693F2EA59361}"/>
+                <a16:creationId xmlns:a16="http://schemas.microsoft.com/office/drawing/2014/main" id="{3BC6D2B9-07F5-E2FA-C9AD-029B63B098DA}"/>
               </a:ext>
             </a:extLst>
           </p:cNvPr>
@@ -2935,8 +2943,8 @@
         </p:nvSpPr>
         <p:spPr>
           <a:xfrm>
-            <a:off x="611029" y="4860335"/>
-            <a:ext cx="11199530" cy="830997"/>
+            <a:off x="7753045" y="914400"/>
+            <a:ext cx="4114359" cy="4893647"/>
           </a:xfrm>
           <a:prstGeom prst="rect">
             <a:avLst/>
@@ -2960,15 +2968,60 @@
           <a:p>
             <a:pPr algn="just"/>
             <a:r>
-              <a:rPr lang="en-US" sz="1200" dirty="0">
-                <a:latin typeface="Arial" panose="020B0604020202020204" pitchFamily="34" charset="0"/>
-                <a:cs typeface="Arial" panose="020B0604020202020204" pitchFamily="34" charset="0"/>
-              </a:rPr>
-              <a:t>Comment results. Try to classify the resonances, in which case are you close to critical coupling? Why?</a:t>
+              <a:rPr lang="es-ES" sz="1200" dirty="0">
+                <a:latin typeface="Arial" panose="020B0604020202020204" pitchFamily="34" charset="0"/>
+                <a:cs typeface="Arial" panose="020B0604020202020204" pitchFamily="34" charset="0"/>
+              </a:rPr>
+              <a:t>En este apartado se diseña el perímetro del resonador para obtener un FSR de aproximadamente 15 nm. A partir de la relación entre FSR y perímetro del anillo se obtiene un valor de L=80.08 nm, lo que coincide con la separación observada entre resonancias en la gráfica. La función de transferencia presenta un comportamiento periódico con mínimos de transmisión en las longitudes de onda de resonancia. En escala logarítmica se aprecia mejor la profundidad de los valles y la relación de extinción, que en este caso es cercana a 20 dB. </a:t>
             </a:r>
           </a:p>
           <a:p>
             <a:pPr algn="just"/>
+            <a:r>
+              <a:rPr lang="es-ES" sz="1200" dirty="0">
+                <a:latin typeface="Arial" panose="020B0604020202020204" pitchFamily="34" charset="0"/>
+                <a:cs typeface="Arial" panose="020B0604020202020204" pitchFamily="34" charset="0"/>
+              </a:rPr>
+              <a:t>Para lograr el acoplamiento crítico es necesario que las pérdidas por acoplamiento sean iguales a las pérdidas internas del anillo. Considerando unas pérdidas de 0.02 dB/</a:t>
+            </a:r>
+            <a:r>
+              <a:rPr lang="es-ES" sz="1200" dirty="0" err="1">
+                <a:latin typeface="Arial" panose="020B0604020202020204" pitchFamily="34" charset="0"/>
+                <a:cs typeface="Arial" panose="020B0604020202020204" pitchFamily="34" charset="0"/>
+              </a:rPr>
+              <a:t>um</a:t>
+            </a:r>
+            <a:r>
+              <a:rPr lang="es-ES" sz="1200" dirty="0">
+                <a:latin typeface="Arial" panose="020B0604020202020204" pitchFamily="34" charset="0"/>
+                <a:cs typeface="Arial" panose="020B0604020202020204" pitchFamily="34" charset="0"/>
+              </a:rPr>
+              <a:t> y un perímetro de L=80.08 </a:t>
+            </a:r>
+            <a:r>
+              <a:rPr lang="es-ES" sz="1200" dirty="0" err="1">
+                <a:latin typeface="Arial" panose="020B0604020202020204" pitchFamily="34" charset="0"/>
+                <a:cs typeface="Arial" panose="020B0604020202020204" pitchFamily="34" charset="0"/>
+              </a:rPr>
+              <a:t>um</a:t>
+            </a:r>
+            <a:r>
+              <a:rPr lang="es-ES" sz="1200" dirty="0">
+                <a:latin typeface="Arial" panose="020B0604020202020204" pitchFamily="34" charset="0"/>
+                <a:cs typeface="Arial" panose="020B0604020202020204" pitchFamily="34" charset="0"/>
+              </a:rPr>
+              <a:t>, la pérdida total por vuelta es: 0.02*80.08=1.6 dB/vuelta. </a:t>
+            </a:r>
+          </a:p>
+          <a:p>
+            <a:pPr algn="just"/>
+            <a:r>
+              <a:rPr lang="es-ES" sz="1200" dirty="0">
+                <a:latin typeface="Arial" panose="020B0604020202020204" pitchFamily="34" charset="0"/>
+                <a:cs typeface="Arial" panose="020B0604020202020204" pitchFamily="34" charset="0"/>
+              </a:rPr>
+              <a:t>Aplicando la condición de acoplamiento crítico (t=a), se obtiene un coeficiente de acoplamiento óptimo aproximado de K=0.31. En esta situación se produce una interferencia destructiva casi completa en la salida, obteniéndose el mínimo de transmisión más profundo posible y la máxima relación de extinción.</a:t>
+            </a:r>
             <a:endParaRPr lang="en-US" sz="1200" dirty="0">
               <a:latin typeface="Arial" panose="020B0604020202020204" pitchFamily="34" charset="0"/>
               <a:cs typeface="Arial" panose="020B0604020202020204" pitchFamily="34" charset="0"/>
@@ -2976,554 +3029,22 @@
           </a:p>
           <a:p>
             <a:pPr algn="just"/>
-            <a:endParaRPr lang="en-US" sz="1200" dirty="0">
-              <a:latin typeface="Arial" panose="020B0604020202020204" pitchFamily="34" charset="0"/>
-              <a:cs typeface="Arial" panose="020B0604020202020204" pitchFamily="34" charset="0"/>
-            </a:endParaRPr>
-          </a:p>
-          <a:p>
-            <a:pPr algn="just"/>
-            <a:endParaRPr lang="en-US" sz="1200" dirty="0">
-              <a:latin typeface="Arial" panose="020B0604020202020204" pitchFamily="34" charset="0"/>
-              <a:cs typeface="Arial" panose="020B0604020202020204" pitchFamily="34" charset="0"/>
-            </a:endParaRPr>
-          </a:p>
-        </p:txBody>
-      </p:sp>
-      <p:sp>
-        <p:nvSpPr>
-          <p:cNvPr id="11" name="Rectángulo 10">
-            <a:extLst>
-              <a:ext uri="{FF2B5EF4-FFF2-40B4-BE49-F238E27FC236}">
-                <a16:creationId xmlns:a16="http://schemas.microsoft.com/office/drawing/2014/main" id="{B811A5F9-C0B5-716C-70FB-9472E1BC2CD3}"/>
-              </a:ext>
-            </a:extLst>
-          </p:cNvPr>
-          <p:cNvSpPr/>
-          <p:nvPr/>
-        </p:nvSpPr>
-        <p:spPr>
-          <a:xfrm>
-            <a:off x="611030" y="1418373"/>
-            <a:ext cx="2538552" cy="3306028"/>
-          </a:xfrm>
-          <a:prstGeom prst="rect">
-            <a:avLst/>
-          </a:prstGeom>
-          <a:noFill/>
-          <a:ln w="28575">
-            <a:solidFill>
-              <a:srgbClr val="E0700D"/>
-            </a:solidFill>
-          </a:ln>
-        </p:spPr>
-        <p:style>
-          <a:lnRef idx="2">
-            <a:schemeClr val="accent1">
-              <a:shade val="15000"/>
-            </a:schemeClr>
-          </a:lnRef>
-          <a:fillRef idx="1">
-            <a:schemeClr val="accent1"/>
-          </a:fillRef>
-          <a:effectRef idx="0">
-            <a:schemeClr val="accent1"/>
-          </a:effectRef>
-          <a:fontRef idx="minor">
-            <a:schemeClr val="lt1"/>
-          </a:fontRef>
-        </p:style>
-        <p:txBody>
-          <a:bodyPr rtlCol="0" anchor="ctr"/>
-          <a:lstStyle/>
-          <a:p>
-            <a:pPr algn="ctr"/>
-            <a:endParaRPr lang="en-US"/>
-          </a:p>
-        </p:txBody>
-      </p:sp>
-      <p:sp>
-        <p:nvSpPr>
-          <p:cNvPr id="14" name="Rectángulo 13">
-            <a:extLst>
-              <a:ext uri="{FF2B5EF4-FFF2-40B4-BE49-F238E27FC236}">
-                <a16:creationId xmlns:a16="http://schemas.microsoft.com/office/drawing/2014/main" id="{6AA857E7-5C39-DCE1-10B5-40300FCF4B26}"/>
-              </a:ext>
-            </a:extLst>
-          </p:cNvPr>
-          <p:cNvSpPr/>
-          <p:nvPr/>
-        </p:nvSpPr>
-        <p:spPr>
-          <a:xfrm>
-            <a:off x="3277315" y="1419036"/>
-            <a:ext cx="2538552" cy="3306028"/>
-          </a:xfrm>
-          <a:prstGeom prst="rect">
-            <a:avLst/>
-          </a:prstGeom>
-          <a:noFill/>
-          <a:ln w="28575">
-            <a:solidFill>
-              <a:srgbClr val="E0700D"/>
-            </a:solidFill>
-          </a:ln>
-        </p:spPr>
-        <p:style>
-          <a:lnRef idx="2">
-            <a:schemeClr val="accent1">
-              <a:shade val="15000"/>
-            </a:schemeClr>
-          </a:lnRef>
-          <a:fillRef idx="1">
-            <a:schemeClr val="accent1"/>
-          </a:fillRef>
-          <a:effectRef idx="0">
-            <a:schemeClr val="accent1"/>
-          </a:effectRef>
-          <a:fontRef idx="minor">
-            <a:schemeClr val="lt1"/>
-          </a:fontRef>
-        </p:style>
-        <p:txBody>
-          <a:bodyPr rtlCol="0" anchor="ctr"/>
-          <a:lstStyle/>
-          <a:p>
-            <a:pPr algn="ctr"/>
-            <a:endParaRPr lang="en-US"/>
-          </a:p>
-        </p:txBody>
-      </p:sp>
-      <p:sp>
-        <p:nvSpPr>
-          <p:cNvPr id="15" name="CuadroTexto 14">
-            <a:extLst>
-              <a:ext uri="{FF2B5EF4-FFF2-40B4-BE49-F238E27FC236}">
-                <a16:creationId xmlns:a16="http://schemas.microsoft.com/office/drawing/2014/main" id="{54CF28B4-1346-F41D-2CD8-EA104ABBFB98}"/>
-              </a:ext>
-            </a:extLst>
-          </p:cNvPr>
-          <p:cNvSpPr txBox="1"/>
-          <p:nvPr/>
-        </p:nvSpPr>
-        <p:spPr>
-          <a:xfrm>
-            <a:off x="863650" y="2101891"/>
-            <a:ext cx="2033313" cy="1938992"/>
-          </a:xfrm>
-          <a:prstGeom prst="rect">
-            <a:avLst/>
-          </a:prstGeom>
-          <a:noFill/>
-        </p:spPr>
-        <p:txBody>
-          <a:bodyPr wrap="none" rtlCol="0">
-            <a:spAutoFit/>
-          </a:bodyPr>
-          <a:lstStyle/>
-          <a:p>
-            <a:pPr algn="ctr"/>
-            <a:r>
-              <a:rPr lang="es-ES" sz="2000" dirty="0"/>
-              <a:t>Single ring</a:t>
-            </a:r>
-          </a:p>
-          <a:p>
-            <a:pPr algn="ctr"/>
-            <a:r>
-              <a:rPr lang="es-ES" sz="2000" dirty="0"/>
-              <a:t>transfer </a:t>
-            </a:r>
-            <a:r>
-              <a:rPr lang="es-ES" sz="2000" dirty="0" err="1"/>
-              <a:t>functions</a:t>
-            </a:r>
-            <a:endParaRPr lang="es-ES" sz="2000" dirty="0"/>
-          </a:p>
-          <a:p>
-            <a:pPr algn="ctr"/>
-            <a:endParaRPr lang="es-ES" sz="2000" dirty="0"/>
-          </a:p>
-          <a:p>
-            <a:pPr algn="ctr"/>
-            <a:r>
-              <a:rPr lang="es-ES" sz="2000" dirty="0"/>
-              <a:t>Linear </a:t>
-            </a:r>
-            <a:r>
-              <a:rPr lang="es-ES" sz="2000" dirty="0" err="1"/>
-              <a:t>units</a:t>
-            </a:r>
-            <a:endParaRPr lang="es-ES" sz="2000" dirty="0"/>
-          </a:p>
-          <a:p>
-            <a:pPr algn="ctr"/>
-            <a:endParaRPr lang="es-ES" sz="2000" dirty="0"/>
-          </a:p>
-          <a:p>
-            <a:pPr algn="ctr"/>
-            <a:r>
-              <a:rPr lang="es-ES" sz="2000" dirty="0" err="1"/>
-              <a:t>alpha</a:t>
-            </a:r>
-            <a:r>
-              <a:rPr lang="es-ES" sz="2000" dirty="0"/>
-              <a:t>=0 dB/cm</a:t>
-            </a:r>
-            <a:endParaRPr lang="en-US" sz="2000" dirty="0"/>
-          </a:p>
-        </p:txBody>
-      </p:sp>
-      <p:sp>
-        <p:nvSpPr>
-          <p:cNvPr id="9" name="Rectángulo 8">
-            <a:extLst>
-              <a:ext uri="{FF2B5EF4-FFF2-40B4-BE49-F238E27FC236}">
-                <a16:creationId xmlns:a16="http://schemas.microsoft.com/office/drawing/2014/main" id="{11F0F5FC-B571-59FC-7890-3105A6A843BB}"/>
-              </a:ext>
-            </a:extLst>
-          </p:cNvPr>
-          <p:cNvSpPr/>
-          <p:nvPr/>
-        </p:nvSpPr>
-        <p:spPr>
-          <a:xfrm>
-            <a:off x="5943600" y="1418373"/>
-            <a:ext cx="2538552" cy="3306028"/>
-          </a:xfrm>
-          <a:prstGeom prst="rect">
-            <a:avLst/>
-          </a:prstGeom>
-          <a:noFill/>
-          <a:ln w="28575">
-            <a:solidFill>
-              <a:srgbClr val="E0700D"/>
-            </a:solidFill>
-          </a:ln>
-        </p:spPr>
-        <p:style>
-          <a:lnRef idx="2">
-            <a:schemeClr val="accent1">
-              <a:shade val="15000"/>
-            </a:schemeClr>
-          </a:lnRef>
-          <a:fillRef idx="1">
-            <a:schemeClr val="accent1"/>
-          </a:fillRef>
-          <a:effectRef idx="0">
-            <a:schemeClr val="accent1"/>
-          </a:effectRef>
-          <a:fontRef idx="minor">
-            <a:schemeClr val="lt1"/>
-          </a:fontRef>
-        </p:style>
-        <p:txBody>
-          <a:bodyPr rtlCol="0" anchor="ctr"/>
-          <a:lstStyle/>
-          <a:p>
-            <a:pPr algn="ctr"/>
-            <a:endParaRPr lang="en-US"/>
-          </a:p>
-        </p:txBody>
-      </p:sp>
-      <p:sp>
-        <p:nvSpPr>
-          <p:cNvPr id="10" name="CuadroTexto 9">
-            <a:extLst>
-              <a:ext uri="{FF2B5EF4-FFF2-40B4-BE49-F238E27FC236}">
-                <a16:creationId xmlns:a16="http://schemas.microsoft.com/office/drawing/2014/main" id="{3146642F-220B-8F6A-59A8-2D128DDF3BEB}"/>
-              </a:ext>
-            </a:extLst>
-          </p:cNvPr>
-          <p:cNvSpPr txBox="1"/>
-          <p:nvPr/>
-        </p:nvSpPr>
-        <p:spPr>
-          <a:xfrm>
-            <a:off x="3529935" y="2104638"/>
-            <a:ext cx="2033313" cy="1938992"/>
-          </a:xfrm>
-          <a:prstGeom prst="rect">
-            <a:avLst/>
-          </a:prstGeom>
-          <a:noFill/>
-        </p:spPr>
-        <p:txBody>
-          <a:bodyPr wrap="none" rtlCol="0">
-            <a:spAutoFit/>
-          </a:bodyPr>
-          <a:lstStyle/>
-          <a:p>
-            <a:pPr algn="ctr"/>
-            <a:r>
-              <a:rPr lang="es-ES" sz="2000" dirty="0"/>
-              <a:t>Single ring</a:t>
-            </a:r>
-          </a:p>
-          <a:p>
-            <a:pPr algn="ctr"/>
-            <a:r>
-              <a:rPr lang="es-ES" sz="2000" dirty="0"/>
-              <a:t>transfer </a:t>
-            </a:r>
-            <a:r>
-              <a:rPr lang="es-ES" sz="2000" dirty="0" err="1"/>
-              <a:t>functions</a:t>
-            </a:r>
-            <a:endParaRPr lang="es-ES" sz="2000" dirty="0"/>
-          </a:p>
-          <a:p>
-            <a:pPr algn="ctr"/>
-            <a:endParaRPr lang="es-ES" sz="2000" dirty="0"/>
-          </a:p>
-          <a:p>
-            <a:pPr algn="ctr"/>
-            <a:r>
-              <a:rPr lang="es-ES" sz="2000" dirty="0"/>
-              <a:t>Linear </a:t>
-            </a:r>
-            <a:r>
-              <a:rPr lang="es-ES" sz="2000" dirty="0" err="1"/>
-              <a:t>units</a:t>
-            </a:r>
-            <a:endParaRPr lang="es-ES" sz="2000" dirty="0"/>
-          </a:p>
-          <a:p>
-            <a:pPr algn="ctr"/>
-            <a:endParaRPr lang="es-ES" sz="2000" dirty="0"/>
-          </a:p>
-          <a:p>
-            <a:pPr algn="ctr"/>
-            <a:r>
-              <a:rPr lang="es-ES" sz="2000" dirty="0" err="1"/>
-              <a:t>alpha</a:t>
-            </a:r>
-            <a:r>
-              <a:rPr lang="es-ES" sz="2000" dirty="0"/>
-              <a:t>=1 dB/cm</a:t>
-            </a:r>
-            <a:endParaRPr lang="en-US" sz="2000" dirty="0"/>
-          </a:p>
-        </p:txBody>
-      </p:sp>
-      <p:sp>
-        <p:nvSpPr>
-          <p:cNvPr id="13" name="CuadroTexto 12">
-            <a:extLst>
-              <a:ext uri="{FF2B5EF4-FFF2-40B4-BE49-F238E27FC236}">
-                <a16:creationId xmlns:a16="http://schemas.microsoft.com/office/drawing/2014/main" id="{057C499E-829F-FB11-9128-843C937CB822}"/>
-              </a:ext>
-            </a:extLst>
-          </p:cNvPr>
-          <p:cNvSpPr txBox="1"/>
-          <p:nvPr/>
-        </p:nvSpPr>
-        <p:spPr>
-          <a:xfrm>
-            <a:off x="6195187" y="2101891"/>
-            <a:ext cx="2033313" cy="1938992"/>
-          </a:xfrm>
-          <a:prstGeom prst="rect">
-            <a:avLst/>
-          </a:prstGeom>
-          <a:noFill/>
-        </p:spPr>
-        <p:txBody>
-          <a:bodyPr wrap="none" rtlCol="0">
-            <a:spAutoFit/>
-          </a:bodyPr>
-          <a:lstStyle/>
-          <a:p>
-            <a:pPr algn="ctr"/>
-            <a:r>
-              <a:rPr lang="es-ES" sz="2000" dirty="0"/>
-              <a:t>Single ring</a:t>
-            </a:r>
-          </a:p>
-          <a:p>
-            <a:pPr algn="ctr"/>
-            <a:r>
-              <a:rPr lang="es-ES" sz="2000" dirty="0"/>
-              <a:t>transfer </a:t>
-            </a:r>
-            <a:r>
-              <a:rPr lang="es-ES" sz="2000" dirty="0" err="1"/>
-              <a:t>functions</a:t>
-            </a:r>
-            <a:endParaRPr lang="es-ES" sz="2000" dirty="0"/>
-          </a:p>
-          <a:p>
-            <a:pPr algn="ctr"/>
-            <a:endParaRPr lang="es-ES" sz="2000" dirty="0"/>
-          </a:p>
-          <a:p>
-            <a:pPr algn="ctr"/>
-            <a:r>
-              <a:rPr lang="es-ES" sz="2000" dirty="0"/>
-              <a:t>Linear </a:t>
-            </a:r>
-            <a:r>
-              <a:rPr lang="es-ES" sz="2000" dirty="0" err="1"/>
-              <a:t>units</a:t>
-            </a:r>
-            <a:endParaRPr lang="es-ES" sz="2000" dirty="0"/>
-          </a:p>
-          <a:p>
-            <a:pPr algn="ctr"/>
-            <a:endParaRPr lang="es-ES" sz="2000" dirty="0"/>
-          </a:p>
-          <a:p>
-            <a:pPr algn="ctr"/>
-            <a:r>
-              <a:rPr lang="es-ES" sz="2000" dirty="0" err="1"/>
-              <a:t>alpha</a:t>
-            </a:r>
-            <a:r>
-              <a:rPr lang="es-ES" sz="2000" dirty="0"/>
-              <a:t>=2 dB/cm</a:t>
-            </a:r>
-            <a:endParaRPr lang="en-US" sz="2000" dirty="0"/>
-          </a:p>
-        </p:txBody>
-      </p:sp>
-      <p:sp>
-        <p:nvSpPr>
-          <p:cNvPr id="12" name="Rectángulo 11">
-            <a:extLst>
-              <a:ext uri="{FF2B5EF4-FFF2-40B4-BE49-F238E27FC236}">
-                <a16:creationId xmlns:a16="http://schemas.microsoft.com/office/drawing/2014/main" id="{D9D5941A-D9F5-22E7-7E85-0D04C2B214EC}"/>
-              </a:ext>
-            </a:extLst>
-          </p:cNvPr>
-          <p:cNvSpPr/>
-          <p:nvPr/>
-        </p:nvSpPr>
-        <p:spPr>
-          <a:xfrm>
-            <a:off x="8609885" y="1418373"/>
-            <a:ext cx="2538552" cy="3306028"/>
-          </a:xfrm>
-          <a:prstGeom prst="rect">
-            <a:avLst/>
-          </a:prstGeom>
-          <a:noFill/>
-          <a:ln w="28575">
-            <a:solidFill>
-              <a:srgbClr val="E0700D"/>
-            </a:solidFill>
-          </a:ln>
-        </p:spPr>
-        <p:style>
-          <a:lnRef idx="2">
-            <a:schemeClr val="accent1">
-              <a:shade val="15000"/>
-            </a:schemeClr>
-          </a:lnRef>
-          <a:fillRef idx="1">
-            <a:schemeClr val="accent1"/>
-          </a:fillRef>
-          <a:effectRef idx="0">
-            <a:schemeClr val="accent1"/>
-          </a:effectRef>
-          <a:fontRef idx="minor">
-            <a:schemeClr val="lt1"/>
-          </a:fontRef>
-        </p:style>
-        <p:txBody>
-          <a:bodyPr rtlCol="0" anchor="ctr"/>
-          <a:lstStyle/>
-          <a:p>
-            <a:pPr algn="ctr"/>
-            <a:endParaRPr lang="en-US"/>
-          </a:p>
-        </p:txBody>
-      </p:sp>
-      <p:sp>
-        <p:nvSpPr>
-          <p:cNvPr id="16" name="CuadroTexto 15">
-            <a:extLst>
-              <a:ext uri="{FF2B5EF4-FFF2-40B4-BE49-F238E27FC236}">
-                <a16:creationId xmlns:a16="http://schemas.microsoft.com/office/drawing/2014/main" id="{4A6C8490-F65B-32C9-44E8-9A1A1A1B1769}"/>
-              </a:ext>
-            </a:extLst>
-          </p:cNvPr>
-          <p:cNvSpPr txBox="1"/>
-          <p:nvPr/>
-        </p:nvSpPr>
-        <p:spPr>
-          <a:xfrm>
-            <a:off x="8861472" y="2101891"/>
-            <a:ext cx="2033313" cy="1938992"/>
-          </a:xfrm>
-          <a:prstGeom prst="rect">
-            <a:avLst/>
-          </a:prstGeom>
-          <a:noFill/>
-        </p:spPr>
-        <p:txBody>
-          <a:bodyPr wrap="none" rtlCol="0">
-            <a:spAutoFit/>
-          </a:bodyPr>
-          <a:lstStyle/>
-          <a:p>
-            <a:pPr algn="ctr"/>
-            <a:r>
-              <a:rPr lang="es-ES" sz="2000" dirty="0"/>
-              <a:t>Single ring</a:t>
-            </a:r>
-          </a:p>
-          <a:p>
-            <a:pPr algn="ctr"/>
-            <a:r>
-              <a:rPr lang="es-ES" sz="2000" dirty="0"/>
-              <a:t>transfer </a:t>
-            </a:r>
-            <a:r>
-              <a:rPr lang="es-ES" sz="2000" dirty="0" err="1"/>
-              <a:t>functions</a:t>
-            </a:r>
-            <a:endParaRPr lang="es-ES" sz="2000" dirty="0"/>
-          </a:p>
-          <a:p>
-            <a:pPr algn="ctr"/>
-            <a:endParaRPr lang="es-ES" sz="2000" dirty="0"/>
-          </a:p>
-          <a:p>
-            <a:pPr algn="ctr"/>
-            <a:r>
-              <a:rPr lang="es-ES" sz="2000" dirty="0"/>
-              <a:t>Linear </a:t>
-            </a:r>
-            <a:r>
-              <a:rPr lang="es-ES" sz="2000" dirty="0" err="1"/>
-              <a:t>units</a:t>
-            </a:r>
-            <a:endParaRPr lang="es-ES" sz="2000" dirty="0"/>
-          </a:p>
-          <a:p>
-            <a:pPr algn="ctr"/>
-            <a:endParaRPr lang="es-ES" sz="2000" dirty="0"/>
-          </a:p>
-          <a:p>
-            <a:pPr algn="ctr"/>
-            <a:r>
-              <a:rPr lang="es-ES" sz="2000" dirty="0" err="1"/>
-              <a:t>alpha</a:t>
-            </a:r>
-            <a:r>
-              <a:rPr lang="es-ES" sz="2000" dirty="0"/>
-              <a:t>=2 dB/cm</a:t>
-            </a:r>
-            <a:endParaRPr lang="en-US" sz="2000" dirty="0"/>
+            <a:r>
+              <a:rPr lang="es-ES" sz="1200" dirty="0">
+                <a:latin typeface="Arial" panose="020B0604020202020204" pitchFamily="34" charset="0"/>
+                <a:cs typeface="Arial" panose="020B0604020202020204" pitchFamily="34" charset="0"/>
+              </a:rPr>
+              <a:t>La profundidad de las resonancias depende directamente del coeficiente de acoplamiento K: al aumentar K, aumenta la potencia acoplada al anillo y mejora la relación de extinción hasta aproximarse al acoplamiento crítico. </a:t>
+            </a:r>
           </a:p>
         </p:txBody>
       </p:sp>
       <p:pic>
         <p:nvPicPr>
-          <p:cNvPr id="17" name="Gráfico 16">
+          <p:cNvPr id="11" name="Gráfico 10">
             <a:extLst>
               <a:ext uri="{FF2B5EF4-FFF2-40B4-BE49-F238E27FC236}">
-                <a16:creationId xmlns:a16="http://schemas.microsoft.com/office/drawing/2014/main" id="{16D15CB1-2EB9-A3F2-8611-C524CCD1CAE2}"/>
+                <a16:creationId xmlns:a16="http://schemas.microsoft.com/office/drawing/2014/main" id="{64B3EEA8-5B6A-F628-0B9C-42450CEE9BE1}"/>
               </a:ext>
             </a:extLst>
           </p:cNvPr>
@@ -3556,10 +3077,10 @@
       </p:pic>
       <p:sp>
         <p:nvSpPr>
-          <p:cNvPr id="18" name="object 16">
+          <p:cNvPr id="14" name="object 16">
             <a:extLst>
               <a:ext uri="{FF2B5EF4-FFF2-40B4-BE49-F238E27FC236}">
-                <a16:creationId xmlns:a16="http://schemas.microsoft.com/office/drawing/2014/main" id="{989133D6-A9B3-EFEA-2703-51A6BDA0A885}"/>
+                <a16:creationId xmlns:a16="http://schemas.microsoft.com/office/drawing/2014/main" id="{4E9E05B5-9445-DD50-60E9-03B04ED264D4}"/>
               </a:ext>
             </a:extLst>
           </p:cNvPr>
@@ -3601,13 +3122,8 @@
             </a:pPr>
             <a:r>
               <a:rPr lang="en-US" sz="2500" kern="0" dirty="0"/>
-              <a:t>Learning outcome #6b – E</a:t>
-            </a:r>
-            <a:r>
-              <a:rPr lang="en-US" sz="2500" dirty="0"/>
-              <a:t>ffect of loss</a:t>
-            </a:r>
-            <a:endParaRPr lang="en-US" sz="2500" kern="0" dirty="0"/>
+              <a:t>Learning outcome #5 – Ring resonator design</a:t>
+            </a:r>
           </a:p>
           <a:p>
             <a:pPr marL="12700">
@@ -3620,32 +3136,45 @@
                 <a:latin typeface="+mj-lt"/>
                 <a:cs typeface="Lucida Sans"/>
               </a:rPr>
-              <a:t>Change losses value between 0 and 8 </a:t>
-            </a:r>
-            <a:r>
-              <a:rPr lang="en-US" b="0" kern="0" spc="-5" dirty="0">
-                <a:solidFill>
-                  <a:srgbClr val="FF0000"/>
-                </a:solidFill>
-                <a:latin typeface="+mj-lt"/>
-                <a:cs typeface="Lucida Sans"/>
-              </a:rPr>
-              <a:t>dB/cm </a:t>
-            </a:r>
-            <a:r>
-              <a:rPr lang="en-US" b="0" kern="0" spc="-5" dirty="0">
-                <a:latin typeface="+mj-lt"/>
-                <a:cs typeface="Lucida Sans"/>
-              </a:rPr>
-              <a:t>in steps of 1</a:t>
-            </a:r>
-          </a:p>
-        </p:txBody>
-      </p:sp>
+              <a:t>Design the perimeter for a FSR = 15 nm. </a:t>
+            </a:r>
+          </a:p>
+        </p:txBody>
+      </p:sp>
+      <p:pic>
+        <p:nvPicPr>
+          <p:cNvPr id="9" name="Imagen 8">
+            <a:extLst>
+              <a:ext uri="{FF2B5EF4-FFF2-40B4-BE49-F238E27FC236}">
+                <a16:creationId xmlns:a16="http://schemas.microsoft.com/office/drawing/2014/main" id="{B48A4D89-6574-8874-F007-8F93701D1254}"/>
+              </a:ext>
+            </a:extLst>
+          </p:cNvPr>
+          <p:cNvPicPr>
+            <a:picLocks noChangeAspect="1"/>
+          </p:cNvPicPr>
+          <p:nvPr/>
+        </p:nvPicPr>
+        <p:blipFill>
+          <a:blip r:embed="rId3"/>
+          <a:stretch>
+            <a:fillRect/>
+          </a:stretch>
+        </p:blipFill>
+        <p:spPr>
+          <a:xfrm>
+            <a:off x="457200" y="1447800"/>
+            <a:ext cx="7172325" cy="4114800"/>
+          </a:xfrm>
+          <a:prstGeom prst="rect">
+            <a:avLst/>
+          </a:prstGeom>
+        </p:spPr>
+      </p:pic>
     </p:spTree>
     <p:extLst>
       <p:ext uri="{BB962C8B-B14F-4D97-AF65-F5344CB8AC3E}">
-        <p14:creationId xmlns:p14="http://schemas.microsoft.com/office/powerpoint/2010/main" val="1461196698"/>
+        <p14:creationId xmlns:p14="http://schemas.microsoft.com/office/powerpoint/2010/main" val="2915989261"/>
       </p:ext>
     </p:extLst>
   </p:cSld>
@@ -3674,6 +3203,792 @@
       </p:grpSpPr>
       <p:sp>
         <p:nvSpPr>
+          <p:cNvPr id="5" name="Marcador de pie de página 4">
+            <a:extLst>
+              <a:ext uri="{FF2B5EF4-FFF2-40B4-BE49-F238E27FC236}">
+                <a16:creationId xmlns:a16="http://schemas.microsoft.com/office/drawing/2014/main" id="{F929251A-3DC4-36B2-3FB3-341378364BED}"/>
+              </a:ext>
+            </a:extLst>
+          </p:cNvPr>
+          <p:cNvSpPr>
+            <a:spLocks noGrp="1"/>
+          </p:cNvSpPr>
+          <p:nvPr>
+            <p:ph type="ftr" sz="quarter" idx="5"/>
+          </p:nvPr>
+        </p:nvSpPr>
+        <p:spPr/>
+        <p:txBody>
+          <a:bodyPr/>
+          <a:lstStyle/>
+          <a:p>
+            <a:r>
+              <a:rPr lang="en-US"/>
+              <a:t>LAB 3.0. CIRCUITS &amp; COMPACT MODELS</a:t>
+            </a:r>
+          </a:p>
+        </p:txBody>
+      </p:sp>
+      <p:sp>
+        <p:nvSpPr>
+          <p:cNvPr id="6" name="Marcador de número de diapositiva 5">
+            <a:extLst>
+              <a:ext uri="{FF2B5EF4-FFF2-40B4-BE49-F238E27FC236}">
+                <a16:creationId xmlns:a16="http://schemas.microsoft.com/office/drawing/2014/main" id="{8E91A34C-DF76-97CF-3EFD-546BC64A2184}"/>
+              </a:ext>
+            </a:extLst>
+          </p:cNvPr>
+          <p:cNvSpPr>
+            <a:spLocks noGrp="1"/>
+          </p:cNvSpPr>
+          <p:nvPr>
+            <p:ph type="sldNum" sz="quarter" idx="7"/>
+          </p:nvPr>
+        </p:nvSpPr>
+        <p:spPr/>
+        <p:txBody>
+          <a:bodyPr/>
+          <a:lstStyle/>
+          <a:p>
+            <a:fld id="{C2F52289-4012-4053-9770-FE82CEB9514F}" type="slidenum">
+              <a:rPr lang="en-US" smtClean="0"/>
+              <a:pPr/>
+              <a:t>11</a:t>
+            </a:fld>
+            <a:endParaRPr lang="en-US" dirty="0"/>
+          </a:p>
+        </p:txBody>
+      </p:sp>
+      <p:sp>
+        <p:nvSpPr>
+          <p:cNvPr id="8" name="CuadroTexto 7">
+            <a:extLst>
+              <a:ext uri="{FF2B5EF4-FFF2-40B4-BE49-F238E27FC236}">
+                <a16:creationId xmlns:a16="http://schemas.microsoft.com/office/drawing/2014/main" id="{D9601617-351E-AE1A-1F4D-693F2EA59361}"/>
+              </a:ext>
+            </a:extLst>
+          </p:cNvPr>
+          <p:cNvSpPr txBox="1"/>
+          <p:nvPr/>
+        </p:nvSpPr>
+        <p:spPr>
+          <a:xfrm>
+            <a:off x="7391400" y="1148387"/>
+            <a:ext cx="4419600" cy="4524315"/>
+          </a:xfrm>
+          <a:prstGeom prst="rect">
+            <a:avLst/>
+          </a:prstGeom>
+          <a:solidFill>
+            <a:schemeClr val="bg1">
+              <a:lumMod val="95000"/>
+            </a:schemeClr>
+          </a:solidFill>
+          <a:ln w="28575">
+            <a:solidFill>
+              <a:srgbClr val="E0700D"/>
+            </a:solidFill>
+          </a:ln>
+        </p:spPr>
+        <p:txBody>
+          <a:bodyPr wrap="square" rtlCol="0">
+            <a:spAutoFit/>
+          </a:bodyPr>
+          <a:lstStyle/>
+          <a:p>
+            <a:pPr algn="just"/>
+            <a:r>
+              <a:rPr lang="es-ES" sz="1200" dirty="0">
+                <a:latin typeface="Arial" panose="020B0604020202020204" pitchFamily="34" charset="0"/>
+                <a:cs typeface="Arial" panose="020B0604020202020204" pitchFamily="34" charset="0"/>
+              </a:rPr>
+              <a:t>En este apartado se estudia el efecto del coeficiente de acoplamiento (K) sobre la respuesta espectral del resonador en anillo.</a:t>
+            </a:r>
+          </a:p>
+          <a:p>
+            <a:pPr algn="just"/>
+            <a:endParaRPr lang="es-ES" sz="1200" dirty="0">
+              <a:latin typeface="Arial" panose="020B0604020202020204" pitchFamily="34" charset="0"/>
+              <a:cs typeface="Arial" panose="020B0604020202020204" pitchFamily="34" charset="0"/>
+            </a:endParaRPr>
+          </a:p>
+          <a:p>
+            <a:pPr algn="just"/>
+            <a:r>
+              <a:rPr lang="es-ES" sz="1200" dirty="0">
+                <a:latin typeface="Arial" panose="020B0604020202020204" pitchFamily="34" charset="0"/>
+                <a:cs typeface="Arial" panose="020B0604020202020204" pitchFamily="34" charset="0"/>
+              </a:rPr>
+              <a:t>Se observa que el valor de K modifica directamente la profundidad y anchura de las resonancias. Para valores pequeños de acoplamiento, la luz apenas entra en el anillo y las resonancias son poco profundas, correspondiendo al régimen de </a:t>
+            </a:r>
+            <a:r>
+              <a:rPr lang="es-ES" sz="1200" dirty="0" err="1">
+                <a:latin typeface="Arial" panose="020B0604020202020204" pitchFamily="34" charset="0"/>
+                <a:cs typeface="Arial" panose="020B0604020202020204" pitchFamily="34" charset="0"/>
+              </a:rPr>
+              <a:t>subacoplamiento</a:t>
+            </a:r>
+            <a:r>
+              <a:rPr lang="es-ES" sz="1200" dirty="0">
+                <a:latin typeface="Arial" panose="020B0604020202020204" pitchFamily="34" charset="0"/>
+                <a:cs typeface="Arial" panose="020B0604020202020204" pitchFamily="34" charset="0"/>
+              </a:rPr>
+              <a:t>. A medida que aumenta K, la potencia acoplada al resonador crece y la relación de extinción mejora.</a:t>
+            </a:r>
+          </a:p>
+          <a:p>
+            <a:pPr algn="just"/>
+            <a:endParaRPr lang="es-ES" sz="1200" dirty="0">
+              <a:latin typeface="Arial" panose="020B0604020202020204" pitchFamily="34" charset="0"/>
+              <a:cs typeface="Arial" panose="020B0604020202020204" pitchFamily="34" charset="0"/>
+            </a:endParaRPr>
+          </a:p>
+          <a:p>
+            <a:pPr algn="just"/>
+            <a:r>
+              <a:rPr lang="es-ES" sz="1200" dirty="0">
+                <a:latin typeface="Arial" panose="020B0604020202020204" pitchFamily="34" charset="0"/>
+                <a:cs typeface="Arial" panose="020B0604020202020204" pitchFamily="34" charset="0"/>
+              </a:rPr>
+              <a:t>El caso más cercano al acoplamiento crítico se obtiene aproximadamente para K=0.3, ya que se alcanza el mínimo de transmisión más profundo. En esta situación, las pérdidas internas del anillo y las pérdidas por acoplamiento son similares, produciendo una interferencia destructiva casi completa en la salida.</a:t>
+            </a:r>
+          </a:p>
+          <a:p>
+            <a:pPr algn="just"/>
+            <a:endParaRPr lang="es-ES" sz="1200" dirty="0">
+              <a:latin typeface="Arial" panose="020B0604020202020204" pitchFamily="34" charset="0"/>
+              <a:cs typeface="Arial" panose="020B0604020202020204" pitchFamily="34" charset="0"/>
+            </a:endParaRPr>
+          </a:p>
+          <a:p>
+            <a:pPr algn="just"/>
+            <a:r>
+              <a:rPr lang="es-ES" sz="1200" dirty="0">
+                <a:latin typeface="Arial" panose="020B0604020202020204" pitchFamily="34" charset="0"/>
+                <a:cs typeface="Arial" panose="020B0604020202020204" pitchFamily="34" charset="0"/>
+              </a:rPr>
+              <a:t>Para valores de K superiores, el sistema entra progresivamente en régimen de </a:t>
+            </a:r>
+            <a:r>
+              <a:rPr lang="es-ES" sz="1200" dirty="0" err="1">
+                <a:latin typeface="Arial" panose="020B0604020202020204" pitchFamily="34" charset="0"/>
+                <a:cs typeface="Arial" panose="020B0604020202020204" pitchFamily="34" charset="0"/>
+              </a:rPr>
+              <a:t>sobreacoplamiento</a:t>
+            </a:r>
+            <a:r>
+              <a:rPr lang="es-ES" sz="1200" dirty="0">
+                <a:latin typeface="Arial" panose="020B0604020202020204" pitchFamily="34" charset="0"/>
+                <a:cs typeface="Arial" panose="020B0604020202020204" pitchFamily="34" charset="0"/>
+              </a:rPr>
+              <a:t>, donde el acoplamiento domina frente a las pérdidas internas. Esto provoca que las resonancias se vuelvan más anchas y menos profundas, reduciendo la calidad de la resonancia.</a:t>
+            </a:r>
+          </a:p>
+        </p:txBody>
+      </p:sp>
+      <p:pic>
+        <p:nvPicPr>
+          <p:cNvPr id="3" name="Gráfico 2">
+            <a:extLst>
+              <a:ext uri="{FF2B5EF4-FFF2-40B4-BE49-F238E27FC236}">
+                <a16:creationId xmlns:a16="http://schemas.microsoft.com/office/drawing/2014/main" id="{0B245A9E-6C9A-F3A8-E4B7-661580126414}"/>
+              </a:ext>
+            </a:extLst>
+          </p:cNvPr>
+          <p:cNvPicPr>
+            <a:picLocks noChangeAspect="1"/>
+          </p:cNvPicPr>
+          <p:nvPr/>
+        </p:nvPicPr>
+        <p:blipFill>
+          <a:blip>
+            <a:extLst>
+              <a:ext uri="{96DAC541-7B7A-43D3-8B79-37D633B846F1}">
+                <asvg:svgBlip xmlns:asvg="http://schemas.microsoft.com/office/drawing/2016/SVG/main" r:embed="rId2"/>
+              </a:ext>
+            </a:extLst>
+          </a:blip>
+          <a:stretch>
+            <a:fillRect/>
+          </a:stretch>
+        </p:blipFill>
+        <p:spPr>
+          <a:xfrm>
+            <a:off x="5045006" y="6356057"/>
+            <a:ext cx="6409575" cy="363174"/>
+          </a:xfrm>
+          <a:prstGeom prst="rect">
+            <a:avLst/>
+          </a:prstGeom>
+        </p:spPr>
+      </p:pic>
+      <p:sp>
+        <p:nvSpPr>
+          <p:cNvPr id="16" name="object 16">
+            <a:extLst>
+              <a:ext uri="{FF2B5EF4-FFF2-40B4-BE49-F238E27FC236}">
+                <a16:creationId xmlns:a16="http://schemas.microsoft.com/office/drawing/2014/main" id="{8266F13B-05F1-81DE-B638-66D10EEB9FA2}"/>
+              </a:ext>
+            </a:extLst>
+          </p:cNvPr>
+          <p:cNvSpPr txBox="1">
+            <a:spLocks/>
+          </p:cNvSpPr>
+          <p:nvPr/>
+        </p:nvSpPr>
+        <p:spPr>
+          <a:xfrm>
+            <a:off x="685800" y="408883"/>
+            <a:ext cx="10994410" cy="718145"/>
+          </a:xfrm>
+          <a:prstGeom prst="rect">
+            <a:avLst/>
+          </a:prstGeom>
+        </p:spPr>
+        <p:txBody>
+          <a:bodyPr vert="horz" wrap="square" lIns="0" tIns="12700" rIns="0" bIns="0" rtlCol="0">
+            <a:spAutoFit/>
+          </a:bodyPr>
+          <a:lstStyle>
+            <a:lvl1pPr>
+              <a:defRPr sz="2000" b="1" i="0">
+                <a:solidFill>
+                  <a:schemeClr val="tx1"/>
+                </a:solidFill>
+                <a:latin typeface="Calibri"/>
+                <a:ea typeface="+mj-ea"/>
+                <a:cs typeface="Calibri"/>
+              </a:defRPr>
+            </a:lvl1pPr>
+          </a:lstStyle>
+          <a:p>
+            <a:pPr marL="12700">
+              <a:spcBef>
+                <a:spcPts val="100"/>
+              </a:spcBef>
+            </a:pPr>
+            <a:r>
+              <a:rPr lang="en-US" sz="2500" kern="0" dirty="0"/>
+              <a:t>Learning outcome #6a – Effect of K </a:t>
+            </a:r>
+          </a:p>
+          <a:p>
+            <a:pPr marL="12700">
+              <a:spcBef>
+                <a:spcPts val="100"/>
+              </a:spcBef>
+            </a:pPr>
+            <a:r>
+              <a:rPr lang="en-US" b="0" kern="0" spc="-5" dirty="0">
+                <a:latin typeface="+mj-lt"/>
+                <a:cs typeface="Lucida Sans"/>
+              </a:rPr>
+              <a:t>Change K value between 0.1 and 0.9 in steps of 0.1</a:t>
+            </a:r>
+          </a:p>
+        </p:txBody>
+      </p:sp>
+      <p:pic>
+        <p:nvPicPr>
+          <p:cNvPr id="4" name="Imagen 3">
+            <a:extLst>
+              <a:ext uri="{FF2B5EF4-FFF2-40B4-BE49-F238E27FC236}">
+                <a16:creationId xmlns:a16="http://schemas.microsoft.com/office/drawing/2014/main" id="{BB21D267-5328-6916-AC84-CFAD7496DEC9}"/>
+              </a:ext>
+            </a:extLst>
+          </p:cNvPr>
+          <p:cNvPicPr>
+            <a:picLocks noChangeAspect="1"/>
+          </p:cNvPicPr>
+          <p:nvPr/>
+        </p:nvPicPr>
+        <p:blipFill>
+          <a:blip r:embed="rId3"/>
+          <a:stretch>
+            <a:fillRect/>
+          </a:stretch>
+        </p:blipFill>
+        <p:spPr>
+          <a:xfrm>
+            <a:off x="457200" y="1607087"/>
+            <a:ext cx="6686550" cy="4114800"/>
+          </a:xfrm>
+          <a:prstGeom prst="rect">
+            <a:avLst/>
+          </a:prstGeom>
+        </p:spPr>
+      </p:pic>
+    </p:spTree>
+    <p:extLst>
+      <p:ext uri="{BB962C8B-B14F-4D97-AF65-F5344CB8AC3E}">
+        <p14:creationId xmlns:p14="http://schemas.microsoft.com/office/powerpoint/2010/main" val="1931625216"/>
+      </p:ext>
+    </p:extLst>
+  </p:cSld>
+  <p:clrMapOvr>
+    <a:masterClrMapping/>
+  </p:clrMapOvr>
+</p:sld>
+</file>
+
+<file path=ppt/slides/slide12.xml><?xml version="1.0" encoding="utf-8"?>
+<p:sld xmlns:a="http://schemas.openxmlformats.org/drawingml/2006/main" xmlns:r="http://schemas.openxmlformats.org/officeDocument/2006/relationships" xmlns:p="http://schemas.openxmlformats.org/presentationml/2006/main">
+  <p:cSld>
+    <p:spTree>
+      <p:nvGrpSpPr>
+        <p:cNvPr id="1" name=""/>
+        <p:cNvGrpSpPr/>
+        <p:nvPr/>
+      </p:nvGrpSpPr>
+      <p:grpSpPr>
+        <a:xfrm>
+          <a:off x="0" y="0"/>
+          <a:ext cx="0" cy="0"/>
+          <a:chOff x="0" y="0"/>
+          <a:chExt cx="0" cy="0"/>
+        </a:xfrm>
+      </p:grpSpPr>
+      <p:sp>
+        <p:nvSpPr>
+          <p:cNvPr id="5" name="Marcador de pie de página 4">
+            <a:extLst>
+              <a:ext uri="{FF2B5EF4-FFF2-40B4-BE49-F238E27FC236}">
+                <a16:creationId xmlns:a16="http://schemas.microsoft.com/office/drawing/2014/main" id="{F929251A-3DC4-36B2-3FB3-341378364BED}"/>
+              </a:ext>
+            </a:extLst>
+          </p:cNvPr>
+          <p:cNvSpPr>
+            <a:spLocks noGrp="1"/>
+          </p:cNvSpPr>
+          <p:nvPr>
+            <p:ph type="ftr" sz="quarter" idx="5"/>
+          </p:nvPr>
+        </p:nvSpPr>
+        <p:spPr/>
+        <p:txBody>
+          <a:bodyPr/>
+          <a:lstStyle/>
+          <a:p>
+            <a:r>
+              <a:rPr lang="en-US"/>
+              <a:t>LAB 3.0. CIRCUITS &amp; COMPACT MODELS</a:t>
+            </a:r>
+          </a:p>
+        </p:txBody>
+      </p:sp>
+      <p:sp>
+        <p:nvSpPr>
+          <p:cNvPr id="6" name="Marcador de número de diapositiva 5">
+            <a:extLst>
+              <a:ext uri="{FF2B5EF4-FFF2-40B4-BE49-F238E27FC236}">
+                <a16:creationId xmlns:a16="http://schemas.microsoft.com/office/drawing/2014/main" id="{8E91A34C-DF76-97CF-3EFD-546BC64A2184}"/>
+              </a:ext>
+            </a:extLst>
+          </p:cNvPr>
+          <p:cNvSpPr>
+            <a:spLocks noGrp="1"/>
+          </p:cNvSpPr>
+          <p:nvPr>
+            <p:ph type="sldNum" sz="quarter" idx="7"/>
+          </p:nvPr>
+        </p:nvSpPr>
+        <p:spPr/>
+        <p:txBody>
+          <a:bodyPr/>
+          <a:lstStyle/>
+          <a:p>
+            <a:fld id="{C2F52289-4012-4053-9770-FE82CEB9514F}" type="slidenum">
+              <a:rPr lang="en-US" smtClean="0"/>
+              <a:pPr/>
+              <a:t>12</a:t>
+            </a:fld>
+            <a:endParaRPr lang="en-US" dirty="0"/>
+          </a:p>
+        </p:txBody>
+      </p:sp>
+      <p:sp>
+        <p:nvSpPr>
+          <p:cNvPr id="8" name="CuadroTexto 7">
+            <a:extLst>
+              <a:ext uri="{FF2B5EF4-FFF2-40B4-BE49-F238E27FC236}">
+                <a16:creationId xmlns:a16="http://schemas.microsoft.com/office/drawing/2014/main" id="{D9601617-351E-AE1A-1F4D-693F2EA59361}"/>
+              </a:ext>
+            </a:extLst>
+          </p:cNvPr>
+          <p:cNvSpPr txBox="1"/>
+          <p:nvPr/>
+        </p:nvSpPr>
+        <p:spPr>
+          <a:xfrm>
+            <a:off x="8067136" y="982176"/>
+            <a:ext cx="3733359" cy="4893647"/>
+          </a:xfrm>
+          <a:prstGeom prst="rect">
+            <a:avLst/>
+          </a:prstGeom>
+          <a:solidFill>
+            <a:schemeClr val="bg1">
+              <a:lumMod val="95000"/>
+            </a:schemeClr>
+          </a:solidFill>
+          <a:ln w="28575">
+            <a:solidFill>
+              <a:srgbClr val="E0700D"/>
+            </a:solidFill>
+          </a:ln>
+        </p:spPr>
+        <p:txBody>
+          <a:bodyPr wrap="square" rtlCol="0">
+            <a:spAutoFit/>
+          </a:bodyPr>
+          <a:lstStyle/>
+          <a:p>
+            <a:pPr algn="just"/>
+            <a:r>
+              <a:rPr lang="es-ES" sz="1200" dirty="0">
+                <a:latin typeface="Arial" panose="020B0604020202020204" pitchFamily="34" charset="0"/>
+                <a:cs typeface="Arial" panose="020B0604020202020204" pitchFamily="34" charset="0"/>
+              </a:rPr>
+              <a:t>En este apartado se estudia el efecto de las pérdidas internas del resonador sobre la respuesta espectral del anillo.</a:t>
+            </a:r>
+          </a:p>
+          <a:p>
+            <a:pPr algn="just"/>
+            <a:endParaRPr lang="es-ES" sz="1200" dirty="0">
+              <a:latin typeface="Arial" panose="020B0604020202020204" pitchFamily="34" charset="0"/>
+              <a:cs typeface="Arial" panose="020B0604020202020204" pitchFamily="34" charset="0"/>
+            </a:endParaRPr>
+          </a:p>
+          <a:p>
+            <a:pPr algn="just"/>
+            <a:r>
+              <a:rPr lang="es-ES" sz="1200" dirty="0">
+                <a:latin typeface="Arial" panose="020B0604020202020204" pitchFamily="34" charset="0"/>
+                <a:cs typeface="Arial" panose="020B0604020202020204" pitchFamily="34" charset="0"/>
+              </a:rPr>
+              <a:t>Se observa que, al aumentar las pérdidas (</a:t>
+            </a:r>
+            <a:r>
+              <a:rPr lang="es-ES" sz="1200" dirty="0" err="1">
+                <a:latin typeface="Arial" panose="020B0604020202020204" pitchFamily="34" charset="0"/>
+                <a:cs typeface="Arial" panose="020B0604020202020204" pitchFamily="34" charset="0"/>
+              </a:rPr>
+              <a:t>alpha</a:t>
+            </a:r>
+            <a:r>
+              <a:rPr lang="es-ES" sz="1200" dirty="0">
+                <a:latin typeface="Arial" panose="020B0604020202020204" pitchFamily="34" charset="0"/>
+                <a:cs typeface="Arial" panose="020B0604020202020204" pitchFamily="34" charset="0"/>
+              </a:rPr>
+              <a:t>), las resonancias se vuelven más profundas y el mínimo de transmisión disminuye. Esto indica que el sistema se aproxima progresivamente al régimen de acoplamiento crítico, donde las pérdidas internas del anillo se igualan aproximadamente con las pérdidas de acoplamiento.</a:t>
+            </a:r>
+          </a:p>
+          <a:p>
+            <a:pPr algn="just"/>
+            <a:endParaRPr lang="es-ES" sz="1200" dirty="0">
+              <a:latin typeface="Arial" panose="020B0604020202020204" pitchFamily="34" charset="0"/>
+              <a:cs typeface="Arial" panose="020B0604020202020204" pitchFamily="34" charset="0"/>
+            </a:endParaRPr>
+          </a:p>
+          <a:p>
+            <a:pPr algn="just"/>
+            <a:r>
+              <a:rPr lang="es-ES" sz="1200" dirty="0">
+                <a:latin typeface="Arial" panose="020B0604020202020204" pitchFamily="34" charset="0"/>
+                <a:cs typeface="Arial" panose="020B0604020202020204" pitchFamily="34" charset="0"/>
+              </a:rPr>
+              <a:t>Para valores bajos de pérdidas, especialmente entre </a:t>
+            </a:r>
+            <a:r>
+              <a:rPr lang="es-ES" sz="1200" dirty="0" err="1">
+                <a:latin typeface="Arial" panose="020B0604020202020204" pitchFamily="34" charset="0"/>
+                <a:cs typeface="Arial" panose="020B0604020202020204" pitchFamily="34" charset="0"/>
+              </a:rPr>
+              <a:t>alpha</a:t>
+            </a:r>
+            <a:r>
+              <a:rPr lang="es-ES" sz="1200" dirty="0">
+                <a:latin typeface="Arial" panose="020B0604020202020204" pitchFamily="34" charset="0"/>
+                <a:cs typeface="Arial" panose="020B0604020202020204" pitchFamily="34" charset="0"/>
+              </a:rPr>
+              <a:t> = 0 dB/cm y </a:t>
+            </a:r>
+            <a:r>
+              <a:rPr lang="es-ES" sz="1200" dirty="0" err="1">
+                <a:latin typeface="Arial" panose="020B0604020202020204" pitchFamily="34" charset="0"/>
+                <a:cs typeface="Arial" panose="020B0604020202020204" pitchFamily="34" charset="0"/>
+              </a:rPr>
+              <a:t>alpha</a:t>
+            </a:r>
+            <a:r>
+              <a:rPr lang="es-ES" sz="1200" dirty="0">
+                <a:latin typeface="Arial" panose="020B0604020202020204" pitchFamily="34" charset="0"/>
+                <a:cs typeface="Arial" panose="020B0604020202020204" pitchFamily="34" charset="0"/>
+              </a:rPr>
+              <a:t> = 1 dB/cm, el resonador se encuentra en régimen de </a:t>
+            </a:r>
+            <a:r>
+              <a:rPr lang="es-ES" sz="1200" dirty="0" err="1">
+                <a:latin typeface="Arial" panose="020B0604020202020204" pitchFamily="34" charset="0"/>
+                <a:cs typeface="Arial" panose="020B0604020202020204" pitchFamily="34" charset="0"/>
+              </a:rPr>
+              <a:t>sobreacoplamiento</a:t>
+            </a:r>
+            <a:r>
+              <a:rPr lang="es-ES" sz="1200" dirty="0">
+                <a:latin typeface="Arial" panose="020B0604020202020204" pitchFamily="34" charset="0"/>
+                <a:cs typeface="Arial" panose="020B0604020202020204" pitchFamily="34" charset="0"/>
+              </a:rPr>
+              <a:t>, ya que el acoplamiento domina frente a las pérdidas internas y la luz continúa recirculando dentro del anillo.</a:t>
+            </a:r>
+          </a:p>
+          <a:p>
+            <a:pPr algn="just"/>
+            <a:endParaRPr lang="es-ES" sz="1200" dirty="0">
+              <a:latin typeface="Arial" panose="020B0604020202020204" pitchFamily="34" charset="0"/>
+              <a:cs typeface="Arial" panose="020B0604020202020204" pitchFamily="34" charset="0"/>
+            </a:endParaRPr>
+          </a:p>
+          <a:p>
+            <a:pPr algn="just"/>
+            <a:r>
+              <a:rPr lang="es-ES" sz="1200" dirty="0">
+                <a:latin typeface="Arial" panose="020B0604020202020204" pitchFamily="34" charset="0"/>
+                <a:cs typeface="Arial" panose="020B0604020202020204" pitchFamily="34" charset="0"/>
+              </a:rPr>
+              <a:t>A medida que </a:t>
+            </a:r>
+            <a:r>
+              <a:rPr lang="es-ES" sz="1200" dirty="0" err="1">
+                <a:latin typeface="Arial" panose="020B0604020202020204" pitchFamily="34" charset="0"/>
+                <a:cs typeface="Arial" panose="020B0604020202020204" pitchFamily="34" charset="0"/>
+              </a:rPr>
+              <a:t>alpha</a:t>
+            </a:r>
+            <a:r>
+              <a:rPr lang="es-ES" sz="1200" dirty="0">
+                <a:latin typeface="Arial" panose="020B0604020202020204" pitchFamily="34" charset="0"/>
+                <a:cs typeface="Arial" panose="020B0604020202020204" pitchFamily="34" charset="0"/>
+              </a:rPr>
+              <a:t> aumenta, la potencia recirculante disminuye y las resonancias presentan un mayor </a:t>
+            </a:r>
+            <a:r>
+              <a:rPr lang="es-ES" sz="1200" dirty="0" err="1">
+                <a:latin typeface="Arial" panose="020B0604020202020204" pitchFamily="34" charset="0"/>
+                <a:cs typeface="Arial" panose="020B0604020202020204" pitchFamily="34" charset="0"/>
+              </a:rPr>
+              <a:t>extinction</a:t>
+            </a:r>
+            <a:r>
+              <a:rPr lang="es-ES" sz="1200" dirty="0">
+                <a:latin typeface="Arial" panose="020B0604020202020204" pitchFamily="34" charset="0"/>
+                <a:cs typeface="Arial" panose="020B0604020202020204" pitchFamily="34" charset="0"/>
+              </a:rPr>
+              <a:t> ratio. Los casos con mayores pérdidas (</a:t>
+            </a:r>
+            <a:r>
+              <a:rPr lang="es-ES" sz="1200" dirty="0" err="1">
+                <a:latin typeface="Arial" panose="020B0604020202020204" pitchFamily="34" charset="0"/>
+                <a:cs typeface="Arial" panose="020B0604020202020204" pitchFamily="34" charset="0"/>
+              </a:rPr>
+              <a:t>alpha</a:t>
+            </a:r>
+            <a:r>
+              <a:rPr lang="es-ES" sz="1200" dirty="0">
+                <a:latin typeface="Arial" panose="020B0604020202020204" pitchFamily="34" charset="0"/>
+                <a:cs typeface="Arial" panose="020B0604020202020204" pitchFamily="34" charset="0"/>
+              </a:rPr>
+              <a:t> cercanas a 8 dB/cm) son los más próximos al acoplamiento crítico, aunque no se alcanza completamente dicha condición en el barrido realizado.</a:t>
+            </a:r>
+          </a:p>
+        </p:txBody>
+      </p:sp>
+      <p:pic>
+        <p:nvPicPr>
+          <p:cNvPr id="17" name="Gráfico 16">
+            <a:extLst>
+              <a:ext uri="{FF2B5EF4-FFF2-40B4-BE49-F238E27FC236}">
+                <a16:creationId xmlns:a16="http://schemas.microsoft.com/office/drawing/2014/main" id="{16D15CB1-2EB9-A3F2-8611-C524CCD1CAE2}"/>
+              </a:ext>
+            </a:extLst>
+          </p:cNvPr>
+          <p:cNvPicPr>
+            <a:picLocks noChangeAspect="1"/>
+          </p:cNvPicPr>
+          <p:nvPr/>
+        </p:nvPicPr>
+        <p:blipFill>
+          <a:blip>
+            <a:extLst>
+              <a:ext uri="{96DAC541-7B7A-43D3-8B79-37D633B846F1}">
+                <asvg:svgBlip xmlns:asvg="http://schemas.microsoft.com/office/drawing/2016/SVG/main" r:embed="rId2"/>
+              </a:ext>
+            </a:extLst>
+          </a:blip>
+          <a:stretch>
+            <a:fillRect/>
+          </a:stretch>
+        </p:blipFill>
+        <p:spPr>
+          <a:xfrm>
+            <a:off x="5045006" y="6356057"/>
+            <a:ext cx="6409575" cy="363174"/>
+          </a:xfrm>
+          <a:prstGeom prst="rect">
+            <a:avLst/>
+          </a:prstGeom>
+        </p:spPr>
+      </p:pic>
+      <p:sp>
+        <p:nvSpPr>
+          <p:cNvPr id="18" name="object 16">
+            <a:extLst>
+              <a:ext uri="{FF2B5EF4-FFF2-40B4-BE49-F238E27FC236}">
+                <a16:creationId xmlns:a16="http://schemas.microsoft.com/office/drawing/2014/main" id="{989133D6-A9B3-EFEA-2703-51A6BDA0A885}"/>
+              </a:ext>
+            </a:extLst>
+          </p:cNvPr>
+          <p:cNvSpPr txBox="1">
+            <a:spLocks/>
+          </p:cNvSpPr>
+          <p:nvPr/>
+        </p:nvSpPr>
+        <p:spPr>
+          <a:xfrm>
+            <a:off x="685800" y="408883"/>
+            <a:ext cx="10994410" cy="718145"/>
+          </a:xfrm>
+          <a:prstGeom prst="rect">
+            <a:avLst/>
+          </a:prstGeom>
+        </p:spPr>
+        <p:txBody>
+          <a:bodyPr vert="horz" wrap="square" lIns="0" tIns="12700" rIns="0" bIns="0" rtlCol="0">
+            <a:spAutoFit/>
+          </a:bodyPr>
+          <a:lstStyle>
+            <a:lvl1pPr>
+              <a:defRPr sz="2000" b="1" i="0">
+                <a:solidFill>
+                  <a:schemeClr val="tx1"/>
+                </a:solidFill>
+                <a:latin typeface="Calibri"/>
+                <a:ea typeface="+mj-ea"/>
+                <a:cs typeface="Calibri"/>
+              </a:defRPr>
+            </a:lvl1pPr>
+          </a:lstStyle>
+          <a:p>
+            <a:pPr marL="12700">
+              <a:spcBef>
+                <a:spcPts val="100"/>
+              </a:spcBef>
+            </a:pPr>
+            <a:r>
+              <a:rPr lang="en-US" sz="2500" kern="0" dirty="0"/>
+              <a:t>Learning outcome #6b – E</a:t>
+            </a:r>
+            <a:r>
+              <a:rPr lang="en-US" sz="2500" dirty="0"/>
+              <a:t>ffect of loss</a:t>
+            </a:r>
+            <a:endParaRPr lang="en-US" sz="2500" kern="0" dirty="0"/>
+          </a:p>
+          <a:p>
+            <a:pPr marL="12700">
+              <a:spcBef>
+                <a:spcPts val="100"/>
+              </a:spcBef>
+            </a:pPr>
+            <a:r>
+              <a:rPr lang="en-US" b="0" kern="0" spc="-5" dirty="0">
+                <a:latin typeface="+mj-lt"/>
+                <a:cs typeface="Lucida Sans"/>
+              </a:rPr>
+              <a:t>Change losses value between 0 and 8 </a:t>
+            </a:r>
+            <a:r>
+              <a:rPr lang="en-US" b="0" kern="0" spc="-5" dirty="0">
+                <a:solidFill>
+                  <a:srgbClr val="FF0000"/>
+                </a:solidFill>
+                <a:latin typeface="+mj-lt"/>
+                <a:cs typeface="Lucida Sans"/>
+              </a:rPr>
+              <a:t>dB/cm </a:t>
+            </a:r>
+            <a:r>
+              <a:rPr lang="en-US" b="0" kern="0" spc="-5" dirty="0">
+                <a:latin typeface="+mj-lt"/>
+                <a:cs typeface="Lucida Sans"/>
+              </a:rPr>
+              <a:t>in steps of 1</a:t>
+            </a:r>
+          </a:p>
+        </p:txBody>
+      </p:sp>
+      <p:pic>
+        <p:nvPicPr>
+          <p:cNvPr id="3" name="Imagen 2">
+            <a:extLst>
+              <a:ext uri="{FF2B5EF4-FFF2-40B4-BE49-F238E27FC236}">
+                <a16:creationId xmlns:a16="http://schemas.microsoft.com/office/drawing/2014/main" id="{FD584FC2-DD8D-F2EB-67CE-5D96C8DA625D}"/>
+              </a:ext>
+            </a:extLst>
+          </p:cNvPr>
+          <p:cNvPicPr>
+            <a:picLocks noChangeAspect="1"/>
+          </p:cNvPicPr>
+          <p:nvPr/>
+        </p:nvPicPr>
+        <p:blipFill>
+          <a:blip r:embed="rId3"/>
+          <a:stretch>
+            <a:fillRect/>
+          </a:stretch>
+        </p:blipFill>
+        <p:spPr>
+          <a:xfrm>
+            <a:off x="384316" y="1606326"/>
+            <a:ext cx="7515225" cy="4114800"/>
+          </a:xfrm>
+          <a:prstGeom prst="rect">
+            <a:avLst/>
+          </a:prstGeom>
+        </p:spPr>
+      </p:pic>
+    </p:spTree>
+    <p:extLst>
+      <p:ext uri="{BB962C8B-B14F-4D97-AF65-F5344CB8AC3E}">
+        <p14:creationId xmlns:p14="http://schemas.microsoft.com/office/powerpoint/2010/main" val="1461196698"/>
+      </p:ext>
+    </p:extLst>
+  </p:cSld>
+  <p:clrMapOvr>
+    <a:masterClrMapping/>
+  </p:clrMapOvr>
+</p:sld>
+</file>
+
+<file path=ppt/slides/slide13.xml><?xml version="1.0" encoding="utf-8"?>
+<p:sld xmlns:a="http://schemas.openxmlformats.org/drawingml/2006/main" xmlns:r="http://schemas.openxmlformats.org/officeDocument/2006/relationships" xmlns:p="http://schemas.openxmlformats.org/presentationml/2006/main">
+  <p:cSld>
+    <p:spTree>
+      <p:nvGrpSpPr>
+        <p:cNvPr id="1" name=""/>
+        <p:cNvGrpSpPr/>
+        <p:nvPr/>
+      </p:nvGrpSpPr>
+      <p:grpSpPr>
+        <a:xfrm>
+          <a:off x="0" y="0"/>
+          <a:ext cx="0" cy="0"/>
+          <a:chOff x="0" y="0"/>
+          <a:chExt cx="0" cy="0"/>
+        </a:xfrm>
+      </p:grpSpPr>
+      <p:sp>
+        <p:nvSpPr>
           <p:cNvPr id="3" name="object 3"/>
           <p:cNvSpPr/>
           <p:nvPr/>
@@ -3794,7 +4109,7 @@
           <a:p>
             <a:fld id="{B6F15528-21DE-4FAA-801E-634DDDAF4B2B}" type="slidenum">
               <a:rPr lang="es-ES" smtClean="0"/>
-              <a:t>11</a:t>
+              <a:t>13</a:t>
             </a:fld>
             <a:endParaRPr lang="es-ES"/>
           </a:p>
@@ -4974,7 +5289,7 @@
         <p:spPr>
           <a:xfrm>
             <a:off x="609441" y="4860334"/>
-            <a:ext cx="11199971" cy="1200329"/>
+            <a:ext cx="11199971" cy="830997"/>
           </a:xfrm>
           <a:prstGeom prst="rect">
             <a:avLst/>
@@ -4998,43 +5313,26 @@
           <a:p>
             <a:pPr algn="just"/>
             <a:r>
-              <a:rPr lang="en-US" sz="1200" dirty="0">
-                <a:latin typeface="Arial" panose="020B0604020202020204" pitchFamily="34" charset="0"/>
-                <a:cs typeface="Arial" panose="020B0604020202020204" pitchFamily="34" charset="0"/>
-              </a:rPr>
-              <a:t>Document and comment your results</a:t>
-            </a:r>
-          </a:p>
-          <a:p>
-            <a:pPr algn="just"/>
-            <a:endParaRPr lang="en-US" sz="1200" dirty="0">
-              <a:latin typeface="Arial" panose="020B0604020202020204" pitchFamily="34" charset="0"/>
-              <a:cs typeface="Arial" panose="020B0604020202020204" pitchFamily="34" charset="0"/>
-            </a:endParaRPr>
-          </a:p>
-          <a:p>
-            <a:pPr algn="just"/>
-            <a:endParaRPr lang="en-US" sz="1200" dirty="0">
-              <a:latin typeface="Arial" panose="020B0604020202020204" pitchFamily="34" charset="0"/>
-              <a:cs typeface="Arial" panose="020B0604020202020204" pitchFamily="34" charset="0"/>
-            </a:endParaRPr>
-          </a:p>
-          <a:p>
-            <a:pPr algn="just"/>
-            <a:endParaRPr lang="en-US" sz="1200" dirty="0">
-              <a:latin typeface="Arial" panose="020B0604020202020204" pitchFamily="34" charset="0"/>
-              <a:cs typeface="Arial" panose="020B0604020202020204" pitchFamily="34" charset="0"/>
-            </a:endParaRPr>
-          </a:p>
-          <a:p>
-            <a:pPr algn="just"/>
-            <a:endParaRPr lang="en-US" sz="1200" dirty="0">
-              <a:latin typeface="Arial" panose="020B0604020202020204" pitchFamily="34" charset="0"/>
-              <a:cs typeface="Arial" panose="020B0604020202020204" pitchFamily="34" charset="0"/>
-            </a:endParaRPr>
-          </a:p>
-          <a:p>
-            <a:pPr algn="just"/>
+              <a:rPr lang="es-ES" sz="1200" dirty="0">
+                <a:latin typeface="Arial" panose="020B0604020202020204" pitchFamily="34" charset="0"/>
+                <a:cs typeface="Arial" panose="020B0604020202020204" pitchFamily="34" charset="0"/>
+              </a:rPr>
+              <a:t>En este caso el interferómetro MZ está balanceado, ya que ambos brazos tienen la misma longitud (</a:t>
+            </a:r>
+            <a:r>
+              <a:rPr lang="es-ES" sz="1200" dirty="0" err="1">
+                <a:latin typeface="Arial" panose="020B0604020202020204" pitchFamily="34" charset="0"/>
+                <a:cs typeface="Arial" panose="020B0604020202020204" pitchFamily="34" charset="0"/>
+              </a:rPr>
+              <a:t>dL</a:t>
+            </a:r>
+            <a:r>
+              <a:rPr lang="es-ES" sz="1200" dirty="0">
+                <a:latin typeface="Arial" panose="020B0604020202020204" pitchFamily="34" charset="0"/>
+                <a:cs typeface="Arial" panose="020B0604020202020204" pitchFamily="34" charset="0"/>
+              </a:rPr>
+              <a:t>=0). Por ello, la diferencia de fase entre los dos caminos es nula y la respuesta no depende de la longitud de onda, obteniéndose funciones de transferencia planas. La potencia óptica se divide de forma equilibrada en el primer acoplador y, al recombinarse en el segundo, se produce interferencia constructiva en la salida H01 e interferencia destructiva en H00. Como resultado, prácticamente toda la potencia aparece en la salida out1, mientras que la transmisión en out0 es prácticamente nula en todo el rango espectral.</a:t>
+            </a:r>
             <a:endParaRPr lang="en-US" sz="1200" dirty="0">
               <a:latin typeface="Arial" panose="020B0604020202020204" pitchFamily="34" charset="0"/>
               <a:cs typeface="Arial" panose="020B0604020202020204" pitchFamily="34" charset="0"/>
@@ -5094,58 +5392,36 @@
           </a:p>
         </p:txBody>
       </p:sp>
-      <p:sp>
-        <p:nvSpPr>
-          <p:cNvPr id="7" name="CuadroTexto 6">
+      <p:pic>
+        <p:nvPicPr>
+          <p:cNvPr id="9" name="Imagen 8">
             <a:extLst>
               <a:ext uri="{FF2B5EF4-FFF2-40B4-BE49-F238E27FC236}">
-                <a16:creationId xmlns:a16="http://schemas.microsoft.com/office/drawing/2014/main" id="{024B9AF7-5B09-CE7C-68D9-8620B8F4F607}"/>
+                <a16:creationId xmlns:a16="http://schemas.microsoft.com/office/drawing/2014/main" id="{8E6EF632-8FAD-1D3E-6915-21A0444AC1CD}"/>
               </a:ext>
             </a:extLst>
           </p:cNvPr>
-          <p:cNvSpPr txBox="1"/>
+          <p:cNvPicPr>
+            <a:picLocks noChangeAspect="1"/>
+          </p:cNvPicPr>
           <p:nvPr/>
-        </p:nvSpPr>
+        </p:nvPicPr>
+        <p:blipFill>
+          <a:blip r:embed="rId4"/>
+          <a:stretch>
+            <a:fillRect/>
+          </a:stretch>
+        </p:blipFill>
         <p:spPr>
           <a:xfrm>
-            <a:off x="1690195" y="2494306"/>
-            <a:ext cx="3171061" cy="1154162"/>
+            <a:off x="651126" y="1639659"/>
+            <a:ext cx="5181759" cy="2903398"/>
           </a:xfrm>
           <a:prstGeom prst="rect">
             <a:avLst/>
           </a:prstGeom>
-          <a:noFill/>
         </p:spPr>
-        <p:txBody>
-          <a:bodyPr wrap="none" rtlCol="0">
-            <a:spAutoFit/>
-          </a:bodyPr>
-          <a:lstStyle/>
-          <a:p>
-            <a:pPr algn="ctr"/>
-            <a:r>
-              <a:rPr lang="es-ES" dirty="0"/>
-              <a:t>MZI transfer </a:t>
-            </a:r>
-            <a:r>
-              <a:rPr lang="es-ES" dirty="0" err="1"/>
-              <a:t>functions</a:t>
-            </a:r>
-            <a:endParaRPr lang="en-US" dirty="0"/>
-          </a:p>
-          <a:p>
-            <a:pPr algn="ctr"/>
-            <a:endParaRPr lang="en-US" dirty="0"/>
-          </a:p>
-          <a:p>
-            <a:pPr algn="ctr"/>
-            <a:r>
-              <a:rPr lang="en-US" dirty="0"/>
-              <a:t>Paste plot here</a:t>
-            </a:r>
-          </a:p>
-        </p:txBody>
-      </p:sp>
+      </p:pic>
     </p:spTree>
     <p:extLst>
       <p:ext uri="{BB962C8B-B14F-4D97-AF65-F5344CB8AC3E}">
@@ -5629,7 +5905,7 @@
         <p:spPr>
           <a:xfrm>
             <a:off x="609441" y="4860334"/>
-            <a:ext cx="11199971" cy="1200329"/>
+            <a:ext cx="11199971" cy="1015663"/>
           </a:xfrm>
           <a:prstGeom prst="rect">
             <a:avLst/>
@@ -5653,46 +5929,54 @@
           <a:p>
             <a:pPr algn="just"/>
             <a:r>
-              <a:rPr lang="en-US" sz="1200" dirty="0">
-                <a:latin typeface="Arial" panose="020B0604020202020204" pitchFamily="34" charset="0"/>
-                <a:cs typeface="Arial" panose="020B0604020202020204" pitchFamily="34" charset="0"/>
-              </a:rPr>
-              <a:t>Comment results: describe the transfer function, which is the FSR? How is it related to the length difference among arms? </a:t>
-            </a:r>
-          </a:p>
-          <a:p>
-            <a:pPr algn="just"/>
-            <a:endParaRPr lang="en-US" sz="1200" dirty="0">
-              <a:latin typeface="Arial" panose="020B0604020202020204" pitchFamily="34" charset="0"/>
-              <a:cs typeface="Arial" panose="020B0604020202020204" pitchFamily="34" charset="0"/>
-            </a:endParaRPr>
-          </a:p>
-          <a:p>
-            <a:pPr algn="just"/>
-            <a:endParaRPr lang="en-US" sz="1200" dirty="0">
-              <a:latin typeface="Arial" panose="020B0604020202020204" pitchFamily="34" charset="0"/>
-              <a:cs typeface="Arial" panose="020B0604020202020204" pitchFamily="34" charset="0"/>
-            </a:endParaRPr>
-          </a:p>
-          <a:p>
-            <a:pPr algn="just"/>
-            <a:r>
-              <a:rPr lang="en-US" sz="1200" dirty="0">
-                <a:latin typeface="Arial" panose="020B0604020202020204" pitchFamily="34" charset="0"/>
-                <a:cs typeface="Arial" panose="020B0604020202020204" pitchFamily="34" charset="0"/>
-              </a:rPr>
-              <a:t>Show a numeric calculation of the FSR and length difference matching the results in the graph,</a:t>
-            </a:r>
-          </a:p>
-          <a:p>
-            <a:pPr algn="just"/>
-            <a:endParaRPr lang="en-US" sz="1200" dirty="0">
-              <a:latin typeface="Arial" panose="020B0604020202020204" pitchFamily="34" charset="0"/>
-              <a:cs typeface="Arial" panose="020B0604020202020204" pitchFamily="34" charset="0"/>
-            </a:endParaRPr>
-          </a:p>
-          <a:p>
-            <a:pPr algn="just"/>
+              <a:rPr lang="es-ES" sz="1200" dirty="0">
+                <a:latin typeface="Arial" panose="020B0604020202020204" pitchFamily="34" charset="0"/>
+                <a:cs typeface="Arial" panose="020B0604020202020204" pitchFamily="34" charset="0"/>
+              </a:rPr>
+              <a:t>En este caso el MZI está desbalanceado, ya que existe una diferencia de longitud entre brazos de </a:t>
+            </a:r>
+            <a:r>
+              <a:rPr lang="es-ES" sz="1200" dirty="0" err="1">
+                <a:latin typeface="Arial" panose="020B0604020202020204" pitchFamily="34" charset="0"/>
+                <a:cs typeface="Arial" panose="020B0604020202020204" pitchFamily="34" charset="0"/>
+              </a:rPr>
+              <a:t>dL</a:t>
+            </a:r>
+            <a:r>
+              <a:rPr lang="es-ES" sz="1200" dirty="0">
+                <a:latin typeface="Arial" panose="020B0604020202020204" pitchFamily="34" charset="0"/>
+                <a:cs typeface="Arial" panose="020B0604020202020204" pitchFamily="34" charset="0"/>
+              </a:rPr>
+              <a:t>=100um. Por ello, la función de transferencia deja de ser plana y aparece una respuesta periódica en función de la longitud de onda. Las salidas H00 y H01 presentan máximos y mínimos alternados debido a la interferencia constructiva y destructiva entre ambos caminos ópticos. El FSR se calcula mediante: FSR = (lambda^2)/(ng*ΔL) -&gt; FSR = (1.55um^2)/(2⋅100um) = 0.012 </a:t>
+            </a:r>
+            <a:r>
+              <a:rPr lang="es-ES" sz="1200" dirty="0" err="1">
+                <a:latin typeface="Arial" panose="020B0604020202020204" pitchFamily="34" charset="0"/>
+                <a:cs typeface="Arial" panose="020B0604020202020204" pitchFamily="34" charset="0"/>
+              </a:rPr>
+              <a:t>um</a:t>
+            </a:r>
+            <a:r>
+              <a:rPr lang="es-ES" sz="1200" dirty="0">
+                <a:latin typeface="Arial" panose="020B0604020202020204" pitchFamily="34" charset="0"/>
+                <a:cs typeface="Arial" panose="020B0604020202020204" pitchFamily="34" charset="0"/>
+              </a:rPr>
+              <a:t> ≈ 12 nm Este valor coincide aproximadamente con la separación observada entre máximos consecutivos de la gráfica. Además, el FSR depende inversamente de la diferencia de longitud entre brazos: cuanto mayor es </a:t>
+            </a:r>
+            <a:r>
+              <a:rPr lang="es-ES" sz="1200" dirty="0" err="1">
+                <a:latin typeface="Arial" panose="020B0604020202020204" pitchFamily="34" charset="0"/>
+                <a:cs typeface="Arial" panose="020B0604020202020204" pitchFamily="34" charset="0"/>
+              </a:rPr>
+              <a:t>dL</a:t>
+            </a:r>
+            <a:r>
+              <a:rPr lang="es-ES" sz="1200" dirty="0">
+                <a:latin typeface="Arial" panose="020B0604020202020204" pitchFamily="34" charset="0"/>
+                <a:cs typeface="Arial" panose="020B0604020202020204" pitchFamily="34" charset="0"/>
+              </a:rPr>
+              <a:t>, más juntas aparecen las resonancias y menor es el FSR.</a:t>
+            </a:r>
             <a:endParaRPr lang="en-US" sz="1200" dirty="0">
               <a:latin typeface="Arial" panose="020B0604020202020204" pitchFamily="34" charset="0"/>
               <a:cs typeface="Arial" panose="020B0604020202020204" pitchFamily="34" charset="0"/>
@@ -5752,58 +6036,36 @@
           </a:p>
         </p:txBody>
       </p:sp>
-      <p:sp>
-        <p:nvSpPr>
-          <p:cNvPr id="7" name="CuadroTexto 6">
+      <p:pic>
+        <p:nvPicPr>
+          <p:cNvPr id="9" name="Imagen 8">
             <a:extLst>
               <a:ext uri="{FF2B5EF4-FFF2-40B4-BE49-F238E27FC236}">
-                <a16:creationId xmlns:a16="http://schemas.microsoft.com/office/drawing/2014/main" id="{8934523B-51D9-2926-EAC0-7EAD4D1D5B75}"/>
+                <a16:creationId xmlns:a16="http://schemas.microsoft.com/office/drawing/2014/main" id="{47FD8891-5D5F-AC8B-EA0F-1217F0D17C97}"/>
               </a:ext>
             </a:extLst>
           </p:cNvPr>
-          <p:cNvSpPr txBox="1"/>
+          <p:cNvPicPr>
+            <a:picLocks noChangeAspect="1"/>
+          </p:cNvPicPr>
           <p:nvPr/>
-        </p:nvSpPr>
+        </p:nvPicPr>
+        <p:blipFill>
+          <a:blip r:embed="rId4"/>
+          <a:stretch>
+            <a:fillRect/>
+          </a:stretch>
+        </p:blipFill>
         <p:spPr>
           <a:xfrm>
-            <a:off x="1690195" y="2494306"/>
-            <a:ext cx="3171061" cy="1154162"/>
+            <a:off x="666859" y="1597312"/>
+            <a:ext cx="5217734" cy="2856858"/>
           </a:xfrm>
           <a:prstGeom prst="rect">
             <a:avLst/>
           </a:prstGeom>
-          <a:noFill/>
         </p:spPr>
-        <p:txBody>
-          <a:bodyPr wrap="none" rtlCol="0">
-            <a:spAutoFit/>
-          </a:bodyPr>
-          <a:lstStyle/>
-          <a:p>
-            <a:pPr algn="ctr"/>
-            <a:r>
-              <a:rPr lang="es-ES" dirty="0"/>
-              <a:t>MZI transfer </a:t>
-            </a:r>
-            <a:r>
-              <a:rPr lang="es-ES" dirty="0" err="1"/>
-              <a:t>functions</a:t>
-            </a:r>
-            <a:endParaRPr lang="en-US" dirty="0"/>
-          </a:p>
-          <a:p>
-            <a:pPr algn="ctr"/>
-            <a:endParaRPr lang="en-US" dirty="0"/>
-          </a:p>
-          <a:p>
-            <a:pPr algn="ctr"/>
-            <a:r>
-              <a:rPr lang="en-US" dirty="0"/>
-              <a:t>Paste plot here</a:t>
-            </a:r>
-          </a:p>
-        </p:txBody>
-      </p:sp>
+      </p:pic>
     </p:spTree>
     <p:extLst>
       <p:ext uri="{BB962C8B-B14F-4D97-AF65-F5344CB8AC3E}">
@@ -5907,7 +6169,7 @@
         <p:spPr>
           <a:xfrm>
             <a:off x="611029" y="4860335"/>
-            <a:ext cx="11199530" cy="1015663"/>
+            <a:ext cx="11199530" cy="1384995"/>
           </a:xfrm>
           <a:prstGeom prst="rect">
             <a:avLst/>
@@ -5931,29 +6193,58 @@
           <a:p>
             <a:pPr algn="just"/>
             <a:r>
-              <a:rPr lang="en-US" sz="1200" dirty="0">
-                <a:latin typeface="Arial" panose="020B0604020202020204" pitchFamily="34" charset="0"/>
-                <a:cs typeface="Arial" panose="020B0604020202020204" pitchFamily="34" charset="0"/>
-              </a:rPr>
-              <a:t>Comment results:</a:t>
-            </a:r>
-          </a:p>
-          <a:p>
-            <a:pPr algn="just"/>
+              <a:rPr lang="es-ES" sz="1200" dirty="0">
+                <a:latin typeface="Arial" panose="020B0604020202020204" pitchFamily="34" charset="0"/>
+                <a:cs typeface="Arial" panose="020B0604020202020204" pitchFamily="34" charset="0"/>
+              </a:rPr>
+              <a:t>En este diseño del MZI se ha utilizado un FSR de 2 nm, tal y como indican los </a:t>
+            </a:r>
+            <a:r>
+              <a:rPr lang="es-ES" sz="1200" dirty="0" err="1">
+                <a:latin typeface="Arial" panose="020B0604020202020204" pitchFamily="34" charset="0"/>
+                <a:cs typeface="Arial" panose="020B0604020202020204" pitchFamily="34" charset="0"/>
+              </a:rPr>
+              <a:t>hints</a:t>
+            </a:r>
+            <a:r>
+              <a:rPr lang="es-ES" sz="1200" dirty="0">
+                <a:latin typeface="Arial" panose="020B0604020202020204" pitchFamily="34" charset="0"/>
+                <a:cs typeface="Arial" panose="020B0604020202020204" pitchFamily="34" charset="0"/>
+              </a:rPr>
+              <a:t> del ejercicio. Aplicando la relación entre el FSR y la diferencia de longitud entre brazo se obtiene una diferencia de caminos aproximada de 600.63 </a:t>
+            </a:r>
+            <a:r>
+              <a:rPr lang="es-ES" sz="1200" dirty="0" err="1">
+                <a:latin typeface="Arial" panose="020B0604020202020204" pitchFamily="34" charset="0"/>
+                <a:cs typeface="Arial" panose="020B0604020202020204" pitchFamily="34" charset="0"/>
+              </a:rPr>
+              <a:t>um</a:t>
+            </a:r>
+            <a:r>
+              <a:rPr lang="es-ES" sz="1200" dirty="0">
+                <a:latin typeface="Arial" panose="020B0604020202020204" pitchFamily="34" charset="0"/>
+                <a:cs typeface="Arial" panose="020B0604020202020204" pitchFamily="34" charset="0"/>
+              </a:rPr>
+              <a:t>. La función de transferencia presenta un comportamiento periódico típico de un MZI desbalanceado, con máximos y mínimos de transmisión producidos por la interferencia constructiva y destructiva entre ambos brazos .Al ser el FSR pequeño (2 nm), las resonancias aparecen muy juntas y la señal oscila rápidamente con la longitud de onda. Además, el FSR es inversamente proporcional a la diferencia de longitud entre brazos: cuanto mayor es </a:t>
+            </a:r>
+            <a:r>
+              <a:rPr lang="es-ES" sz="1200" dirty="0" err="1">
+                <a:latin typeface="Arial" panose="020B0604020202020204" pitchFamily="34" charset="0"/>
+                <a:cs typeface="Arial" panose="020B0604020202020204" pitchFamily="34" charset="0"/>
+              </a:rPr>
+              <a:t>dL</a:t>
+            </a:r>
+            <a:r>
+              <a:rPr lang="es-ES" sz="1200" dirty="0">
+                <a:latin typeface="Arial" panose="020B0604020202020204" pitchFamily="34" charset="0"/>
+                <a:cs typeface="Arial" panose="020B0604020202020204" pitchFamily="34" charset="0"/>
+              </a:rPr>
+              <a:t>, menor es el FSR y más cercanas aparecen las resonancias.</a:t>
+            </a:r>
             <a:endParaRPr lang="en-US" sz="1200" dirty="0">
               <a:latin typeface="Arial" panose="020B0604020202020204" pitchFamily="34" charset="0"/>
               <a:cs typeface="Arial" panose="020B0604020202020204" pitchFamily="34" charset="0"/>
             </a:endParaRPr>
-          </a:p>
-          <a:p>
-            <a:pPr algn="just"/>
-            <a:r>
-              <a:rPr lang="en-US" sz="1200" dirty="0">
-                <a:latin typeface="Arial" panose="020B0604020202020204" pitchFamily="34" charset="0"/>
-                <a:cs typeface="Arial" panose="020B0604020202020204" pitchFamily="34" charset="0"/>
-              </a:rPr>
-              <a:t> </a:t>
-            </a:r>
           </a:p>
           <a:p>
             <a:pPr algn="just"/>
@@ -6020,58 +6311,6 @@
           <a:p>
             <a:pPr algn="ctr"/>
             <a:endParaRPr lang="en-US"/>
-          </a:p>
-        </p:txBody>
-      </p:sp>
-      <p:sp>
-        <p:nvSpPr>
-          <p:cNvPr id="12" name="CuadroTexto 11">
-            <a:extLst>
-              <a:ext uri="{FF2B5EF4-FFF2-40B4-BE49-F238E27FC236}">
-                <a16:creationId xmlns:a16="http://schemas.microsoft.com/office/drawing/2014/main" id="{1D17C364-5A66-F740-B152-8B41A2A4EF26}"/>
-              </a:ext>
-            </a:extLst>
-          </p:cNvPr>
-          <p:cNvSpPr txBox="1"/>
-          <p:nvPr/>
-        </p:nvSpPr>
-        <p:spPr>
-          <a:xfrm>
-            <a:off x="5305711" y="2494307"/>
-            <a:ext cx="2494977" cy="1015663"/>
-          </a:xfrm>
-          <a:prstGeom prst="rect">
-            <a:avLst/>
-          </a:prstGeom>
-          <a:noFill/>
-        </p:spPr>
-        <p:txBody>
-          <a:bodyPr wrap="none" rtlCol="0">
-            <a:spAutoFit/>
-          </a:bodyPr>
-          <a:lstStyle/>
-          <a:p>
-            <a:pPr algn="ctr"/>
-            <a:r>
-              <a:rPr lang="es-ES" sz="2000" dirty="0"/>
-              <a:t>MZI transfer </a:t>
-            </a:r>
-            <a:r>
-              <a:rPr lang="es-ES" sz="2000" dirty="0" err="1"/>
-              <a:t>functions</a:t>
-            </a:r>
-            <a:endParaRPr lang="en-US" sz="2000" dirty="0"/>
-          </a:p>
-          <a:p>
-            <a:pPr algn="ctr"/>
-            <a:endParaRPr lang="en-US" sz="2000" dirty="0"/>
-          </a:p>
-          <a:p>
-            <a:pPr algn="ctr"/>
-            <a:r>
-              <a:rPr lang="en-US" sz="2000" dirty="0"/>
-              <a:t>Paste plot here</a:t>
-            </a:r>
           </a:p>
         </p:txBody>
       </p:sp>
@@ -6324,53 +6563,6 @@
           </a:p>
         </p:txBody>
       </p:sp>
-      <p:sp>
-        <p:nvSpPr>
-          <p:cNvPr id="15" name="CuadroTexto 14">
-            <a:extLst>
-              <a:ext uri="{FF2B5EF4-FFF2-40B4-BE49-F238E27FC236}">
-                <a16:creationId xmlns:a16="http://schemas.microsoft.com/office/drawing/2014/main" id="{54CF28B4-1346-F41D-2CD8-EA104ABBFB98}"/>
-              </a:ext>
-            </a:extLst>
-          </p:cNvPr>
-          <p:cNvSpPr txBox="1"/>
-          <p:nvPr/>
-        </p:nvSpPr>
-        <p:spPr>
-          <a:xfrm>
-            <a:off x="1017546" y="2478160"/>
-            <a:ext cx="2996974" cy="1015663"/>
-          </a:xfrm>
-          <a:prstGeom prst="rect">
-            <a:avLst/>
-          </a:prstGeom>
-          <a:noFill/>
-        </p:spPr>
-        <p:txBody>
-          <a:bodyPr wrap="none" rtlCol="0">
-            <a:spAutoFit/>
-          </a:bodyPr>
-          <a:lstStyle/>
-          <a:p>
-            <a:pPr algn="ctr"/>
-            <a:r>
-              <a:rPr lang="en-US" sz="2000" dirty="0"/>
-              <a:t>Your design justification</a:t>
-            </a:r>
-          </a:p>
-          <a:p>
-            <a:pPr algn="ctr"/>
-            <a:endParaRPr lang="en-US" sz="2000" dirty="0"/>
-          </a:p>
-          <a:p>
-            <a:pPr algn="ctr"/>
-            <a:r>
-              <a:rPr lang="en-US" sz="2000" dirty="0"/>
-              <a:t>Write equations / numbers</a:t>
-            </a:r>
-          </a:p>
-        </p:txBody>
-      </p:sp>
       <p:pic>
         <p:nvPicPr>
           <p:cNvPr id="10" name="Gráfico 9">
@@ -6483,6 +6675,478 @@
           </a:p>
         </p:txBody>
       </p:sp>
+      <mc:AlternateContent xmlns:mc="http://schemas.openxmlformats.org/markup-compatibility/2006">
+        <mc:Choice xmlns:a14="http://schemas.microsoft.com/office/drawing/2010/main" Requires="a14">
+          <p:sp>
+            <p:nvSpPr>
+              <p:cNvPr id="2" name="CuadroTexto 1">
+                <a:extLst>
+                  <a:ext uri="{FF2B5EF4-FFF2-40B4-BE49-F238E27FC236}">
+                    <a16:creationId xmlns:a16="http://schemas.microsoft.com/office/drawing/2014/main" id="{2C7F6B39-6CBC-94C1-2B05-BC4F249148CA}"/>
+                  </a:ext>
+                </a:extLst>
+              </p:cNvPr>
+              <p:cNvSpPr txBox="1"/>
+              <p:nvPr/>
+            </p:nvSpPr>
+            <p:spPr>
+              <a:xfrm>
+                <a:off x="992029" y="2155371"/>
+                <a:ext cx="3048000" cy="861646"/>
+              </a:xfrm>
+              <a:prstGeom prst="rect">
+                <a:avLst/>
+              </a:prstGeom>
+              <a:noFill/>
+            </p:spPr>
+            <p:txBody>
+              <a:bodyPr wrap="square" rtlCol="0">
+                <a:spAutoFit/>
+              </a:bodyPr>
+              <a:lstStyle/>
+              <a:p>
+                <a14:m>
+                  <m:oMath xmlns:m="http://schemas.openxmlformats.org/officeDocument/2006/math">
+                    <m:r>
+                      <m:rPr>
+                        <m:sty m:val="p"/>
+                      </m:rPr>
+                      <a:rPr lang="el-GR" sz="2800" i="1" smtClean="0">
+                        <a:latin typeface="Cambria Math" panose="02040503050406030204" pitchFamily="18" charset="0"/>
+                      </a:rPr>
+                      <m:t>Δ</m:t>
+                    </m:r>
+                  </m:oMath>
+                </a14:m>
+                <a:r>
+                  <a:rPr lang="es-ES" sz="2800" dirty="0"/>
+                  <a:t>L =</a:t>
+                </a:r>
+                <a14:m>
+                  <m:oMath xmlns:m="http://schemas.openxmlformats.org/officeDocument/2006/math">
+                    <m:f>
+                      <m:fPr>
+                        <m:ctrlPr>
+                          <a:rPr lang="es-ES" sz="2800" i="1" smtClean="0">
+                            <a:latin typeface="Cambria Math" panose="02040503050406030204" pitchFamily="18" charset="0"/>
+                          </a:rPr>
+                        </m:ctrlPr>
+                      </m:fPr>
+                      <m:num>
+                        <m:sSup>
+                          <m:sSupPr>
+                            <m:ctrlPr>
+                              <a:rPr lang="es-ES" sz="2800" i="1">
+                                <a:latin typeface="Cambria Math" panose="02040503050406030204" pitchFamily="18" charset="0"/>
+                              </a:rPr>
+                            </m:ctrlPr>
+                          </m:sSupPr>
+                          <m:e>
+                            <m:r>
+                              <m:rPr>
+                                <m:sty m:val="p"/>
+                              </m:rPr>
+                              <a:rPr lang="el-GR" sz="2800" i="1">
+                                <a:latin typeface="Cambria Math" panose="02040503050406030204" pitchFamily="18" charset="0"/>
+                              </a:rPr>
+                              <m:t>λ</m:t>
+                            </m:r>
+                          </m:e>
+                          <m:sup>
+                            <m:r>
+                              <a:rPr lang="es-ES" sz="2800" i="1">
+                                <a:latin typeface="Cambria Math" panose="02040503050406030204" pitchFamily="18" charset="0"/>
+                              </a:rPr>
+                              <m:t>2</m:t>
+                            </m:r>
+                          </m:sup>
+                        </m:sSup>
+                      </m:num>
+                      <m:den>
+                        <m:sSub>
+                          <m:sSubPr>
+                            <m:ctrlPr>
+                              <a:rPr lang="es-ES" sz="2800" i="1" smtClean="0">
+                                <a:latin typeface="Cambria Math" panose="02040503050406030204" pitchFamily="18" charset="0"/>
+                              </a:rPr>
+                            </m:ctrlPr>
+                          </m:sSubPr>
+                          <m:e>
+                            <m:r>
+                              <a:rPr lang="es-ES" sz="2800" b="0" i="1" smtClean="0">
+                                <a:latin typeface="Cambria Math" panose="02040503050406030204" pitchFamily="18" charset="0"/>
+                              </a:rPr>
+                              <m:t>𝑛</m:t>
+                            </m:r>
+                          </m:e>
+                          <m:sub>
+                            <m:r>
+                              <a:rPr lang="es-ES" sz="2800" b="0" i="1" smtClean="0">
+                                <a:latin typeface="Cambria Math" panose="02040503050406030204" pitchFamily="18" charset="0"/>
+                              </a:rPr>
+                              <m:t>𝑔</m:t>
+                            </m:r>
+                          </m:sub>
+                        </m:sSub>
+                        <m:d>
+                          <m:dPr>
+                            <m:ctrlPr>
+                              <a:rPr lang="es-ES" sz="2800" b="0" i="1" smtClean="0">
+                                <a:latin typeface="Cambria Math" panose="02040503050406030204" pitchFamily="18" charset="0"/>
+                              </a:rPr>
+                            </m:ctrlPr>
+                          </m:dPr>
+                          <m:e>
+                            <m:r>
+                              <m:rPr>
+                                <m:sty m:val="p"/>
+                              </m:rPr>
+                              <a:rPr lang="el-GR" sz="2800" i="1">
+                                <a:latin typeface="Cambria Math" panose="02040503050406030204" pitchFamily="18" charset="0"/>
+                              </a:rPr>
+                              <m:t>λ</m:t>
+                            </m:r>
+                          </m:e>
+                        </m:d>
+                        <m:r>
+                          <a:rPr lang="es-ES" sz="2800" b="0" i="1" smtClean="0">
+                            <a:latin typeface="Cambria Math" panose="02040503050406030204" pitchFamily="18" charset="0"/>
+                          </a:rPr>
+                          <m:t>∗</m:t>
+                        </m:r>
+                        <m:r>
+                          <m:rPr>
+                            <m:sty m:val="p"/>
+                          </m:rPr>
+                          <a:rPr lang="el-GR" sz="2800" b="0" i="1" smtClean="0">
+                            <a:latin typeface="Cambria Math" panose="02040503050406030204" pitchFamily="18" charset="0"/>
+                          </a:rPr>
+                          <m:t>Δ</m:t>
+                        </m:r>
+                        <m:sSub>
+                          <m:sSubPr>
+                            <m:ctrlPr>
+                              <a:rPr lang="es-ES" sz="2800" i="1">
+                                <a:latin typeface="Cambria Math" panose="02040503050406030204" pitchFamily="18" charset="0"/>
+                              </a:rPr>
+                            </m:ctrlPr>
+                          </m:sSubPr>
+                          <m:e>
+                            <m:r>
+                              <m:rPr>
+                                <m:sty m:val="p"/>
+                              </m:rPr>
+                              <a:rPr lang="el-GR" sz="2800" i="1">
+                                <a:latin typeface="Cambria Math" panose="02040503050406030204" pitchFamily="18" charset="0"/>
+                              </a:rPr>
+                              <m:t>λ</m:t>
+                            </m:r>
+                          </m:e>
+                          <m:sub>
+                            <m:r>
+                              <a:rPr lang="es-ES" sz="2800" b="0" i="1" smtClean="0">
+                                <a:latin typeface="Cambria Math" panose="02040503050406030204" pitchFamily="18" charset="0"/>
+                              </a:rPr>
+                              <m:t>𝐹𝑆𝑅</m:t>
+                            </m:r>
+                          </m:sub>
+                        </m:sSub>
+                      </m:den>
+                    </m:f>
+                  </m:oMath>
+                </a14:m>
+                <a:endParaRPr lang="es-ES" dirty="0"/>
+              </a:p>
+            </p:txBody>
+          </p:sp>
+        </mc:Choice>
+        <mc:Fallback>
+          <p:sp>
+            <p:nvSpPr>
+              <p:cNvPr id="2" name="CuadroTexto 1">
+                <a:extLst>
+                  <a:ext uri="{FF2B5EF4-FFF2-40B4-BE49-F238E27FC236}">
+                    <a16:creationId xmlns:a16="http://schemas.microsoft.com/office/drawing/2014/main" id="{2C7F6B39-6CBC-94C1-2B05-BC4F249148CA}"/>
+                  </a:ext>
+                </a:extLst>
+              </p:cNvPr>
+              <p:cNvSpPr txBox="1">
+                <a:spLocks noRot="1" noChangeAspect="1" noMove="1" noResize="1" noEditPoints="1" noAdjustHandles="1" noChangeArrowheads="1" noChangeShapeType="1" noTextEdit="1"/>
+              </p:cNvSpPr>
+              <p:nvPr/>
+            </p:nvSpPr>
+            <p:spPr>
+              <a:xfrm>
+                <a:off x="992029" y="2155371"/>
+                <a:ext cx="3048000" cy="861646"/>
+              </a:xfrm>
+              <a:prstGeom prst="rect">
+                <a:avLst/>
+              </a:prstGeom>
+              <a:blipFill>
+                <a:blip r:embed="rId3"/>
+                <a:stretch>
+                  <a:fillRect/>
+                </a:stretch>
+              </a:blipFill>
+            </p:spPr>
+            <p:txBody>
+              <a:bodyPr/>
+              <a:lstStyle/>
+              <a:p>
+                <a:r>
+                  <a:rPr lang="es-ES">
+                    <a:noFill/>
+                  </a:rPr>
+                  <a:t> </a:t>
+                </a:r>
+              </a:p>
+            </p:txBody>
+          </p:sp>
+        </mc:Fallback>
+      </mc:AlternateContent>
+      <mc:AlternateContent xmlns:mc="http://schemas.openxmlformats.org/markup-compatibility/2006">
+        <mc:Choice xmlns:a14="http://schemas.microsoft.com/office/drawing/2010/main" Requires="a14">
+          <p:sp>
+            <p:nvSpPr>
+              <p:cNvPr id="4" name="CuadroTexto 3">
+                <a:extLst>
+                  <a:ext uri="{FF2B5EF4-FFF2-40B4-BE49-F238E27FC236}">
+                    <a16:creationId xmlns:a16="http://schemas.microsoft.com/office/drawing/2014/main" id="{C7ACCD63-5E0D-7203-5FBD-F0F7CD841188}"/>
+                  </a:ext>
+                </a:extLst>
+              </p:cNvPr>
+              <p:cNvSpPr txBox="1"/>
+              <p:nvPr/>
+            </p:nvSpPr>
+            <p:spPr>
+              <a:xfrm>
+                <a:off x="853288" y="3286668"/>
+                <a:ext cx="3325483" cy="818044"/>
+              </a:xfrm>
+              <a:prstGeom prst="rect">
+                <a:avLst/>
+              </a:prstGeom>
+              <a:noFill/>
+            </p:spPr>
+            <p:txBody>
+              <a:bodyPr wrap="square" rtlCol="0">
+                <a:spAutoFit/>
+              </a:bodyPr>
+              <a:lstStyle/>
+              <a:p>
+                <a14:m>
+                  <m:oMath xmlns:m="http://schemas.openxmlformats.org/officeDocument/2006/math">
+                    <m:r>
+                      <m:rPr>
+                        <m:sty m:val="p"/>
+                      </m:rPr>
+                      <a:rPr lang="el-GR" sz="2800" i="1" smtClean="0">
+                        <a:latin typeface="Cambria Math" panose="02040503050406030204" pitchFamily="18" charset="0"/>
+                      </a:rPr>
+                      <m:t>Δ</m:t>
+                    </m:r>
+                  </m:oMath>
+                </a14:m>
+                <a:r>
+                  <a:rPr lang="es-ES" sz="2800" dirty="0"/>
+                  <a:t>L =</a:t>
+                </a:r>
+                <a14:m>
+                  <m:oMath xmlns:m="http://schemas.openxmlformats.org/officeDocument/2006/math">
+                    <m:f>
+                      <m:fPr>
+                        <m:ctrlPr>
+                          <a:rPr lang="es-ES" sz="2800" i="1" smtClean="0">
+                            <a:latin typeface="Cambria Math" panose="02040503050406030204" pitchFamily="18" charset="0"/>
+                          </a:rPr>
+                        </m:ctrlPr>
+                      </m:fPr>
+                      <m:num>
+                        <m:sSup>
+                          <m:sSupPr>
+                            <m:ctrlPr>
+                              <a:rPr lang="es-ES" sz="2800" i="1">
+                                <a:latin typeface="Cambria Math" panose="02040503050406030204" pitchFamily="18" charset="0"/>
+                              </a:rPr>
+                            </m:ctrlPr>
+                          </m:sSupPr>
+                          <m:e>
+                            <m:r>
+                              <a:rPr lang="es-ES" sz="2800" b="0" i="1" smtClean="0">
+                                <a:latin typeface="Cambria Math" panose="02040503050406030204" pitchFamily="18" charset="0"/>
+                              </a:rPr>
+                              <m:t>(1.55</m:t>
+                            </m:r>
+                            <m:r>
+                              <a:rPr lang="es-ES" sz="2800" b="0" i="1" smtClean="0">
+                                <a:latin typeface="Cambria Math" panose="02040503050406030204" pitchFamily="18" charset="0"/>
+                              </a:rPr>
+                              <m:t>𝑢𝑚</m:t>
+                            </m:r>
+                            <m:r>
+                              <a:rPr lang="es-ES" sz="2800" b="0" i="1" smtClean="0">
+                                <a:latin typeface="Cambria Math" panose="02040503050406030204" pitchFamily="18" charset="0"/>
+                              </a:rPr>
+                              <m:t>)</m:t>
+                            </m:r>
+                          </m:e>
+                          <m:sup>
+                            <m:r>
+                              <a:rPr lang="es-ES" sz="2800" i="1">
+                                <a:latin typeface="Cambria Math" panose="02040503050406030204" pitchFamily="18" charset="0"/>
+                              </a:rPr>
+                              <m:t>2</m:t>
+                            </m:r>
+                          </m:sup>
+                        </m:sSup>
+                      </m:num>
+                      <m:den>
+                        <m:r>
+                          <a:rPr lang="es-ES" sz="2800" i="1" smtClean="0">
+                            <a:latin typeface="Cambria Math" panose="02040503050406030204" pitchFamily="18" charset="0"/>
+                          </a:rPr>
+                          <m:t>2</m:t>
+                        </m:r>
+                        <m:r>
+                          <a:rPr lang="es-ES" sz="2800" b="0" i="1" smtClean="0">
+                            <a:latin typeface="Cambria Math" panose="02040503050406030204" pitchFamily="18" charset="0"/>
+                          </a:rPr>
+                          <m:t>∗</m:t>
+                        </m:r>
+                        <m:r>
+                          <m:rPr>
+                            <m:sty m:val="p"/>
+                          </m:rPr>
+                          <a:rPr lang="el-GR" sz="2800" b="0" i="1" smtClean="0">
+                            <a:latin typeface="Cambria Math" panose="02040503050406030204" pitchFamily="18" charset="0"/>
+                          </a:rPr>
+                          <m:t>Δ</m:t>
+                        </m:r>
+                        <m:sSub>
+                          <m:sSubPr>
+                            <m:ctrlPr>
+                              <a:rPr lang="es-ES" sz="2800" i="1">
+                                <a:latin typeface="Cambria Math" panose="02040503050406030204" pitchFamily="18" charset="0"/>
+                              </a:rPr>
+                            </m:ctrlPr>
+                          </m:sSubPr>
+                          <m:e>
+                            <m:r>
+                              <m:rPr>
+                                <m:sty m:val="p"/>
+                              </m:rPr>
+                              <a:rPr lang="el-GR" sz="2800" i="1">
+                                <a:latin typeface="Cambria Math" panose="02040503050406030204" pitchFamily="18" charset="0"/>
+                              </a:rPr>
+                              <m:t>λ</m:t>
+                            </m:r>
+                          </m:e>
+                          <m:sub>
+                            <m:r>
+                              <a:rPr lang="es-ES" sz="2800" b="0" i="1" smtClean="0">
+                                <a:latin typeface="Cambria Math" panose="02040503050406030204" pitchFamily="18" charset="0"/>
+                              </a:rPr>
+                              <m:t>𝐹𝑆𝑅</m:t>
+                            </m:r>
+                          </m:sub>
+                        </m:sSub>
+                      </m:den>
+                    </m:f>
+                  </m:oMath>
+                </a14:m>
+                <a:r>
+                  <a:rPr lang="es-ES" dirty="0"/>
+                  <a:t> = </a:t>
+                </a:r>
+                <a:r>
+                  <a:rPr lang="es-ES" b="1" dirty="0"/>
+                  <a:t>600.63 </a:t>
+                </a:r>
+                <a:r>
+                  <a:rPr lang="es-ES" b="1" dirty="0" err="1"/>
+                  <a:t>um</a:t>
+                </a:r>
+                <a:endParaRPr lang="es-ES" b="1" dirty="0"/>
+              </a:p>
+            </p:txBody>
+          </p:sp>
+        </mc:Choice>
+        <mc:Fallback>
+          <p:sp>
+            <p:nvSpPr>
+              <p:cNvPr id="4" name="CuadroTexto 3">
+                <a:extLst>
+                  <a:ext uri="{FF2B5EF4-FFF2-40B4-BE49-F238E27FC236}">
+                    <a16:creationId xmlns:a16="http://schemas.microsoft.com/office/drawing/2014/main" id="{C7ACCD63-5E0D-7203-5FBD-F0F7CD841188}"/>
+                  </a:ext>
+                </a:extLst>
+              </p:cNvPr>
+              <p:cNvSpPr txBox="1">
+                <a:spLocks noRot="1" noChangeAspect="1" noMove="1" noResize="1" noEditPoints="1" noAdjustHandles="1" noChangeArrowheads="1" noChangeShapeType="1" noTextEdit="1"/>
+              </p:cNvSpPr>
+              <p:nvPr/>
+            </p:nvSpPr>
+            <p:spPr>
+              <a:xfrm>
+                <a:off x="853288" y="3286668"/>
+                <a:ext cx="3325483" cy="818044"/>
+              </a:xfrm>
+              <a:prstGeom prst="rect">
+                <a:avLst/>
+              </a:prstGeom>
+              <a:blipFill>
+                <a:blip r:embed="rId4"/>
+                <a:stretch>
+                  <a:fillRect r="-734" b="-2985"/>
+                </a:stretch>
+              </a:blipFill>
+            </p:spPr>
+            <p:txBody>
+              <a:bodyPr/>
+              <a:lstStyle/>
+              <a:p>
+                <a:r>
+                  <a:rPr lang="es-ES">
+                    <a:noFill/>
+                  </a:rPr>
+                  <a:t> </a:t>
+                </a:r>
+              </a:p>
+            </p:txBody>
+          </p:sp>
+        </mc:Fallback>
+      </mc:AlternateContent>
+      <p:pic>
+        <p:nvPicPr>
+          <p:cNvPr id="9" name="Imagen 8">
+            <a:extLst>
+              <a:ext uri="{FF2B5EF4-FFF2-40B4-BE49-F238E27FC236}">
+                <a16:creationId xmlns:a16="http://schemas.microsoft.com/office/drawing/2014/main" id="{9F43D9F0-4988-72A3-2668-B902FAEEEA08}"/>
+              </a:ext>
+            </a:extLst>
+          </p:cNvPr>
+          <p:cNvPicPr>
+            <a:picLocks noChangeAspect="1"/>
+          </p:cNvPicPr>
+          <p:nvPr/>
+        </p:nvPicPr>
+        <p:blipFill>
+          <a:blip r:embed="rId5"/>
+          <a:stretch>
+            <a:fillRect/>
+          </a:stretch>
+        </p:blipFill>
+        <p:spPr>
+          <a:xfrm>
+            <a:off x="4752944" y="2024530"/>
+            <a:ext cx="3600512" cy="2007978"/>
+          </a:xfrm>
+          <a:prstGeom prst="rect">
+            <a:avLst/>
+          </a:prstGeom>
+        </p:spPr>
+      </p:pic>
     </p:spTree>
     <p:extLst>
       <p:ext uri="{BB962C8B-B14F-4D97-AF65-F5344CB8AC3E}">
@@ -6674,7 +7338,7 @@
                 <a:latin typeface="+mj-lt"/>
                 <a:cs typeface="Lucida Sans"/>
               </a:rPr>
-              <a:t>Fringe visibility</a:t>
+              <a:t>Fringe visibility. Case 1</a:t>
             </a:r>
             <a:endParaRPr lang="en-US" b="0" kern="0" dirty="0">
               <a:latin typeface="+mj-lt"/>
@@ -6698,7 +7362,7 @@
         <p:spPr>
           <a:xfrm>
             <a:off x="609441" y="4860334"/>
-            <a:ext cx="11199971" cy="1200329"/>
+            <a:ext cx="11199971" cy="1384995"/>
           </a:xfrm>
           <a:prstGeom prst="rect">
             <a:avLst/>
@@ -6722,22 +7386,16 @@
           <a:p>
             <a:pPr algn="just"/>
             <a:r>
-              <a:rPr lang="en-US" sz="1200" dirty="0">
-                <a:latin typeface="Arial" panose="020B0604020202020204" pitchFamily="34" charset="0"/>
-                <a:cs typeface="Arial" panose="020B0604020202020204" pitchFamily="34" charset="0"/>
-              </a:rPr>
-              <a:t>Comment results: describe the transfer function, is there any interference pattern in case 1? Is there any interference pattern in case 2? Explain the difference between both cases. Compare the Extinction Ratio of both variations. </a:t>
-            </a:r>
-          </a:p>
-          <a:p>
-            <a:pPr algn="just"/>
-            <a:r>
-              <a:rPr lang="en-US" sz="1200" dirty="0">
-                <a:latin typeface="Arial" panose="020B0604020202020204" pitchFamily="34" charset="0"/>
-                <a:cs typeface="Arial" panose="020B0604020202020204" pitchFamily="34" charset="0"/>
-              </a:rPr>
-              <a:t>Extra: What coupling coefficient will you select for the input coupler if you want to match the losses of the longer arm? Simulate and extract the ER.</a:t>
-            </a:r>
+              <a:rPr lang="es-ES" sz="1200" dirty="0">
+                <a:latin typeface="Arial" panose="020B0604020202020204" pitchFamily="34" charset="0"/>
+                <a:cs typeface="Arial" panose="020B0604020202020204" pitchFamily="34" charset="0"/>
+              </a:rPr>
+              <a:t>En el caso 1 (Ka=Kb=0.5) se observa una función de transferencia periódica típica de un interferómetro Mach-Zehnder desbalanceado. La señal presenta máximos y mínimos de transmisión debido a la interferencia constructiva y destructiva entre los dos brazos del MZI. Sí existe un patrón de interferencia en este caso. Aunque el brazo largo introduce pérdidas (4 dB/cm), ambos acopladores reparten la potencia de forma equilibrada, por lo que las dos señales todavía pueden interferir entre sí. Sin embargo, la visibilidad de las franjas disminuye respecto al caso ideal sin pérdidas, ya que la amplitud óptica en ambos brazos deja de estar perfectamente balanceada.</a:t>
+            </a:r>
+            <a:endParaRPr lang="en-US" sz="1200" dirty="0">
+              <a:latin typeface="Arial" panose="020B0604020202020204" pitchFamily="34" charset="0"/>
+              <a:cs typeface="Arial" panose="020B0604020202020204" pitchFamily="34" charset="0"/>
+            </a:endParaRPr>
           </a:p>
           <a:p>
             <a:pPr algn="just"/>
@@ -6753,13 +7411,6 @@
               <a:cs typeface="Arial" panose="020B0604020202020204" pitchFamily="34" charset="0"/>
             </a:endParaRPr>
           </a:p>
-          <a:p>
-            <a:pPr algn="just"/>
-            <a:endParaRPr lang="en-US" sz="1200" dirty="0">
-              <a:latin typeface="Arial" panose="020B0604020202020204" pitchFamily="34" charset="0"/>
-              <a:cs typeface="Arial" panose="020B0604020202020204" pitchFamily="34" charset="0"/>
-            </a:endParaRPr>
-          </a:p>
         </p:txBody>
       </p:sp>
       <p:sp>
@@ -6776,8 +7427,8 @@
         </p:nvSpPr>
         <p:spPr>
           <a:xfrm>
-            <a:off x="609441" y="1418373"/>
-            <a:ext cx="5332571" cy="3306028"/>
+            <a:off x="609441" y="1262961"/>
+            <a:ext cx="6781959" cy="3461440"/>
           </a:xfrm>
           <a:prstGeom prst="rect">
             <a:avLst/>
@@ -6828,8 +7479,8 @@
         </p:nvSpPr>
         <p:spPr>
           <a:xfrm>
-            <a:off x="6476400" y="1418373"/>
-            <a:ext cx="5332571" cy="3306028"/>
+            <a:off x="7543800" y="1262961"/>
+            <a:ext cx="4265171" cy="3461440"/>
           </a:xfrm>
           <a:prstGeom prst="rect">
             <a:avLst/>
@@ -7210,58 +7861,36 @@
           </a:p>
         </p:txBody>
       </p:sp>
-      <p:sp>
-        <p:nvSpPr>
-          <p:cNvPr id="9" name="CuadroTexto 8">
+      <p:pic>
+        <p:nvPicPr>
+          <p:cNvPr id="8" name="Imagen 7">
             <a:extLst>
               <a:ext uri="{FF2B5EF4-FFF2-40B4-BE49-F238E27FC236}">
-                <a16:creationId xmlns:a16="http://schemas.microsoft.com/office/drawing/2014/main" id="{EF71FD03-8141-88A1-69BA-49588EB48896}"/>
+                <a16:creationId xmlns:a16="http://schemas.microsoft.com/office/drawing/2014/main" id="{3BF11398-0C63-4516-802D-2F2B8B31A4AA}"/>
               </a:ext>
             </a:extLst>
           </p:cNvPr>
-          <p:cNvSpPr txBox="1"/>
+          <p:cNvPicPr>
+            <a:picLocks noChangeAspect="1"/>
+          </p:cNvPicPr>
           <p:nvPr/>
-        </p:nvSpPr>
+        </p:nvPicPr>
+        <p:blipFill>
+          <a:blip r:embed="rId3"/>
+          <a:stretch>
+            <a:fillRect/>
+          </a:stretch>
+        </p:blipFill>
         <p:spPr>
           <a:xfrm>
-            <a:off x="1690195" y="2494306"/>
-            <a:ext cx="3171061" cy="1154162"/>
+            <a:off x="838200" y="1343024"/>
+            <a:ext cx="5562600" cy="3292290"/>
           </a:xfrm>
           <a:prstGeom prst="rect">
             <a:avLst/>
           </a:prstGeom>
-          <a:noFill/>
         </p:spPr>
-        <p:txBody>
-          <a:bodyPr wrap="none" rtlCol="0">
-            <a:spAutoFit/>
-          </a:bodyPr>
-          <a:lstStyle/>
-          <a:p>
-            <a:pPr algn="ctr"/>
-            <a:r>
-              <a:rPr lang="es-ES" dirty="0"/>
-              <a:t>MZI transfer </a:t>
-            </a:r>
-            <a:r>
-              <a:rPr lang="es-ES" dirty="0" err="1"/>
-              <a:t>functions</a:t>
-            </a:r>
-            <a:endParaRPr lang="en-US" dirty="0"/>
-          </a:p>
-          <a:p>
-            <a:pPr algn="ctr"/>
-            <a:endParaRPr lang="en-US" dirty="0"/>
-          </a:p>
-          <a:p>
-            <a:pPr algn="ctr"/>
-            <a:r>
-              <a:rPr lang="en-US" dirty="0"/>
-              <a:t>Paste plot here</a:t>
-            </a:r>
-          </a:p>
-        </p:txBody>
-      </p:sp>
+      </p:pic>
     </p:spTree>
     <p:extLst>
       <p:ext uri="{BB962C8B-B14F-4D97-AF65-F5344CB8AC3E}">
@@ -7280,7 +7909,13 @@
   <p:cSld>
     <p:spTree>
       <p:nvGrpSpPr>
-        <p:cNvPr id="1" name=""/>
+        <p:cNvPr id="1" name="">
+          <a:extLst>
+            <a:ext uri="{FF2B5EF4-FFF2-40B4-BE49-F238E27FC236}">
+              <a16:creationId xmlns:a16="http://schemas.microsoft.com/office/drawing/2014/main" id="{344D18D1-E5D8-7815-29D9-D7E9BE2351C7}"/>
+            </a:ext>
+          </a:extLst>
+        </p:cNvPr>
         <p:cNvGrpSpPr/>
         <p:nvPr/>
       </p:nvGrpSpPr>
@@ -7297,7 +7932,7 @@
           <p:cNvPr id="5" name="Marcador de pie de página 4">
             <a:extLst>
               <a:ext uri="{FF2B5EF4-FFF2-40B4-BE49-F238E27FC236}">
-                <a16:creationId xmlns:a16="http://schemas.microsoft.com/office/drawing/2014/main" id="{F929251A-3DC4-36B2-3FB3-341378364BED}"/>
+                <a16:creationId xmlns:a16="http://schemas.microsoft.com/office/drawing/2014/main" id="{9B74ED28-B145-2C99-A72B-7262D7C4D975}"/>
               </a:ext>
             </a:extLst>
           </p:cNvPr>
@@ -7325,7 +7960,7 @@
           <p:cNvPr id="6" name="Marcador de número de diapositiva 5">
             <a:extLst>
               <a:ext uri="{FF2B5EF4-FFF2-40B4-BE49-F238E27FC236}">
-                <a16:creationId xmlns:a16="http://schemas.microsoft.com/office/drawing/2014/main" id="{8E91A34C-DF76-97CF-3EFD-546BC64A2184}"/>
+                <a16:creationId xmlns:a16="http://schemas.microsoft.com/office/drawing/2014/main" id="{4AE6DB9F-CC46-0611-CC22-979F80CA6733}"/>
               </a:ext>
             </a:extLst>
           </p:cNvPr>
@@ -7350,12 +7985,118 @@
           </a:p>
         </p:txBody>
       </p:sp>
-      <p:sp>
-        <p:nvSpPr>
-          <p:cNvPr id="8" name="CuadroTexto 7">
+      <p:pic>
+        <p:nvPicPr>
+          <p:cNvPr id="10" name="Gráfico 9">
             <a:extLst>
               <a:ext uri="{FF2B5EF4-FFF2-40B4-BE49-F238E27FC236}">
-                <a16:creationId xmlns:a16="http://schemas.microsoft.com/office/drawing/2014/main" id="{D9601617-351E-AE1A-1F4D-693F2EA59361}"/>
+                <a16:creationId xmlns:a16="http://schemas.microsoft.com/office/drawing/2014/main" id="{E0610AB9-7575-FD65-0F8B-E2E548CC69DC}"/>
+              </a:ext>
+            </a:extLst>
+          </p:cNvPr>
+          <p:cNvPicPr>
+            <a:picLocks noChangeAspect="1"/>
+          </p:cNvPicPr>
+          <p:nvPr/>
+        </p:nvPicPr>
+        <p:blipFill>
+          <a:blip>
+            <a:extLst>
+              <a:ext uri="{96DAC541-7B7A-43D3-8B79-37D633B846F1}">
+                <asvg:svgBlip xmlns:asvg="http://schemas.microsoft.com/office/drawing/2016/SVG/main" r:embed="rId2"/>
+              </a:ext>
+            </a:extLst>
+          </a:blip>
+          <a:stretch>
+            <a:fillRect/>
+          </a:stretch>
+        </p:blipFill>
+        <p:spPr>
+          <a:xfrm>
+            <a:off x="5045006" y="6356057"/>
+            <a:ext cx="6409575" cy="363174"/>
+          </a:xfrm>
+          <a:prstGeom prst="rect">
+            <a:avLst/>
+          </a:prstGeom>
+        </p:spPr>
+      </p:pic>
+      <p:sp>
+        <p:nvSpPr>
+          <p:cNvPr id="13" name="object 16">
+            <a:extLst>
+              <a:ext uri="{FF2B5EF4-FFF2-40B4-BE49-F238E27FC236}">
+                <a16:creationId xmlns:a16="http://schemas.microsoft.com/office/drawing/2014/main" id="{9EA75870-15E2-ADDA-DBD0-ABA3EF630403}"/>
+              </a:ext>
+            </a:extLst>
+          </p:cNvPr>
+          <p:cNvSpPr txBox="1">
+            <a:spLocks/>
+          </p:cNvSpPr>
+          <p:nvPr/>
+        </p:nvSpPr>
+        <p:spPr>
+          <a:xfrm>
+            <a:off x="685800" y="408883"/>
+            <a:ext cx="10994410" cy="718145"/>
+          </a:xfrm>
+          <a:prstGeom prst="rect">
+            <a:avLst/>
+          </a:prstGeom>
+        </p:spPr>
+        <p:txBody>
+          <a:bodyPr vert="horz" wrap="square" lIns="0" tIns="12700" rIns="0" bIns="0" rtlCol="0">
+            <a:spAutoFit/>
+          </a:bodyPr>
+          <a:lstStyle>
+            <a:lvl1pPr>
+              <a:defRPr sz="2000" b="1" i="0">
+                <a:solidFill>
+                  <a:schemeClr val="tx1"/>
+                </a:solidFill>
+                <a:latin typeface="Calibri"/>
+                <a:ea typeface="+mj-ea"/>
+                <a:cs typeface="Calibri"/>
+              </a:defRPr>
+            </a:lvl1pPr>
+          </a:lstStyle>
+          <a:p>
+            <a:pPr marL="12700">
+              <a:spcBef>
+                <a:spcPts val="100"/>
+              </a:spcBef>
+            </a:pPr>
+            <a:r>
+              <a:rPr lang="en-US" sz="2500" kern="0" dirty="0"/>
+              <a:t>Learning outcome #3 – Delay imbalance with loss</a:t>
+            </a:r>
+          </a:p>
+          <a:p>
+            <a:pPr marL="12700">
+              <a:spcBef>
+                <a:spcPts val="100"/>
+              </a:spcBef>
+            </a:pPr>
+            <a:r>
+              <a:rPr lang="en-US" b="0" kern="0" spc="-5" dirty="0">
+                <a:latin typeface="+mj-lt"/>
+                <a:cs typeface="Lucida Sans"/>
+              </a:rPr>
+              <a:t>Fringe visibility. Case 2</a:t>
+            </a:r>
+            <a:endParaRPr lang="en-US" b="0" kern="0" dirty="0">
+              <a:latin typeface="+mj-lt"/>
+              <a:cs typeface="Lucida Sans"/>
+            </a:endParaRPr>
+          </a:p>
+        </p:txBody>
+      </p:sp>
+      <p:sp>
+        <p:nvSpPr>
+          <p:cNvPr id="2" name="CuadroTexto 1">
+            <a:extLst>
+              <a:ext uri="{FF2B5EF4-FFF2-40B4-BE49-F238E27FC236}">
+                <a16:creationId xmlns:a16="http://schemas.microsoft.com/office/drawing/2014/main" id="{92141FA1-40B5-7307-2272-6D6AC836F8AE}"/>
               </a:ext>
             </a:extLst>
           </p:cNvPr>
@@ -7364,8 +8105,8 @@
         </p:nvSpPr>
         <p:spPr>
           <a:xfrm>
-            <a:off x="611029" y="4860335"/>
-            <a:ext cx="11199530" cy="1200329"/>
+            <a:off x="609441" y="4860334"/>
+            <a:ext cx="11199971" cy="1200329"/>
           </a:xfrm>
           <a:prstGeom prst="rect">
             <a:avLst/>
@@ -7389,12 +8130,16 @@
           <a:p>
             <a:pPr algn="just"/>
             <a:r>
-              <a:rPr lang="en-US" sz="1200" dirty="0">
-                <a:latin typeface="Arial" panose="020B0604020202020204" pitchFamily="34" charset="0"/>
-                <a:cs typeface="Arial" panose="020B0604020202020204" pitchFamily="34" charset="0"/>
-              </a:rPr>
-              <a:t>Comment results: describer the transfer functions. which is the FSR? How is it related to the ring perimeter? </a:t>
-            </a:r>
+              <a:rPr lang="es-ES" sz="1200" dirty="0">
+                <a:latin typeface="Arial" panose="020B0604020202020204" pitchFamily="34" charset="0"/>
+                <a:cs typeface="Arial" panose="020B0604020202020204" pitchFamily="34" charset="0"/>
+              </a:rPr>
+              <a:t>En el caso 2 también aparece un patrón de interferencia periódico, ya que siguen observándose máximos y mínimos de transmisión en función de la longitud de onda. Sin embargo, la visibilidad de las franjas es menor que en el caso 1. Esto ocurre porque el acoplador de entrada ya no reparte la potencia de forma equilibrada (Ka=0.1), por lo que una de las ramas recibe mucha menos potencia que la otra. Como consecuencia, las señales que se recombinan en la salida tienen amplitudes muy diferentes y la interferencia destructiva no es tan eficiente. Por ello, los mínimos de transmisión son menos profundos y la relación de extinción disminuye respecto al caso balanceado.</a:t>
+            </a:r>
+            <a:endParaRPr lang="en-US" sz="1200" dirty="0">
+              <a:latin typeface="Arial" panose="020B0604020202020204" pitchFamily="34" charset="0"/>
+              <a:cs typeface="Arial" panose="020B0604020202020204" pitchFamily="34" charset="0"/>
+            </a:endParaRPr>
           </a:p>
           <a:p>
             <a:pPr algn="just"/>
@@ -7403,45 +8148,14 @@
               <a:cs typeface="Arial" panose="020B0604020202020204" pitchFamily="34" charset="0"/>
             </a:endParaRPr>
           </a:p>
-          <a:p>
-            <a:pPr algn="just"/>
-            <a:endParaRPr lang="en-US" sz="1200" dirty="0">
-              <a:latin typeface="Arial" panose="020B0604020202020204" pitchFamily="34" charset="0"/>
-              <a:cs typeface="Arial" panose="020B0604020202020204" pitchFamily="34" charset="0"/>
-            </a:endParaRPr>
-          </a:p>
-          <a:p>
-            <a:pPr algn="just"/>
-            <a:r>
-              <a:rPr lang="en-US" sz="1200" dirty="0">
-                <a:latin typeface="Arial" panose="020B0604020202020204" pitchFamily="34" charset="0"/>
-                <a:cs typeface="Arial" panose="020B0604020202020204" pitchFamily="34" charset="0"/>
-              </a:rPr>
-              <a:t>Show a numeric calculation of the FSR and length difference matching the results in the graph,</a:t>
-            </a:r>
-          </a:p>
-          <a:p>
-            <a:pPr algn="just"/>
-            <a:endParaRPr lang="en-US" sz="1200" dirty="0">
-              <a:latin typeface="Arial" panose="020B0604020202020204" pitchFamily="34" charset="0"/>
-              <a:cs typeface="Arial" panose="020B0604020202020204" pitchFamily="34" charset="0"/>
-            </a:endParaRPr>
-          </a:p>
-          <a:p>
-            <a:pPr algn="just"/>
-            <a:endParaRPr lang="en-US" sz="1200" dirty="0">
-              <a:latin typeface="Arial" panose="020B0604020202020204" pitchFamily="34" charset="0"/>
-              <a:cs typeface="Arial" panose="020B0604020202020204" pitchFamily="34" charset="0"/>
-            </a:endParaRPr>
-          </a:p>
-        </p:txBody>
-      </p:sp>
-      <p:sp>
-        <p:nvSpPr>
-          <p:cNvPr id="11" name="Rectángulo 10">
+        </p:txBody>
+      </p:sp>
+      <p:sp>
+        <p:nvSpPr>
+          <p:cNvPr id="4" name="Rectángulo 3">
             <a:extLst>
               <a:ext uri="{FF2B5EF4-FFF2-40B4-BE49-F238E27FC236}">
-                <a16:creationId xmlns:a16="http://schemas.microsoft.com/office/drawing/2014/main" id="{B811A5F9-C0B5-716C-70FB-9472E1BC2CD3}"/>
+                <a16:creationId xmlns:a16="http://schemas.microsoft.com/office/drawing/2014/main" id="{68162F7C-8BA2-DFF7-8760-F8C9124C2AD2}"/>
               </a:ext>
             </a:extLst>
           </p:cNvPr>
@@ -7450,8 +8164,8 @@
         </p:nvSpPr>
         <p:spPr>
           <a:xfrm>
-            <a:off x="611030" y="1418373"/>
-            <a:ext cx="3810000" cy="3306028"/>
+            <a:off x="609441" y="1262961"/>
+            <a:ext cx="6781959" cy="3461440"/>
           </a:xfrm>
           <a:prstGeom prst="rect">
             <a:avLst/>
@@ -7490,78 +8204,10 @@
       </p:sp>
       <p:sp>
         <p:nvSpPr>
-          <p:cNvPr id="12" name="CuadroTexto 11">
+          <p:cNvPr id="7" name="Rectángulo 6">
             <a:extLst>
               <a:ext uri="{FF2B5EF4-FFF2-40B4-BE49-F238E27FC236}">
-                <a16:creationId xmlns:a16="http://schemas.microsoft.com/office/drawing/2014/main" id="{1D17C364-5A66-F740-B152-8B41A2A4EF26}"/>
-              </a:ext>
-            </a:extLst>
-          </p:cNvPr>
-          <p:cNvSpPr txBox="1"/>
-          <p:nvPr/>
-        </p:nvSpPr>
-        <p:spPr>
-          <a:xfrm>
-            <a:off x="5536543" y="2494307"/>
-            <a:ext cx="2033313" cy="1323439"/>
-          </a:xfrm>
-          <a:prstGeom prst="rect">
-            <a:avLst/>
-          </a:prstGeom>
-          <a:noFill/>
-        </p:spPr>
-        <p:txBody>
-          <a:bodyPr wrap="none" rtlCol="0">
-            <a:spAutoFit/>
-          </a:bodyPr>
-          <a:lstStyle/>
-          <a:p>
-            <a:pPr algn="ctr"/>
-            <a:r>
-              <a:rPr lang="es-ES" sz="2000" dirty="0"/>
-              <a:t>Single ring</a:t>
-            </a:r>
-          </a:p>
-          <a:p>
-            <a:pPr algn="ctr"/>
-            <a:r>
-              <a:rPr lang="es-ES" sz="2000" dirty="0"/>
-              <a:t>transfer </a:t>
-            </a:r>
-            <a:r>
-              <a:rPr lang="es-ES" sz="2000" dirty="0" err="1"/>
-              <a:t>functions</a:t>
-            </a:r>
-            <a:endParaRPr lang="es-ES" sz="2000" dirty="0"/>
-          </a:p>
-          <a:p>
-            <a:pPr algn="ctr"/>
-            <a:endParaRPr lang="es-ES" sz="2000" dirty="0"/>
-          </a:p>
-          <a:p>
-            <a:pPr algn="ctr"/>
-            <a:r>
-              <a:rPr lang="es-ES" sz="2000" dirty="0" err="1"/>
-              <a:t>Logaritmic</a:t>
-            </a:r>
-            <a:r>
-              <a:rPr lang="es-ES" sz="2000" dirty="0"/>
-              <a:t> </a:t>
-            </a:r>
-            <a:r>
-              <a:rPr lang="es-ES" sz="2000" dirty="0" err="1"/>
-              <a:t>units</a:t>
-            </a:r>
-            <a:endParaRPr lang="en-US" sz="2000" dirty="0"/>
-          </a:p>
-        </p:txBody>
-      </p:sp>
-      <p:sp>
-        <p:nvSpPr>
-          <p:cNvPr id="3" name="Rectángulo 2">
-            <a:extLst>
-              <a:ext uri="{FF2B5EF4-FFF2-40B4-BE49-F238E27FC236}">
-                <a16:creationId xmlns:a16="http://schemas.microsoft.com/office/drawing/2014/main" id="{5FB43DF1-4048-35BF-BD58-4BF2A341D2EF}"/>
+                <a16:creationId xmlns:a16="http://schemas.microsoft.com/office/drawing/2014/main" id="{75718EC5-2302-D82C-EE91-39757F609B15}"/>
               </a:ext>
             </a:extLst>
           </p:cNvPr>
@@ -7570,8 +8216,8 @@
         </p:nvSpPr>
         <p:spPr>
           <a:xfrm>
-            <a:off x="8610601" y="1418373"/>
-            <a:ext cx="3199959" cy="3306028"/>
+            <a:off x="7543800" y="1262961"/>
+            <a:ext cx="4265171" cy="3461440"/>
           </a:xfrm>
           <a:prstGeom prst="rect">
             <a:avLst/>
@@ -7609,7 +8255,7 @@
           <a:p>
             <a:pPr algn="just"/>
             <a:r>
-              <a:rPr lang="en-US" sz="1200" b="1" dirty="0">
+              <a:rPr lang="en-US" sz="1600" b="1" dirty="0">
                 <a:solidFill>
                   <a:schemeClr val="tx1"/>
                 </a:solidFill>
@@ -7621,7 +8267,328 @@
           </a:p>
           <a:p>
             <a:pPr algn="just"/>
-            <a:endParaRPr lang="en-US" sz="1200" b="1" dirty="0">
+            <a:r>
+              <a:rPr lang="en-US" sz="1600" dirty="0" err="1">
+                <a:solidFill>
+                  <a:schemeClr val="tx1"/>
+                </a:solidFill>
+                <a:latin typeface="Arial" panose="020B0604020202020204" pitchFamily="34" charset="0"/>
+                <a:cs typeface="Arial" panose="020B0604020202020204" pitchFamily="34" charset="0"/>
+                <a:sym typeface="Wingdings" pitchFamily="2" charset="2"/>
+              </a:rPr>
+              <a:t>wvl</a:t>
+            </a:r>
+            <a:r>
+              <a:rPr lang="en-US" sz="1600" dirty="0">
+                <a:solidFill>
+                  <a:schemeClr val="tx1"/>
+                </a:solidFill>
+                <a:latin typeface="Arial" panose="020B0604020202020204" pitchFamily="34" charset="0"/>
+                <a:cs typeface="Arial" panose="020B0604020202020204" pitchFamily="34" charset="0"/>
+                <a:sym typeface="Wingdings" pitchFamily="2" charset="2"/>
+              </a:rPr>
+              <a:t> [1550-1550.5] step 0.0000005</a:t>
+            </a:r>
+          </a:p>
+          <a:p>
+            <a:pPr algn="just"/>
+            <a:r>
+              <a:rPr lang="en-US" sz="1600" dirty="0">
+                <a:solidFill>
+                  <a:schemeClr val="tx1"/>
+                </a:solidFill>
+                <a:latin typeface="Arial" panose="020B0604020202020204" pitchFamily="34" charset="0"/>
+                <a:cs typeface="Arial" panose="020B0604020202020204" pitchFamily="34" charset="0"/>
+                <a:sym typeface="Wingdings" pitchFamily="2" charset="2"/>
+              </a:rPr>
+              <a:t>Silicon waveguide model:</a:t>
+            </a:r>
+          </a:p>
+          <a:p>
+            <a:pPr algn="just"/>
+            <a:r>
+              <a:rPr lang="en-US" sz="1600" dirty="0" err="1">
+                <a:solidFill>
+                  <a:schemeClr val="tx1"/>
+                </a:solidFill>
+                <a:latin typeface="Arial" panose="020B0604020202020204" pitchFamily="34" charset="0"/>
+                <a:cs typeface="Arial" panose="020B0604020202020204" pitchFamily="34" charset="0"/>
+                <a:sym typeface="Wingdings" pitchFamily="2" charset="2"/>
+              </a:rPr>
+              <a:t>n_eff</a:t>
+            </a:r>
+            <a:r>
+              <a:rPr lang="en-US" sz="1600" dirty="0">
+                <a:solidFill>
+                  <a:schemeClr val="tx1"/>
+                </a:solidFill>
+                <a:latin typeface="Arial" panose="020B0604020202020204" pitchFamily="34" charset="0"/>
+                <a:cs typeface="Arial" panose="020B0604020202020204" pitchFamily="34" charset="0"/>
+                <a:sym typeface="Wingdings" pitchFamily="2" charset="2"/>
+              </a:rPr>
+              <a:t> = 2.38, </a:t>
+            </a:r>
+          </a:p>
+          <a:p>
+            <a:pPr algn="just"/>
+            <a:r>
+              <a:rPr lang="en-US" sz="1600" dirty="0" err="1">
+                <a:solidFill>
+                  <a:schemeClr val="tx1"/>
+                </a:solidFill>
+                <a:latin typeface="Arial" panose="020B0604020202020204" pitchFamily="34" charset="0"/>
+                <a:cs typeface="Arial" panose="020B0604020202020204" pitchFamily="34" charset="0"/>
+                <a:sym typeface="Wingdings" pitchFamily="2" charset="2"/>
+              </a:rPr>
+              <a:t>n_g</a:t>
+            </a:r>
+            <a:r>
+              <a:rPr lang="en-US" sz="1600" dirty="0">
+                <a:solidFill>
+                  <a:schemeClr val="tx1"/>
+                </a:solidFill>
+                <a:latin typeface="Arial" panose="020B0604020202020204" pitchFamily="34" charset="0"/>
+                <a:cs typeface="Arial" panose="020B0604020202020204" pitchFamily="34" charset="0"/>
+                <a:sym typeface="Wingdings" pitchFamily="2" charset="2"/>
+              </a:rPr>
+              <a:t> = 4.25, </a:t>
+            </a:r>
+          </a:p>
+          <a:p>
+            <a:pPr algn="just"/>
+            <a:r>
+              <a:rPr lang="en-US" sz="1600" dirty="0">
+                <a:solidFill>
+                  <a:schemeClr val="tx1"/>
+                </a:solidFill>
+                <a:latin typeface="Arial" panose="020B0604020202020204" pitchFamily="34" charset="0"/>
+                <a:cs typeface="Arial" panose="020B0604020202020204" pitchFamily="34" charset="0"/>
+                <a:sym typeface="Wingdings" pitchFamily="2" charset="2"/>
+              </a:rPr>
+              <a:t>D=0,</a:t>
+            </a:r>
+          </a:p>
+          <a:p>
+            <a:pPr algn="just"/>
+            <a:r>
+              <a:rPr lang="en-US" sz="1600" dirty="0" err="1">
+                <a:solidFill>
+                  <a:schemeClr val="tx1"/>
+                </a:solidFill>
+                <a:latin typeface="Arial" panose="020B0604020202020204" pitchFamily="34" charset="0"/>
+                <a:cs typeface="Arial" panose="020B0604020202020204" pitchFamily="34" charset="0"/>
+                <a:sym typeface="Wingdings" pitchFamily="2" charset="2"/>
+              </a:rPr>
+              <a:t>L_base</a:t>
+            </a:r>
+            <a:r>
+              <a:rPr lang="en-US" sz="1600" dirty="0">
+                <a:solidFill>
+                  <a:schemeClr val="tx1"/>
+                </a:solidFill>
+                <a:latin typeface="Arial" panose="020B0604020202020204" pitchFamily="34" charset="0"/>
+                <a:cs typeface="Arial" panose="020B0604020202020204" pitchFamily="34" charset="0"/>
+                <a:sym typeface="Wingdings" pitchFamily="2" charset="2"/>
+              </a:rPr>
+              <a:t>=1000</a:t>
+            </a:r>
+          </a:p>
+          <a:p>
+            <a:pPr algn="just"/>
+            <a:r>
+              <a:rPr lang="en-US" sz="1600" dirty="0">
+                <a:solidFill>
+                  <a:schemeClr val="tx1"/>
+                </a:solidFill>
+                <a:latin typeface="Arial" panose="020B0604020202020204" pitchFamily="34" charset="0"/>
+                <a:cs typeface="Arial" panose="020B0604020202020204" pitchFamily="34" charset="0"/>
+                <a:sym typeface="Wingdings" pitchFamily="2" charset="2"/>
+              </a:rPr>
+              <a:t>dL = </a:t>
+            </a:r>
+            <a:r>
+              <a:rPr lang="en-US" sz="1600" dirty="0" err="1">
+                <a:solidFill>
+                  <a:schemeClr val="tx1"/>
+                </a:solidFill>
+                <a:latin typeface="Arial" panose="020B0604020202020204" pitchFamily="34" charset="0"/>
+                <a:cs typeface="Arial" panose="020B0604020202020204" pitchFamily="34" charset="0"/>
+                <a:sym typeface="Wingdings" pitchFamily="2" charset="2"/>
+              </a:rPr>
+              <a:t>L_base</a:t>
+            </a:r>
+            <a:r>
+              <a:rPr lang="en-US" sz="1600" dirty="0">
+                <a:solidFill>
+                  <a:schemeClr val="tx1"/>
+                </a:solidFill>
+                <a:latin typeface="Arial" panose="020B0604020202020204" pitchFamily="34" charset="0"/>
+                <a:cs typeface="Arial" panose="020B0604020202020204" pitchFamily="34" charset="0"/>
+                <a:sym typeface="Wingdings" pitchFamily="2" charset="2"/>
+              </a:rPr>
+              <a:t> + 55960.0840224255;</a:t>
+            </a:r>
+          </a:p>
+          <a:p>
+            <a:pPr algn="just"/>
+            <a:r>
+              <a:rPr lang="en-US" sz="1600" dirty="0">
+                <a:solidFill>
+                  <a:schemeClr val="tx1"/>
+                </a:solidFill>
+                <a:latin typeface="Arial" panose="020B0604020202020204" pitchFamily="34" charset="0"/>
+                <a:cs typeface="Arial" panose="020B0604020202020204" pitchFamily="34" charset="0"/>
+                <a:sym typeface="Wingdings" pitchFamily="2" charset="2"/>
+              </a:rPr>
+              <a:t>loss = 4 dB / cm</a:t>
+            </a:r>
+          </a:p>
+          <a:p>
+            <a:pPr algn="just"/>
+            <a:r>
+              <a:rPr lang="en-US" sz="1600" b="1" dirty="0">
+                <a:solidFill>
+                  <a:schemeClr val="tx1"/>
+                </a:solidFill>
+                <a:latin typeface="Arial" panose="020B0604020202020204" pitchFamily="34" charset="0"/>
+                <a:cs typeface="Arial" panose="020B0604020202020204" pitchFamily="34" charset="0"/>
+                <a:sym typeface="Wingdings" pitchFamily="2" charset="2"/>
+              </a:rPr>
+              <a:t>Case 1</a:t>
+            </a:r>
+            <a:r>
+              <a:rPr lang="en-US" sz="1600" dirty="0">
+                <a:solidFill>
+                  <a:schemeClr val="tx1"/>
+                </a:solidFill>
+                <a:latin typeface="Arial" panose="020B0604020202020204" pitchFamily="34" charset="0"/>
+                <a:cs typeface="Arial" panose="020B0604020202020204" pitchFamily="34" charset="0"/>
+                <a:sym typeface="Wingdings" pitchFamily="2" charset="2"/>
+              </a:rPr>
+              <a:t>. Simulate for Ka = </a:t>
+            </a:r>
+            <a:r>
+              <a:rPr lang="en-US" sz="1600" dirty="0" err="1">
+                <a:solidFill>
+                  <a:schemeClr val="tx1"/>
+                </a:solidFill>
+                <a:latin typeface="Arial" panose="020B0604020202020204" pitchFamily="34" charset="0"/>
+                <a:cs typeface="Arial" panose="020B0604020202020204" pitchFamily="34" charset="0"/>
+                <a:sym typeface="Wingdings" pitchFamily="2" charset="2"/>
+              </a:rPr>
+              <a:t>Kb</a:t>
+            </a:r>
+            <a:r>
+              <a:rPr lang="en-US" sz="1600" dirty="0">
+                <a:solidFill>
+                  <a:schemeClr val="tx1"/>
+                </a:solidFill>
+                <a:latin typeface="Arial" panose="020B0604020202020204" pitchFamily="34" charset="0"/>
+                <a:cs typeface="Arial" panose="020B0604020202020204" pitchFamily="34" charset="0"/>
+                <a:sym typeface="Wingdings" pitchFamily="2" charset="2"/>
+              </a:rPr>
+              <a:t> = 0.5 for all </a:t>
+            </a:r>
+            <a:r>
+              <a:rPr lang="en-US" sz="1600" dirty="0" err="1">
+                <a:solidFill>
+                  <a:schemeClr val="tx1"/>
+                </a:solidFill>
+                <a:latin typeface="Arial" panose="020B0604020202020204" pitchFamily="34" charset="0"/>
+                <a:cs typeface="Arial" panose="020B0604020202020204" pitchFamily="34" charset="0"/>
+                <a:sym typeface="Wingdings" pitchFamily="2" charset="2"/>
+              </a:rPr>
+              <a:t>wvl</a:t>
+            </a:r>
+            <a:endParaRPr lang="en-US" sz="1600" dirty="0">
+              <a:solidFill>
+                <a:schemeClr val="tx1"/>
+              </a:solidFill>
+              <a:latin typeface="Arial" panose="020B0604020202020204" pitchFamily="34" charset="0"/>
+              <a:cs typeface="Arial" panose="020B0604020202020204" pitchFamily="34" charset="0"/>
+              <a:sym typeface="Wingdings" pitchFamily="2" charset="2"/>
+            </a:endParaRPr>
+          </a:p>
+          <a:p>
+            <a:pPr algn="just"/>
+            <a:r>
+              <a:rPr lang="en-US" sz="1600" b="1" dirty="0">
+                <a:solidFill>
+                  <a:schemeClr val="tx1"/>
+                </a:solidFill>
+                <a:latin typeface="Arial" panose="020B0604020202020204" pitchFamily="34" charset="0"/>
+                <a:cs typeface="Arial" panose="020B0604020202020204" pitchFamily="34" charset="0"/>
+                <a:sym typeface="Wingdings" pitchFamily="2" charset="2"/>
+              </a:rPr>
+              <a:t>Case 2</a:t>
+            </a:r>
+            <a:r>
+              <a:rPr lang="en-US" sz="1600" dirty="0">
+                <a:solidFill>
+                  <a:schemeClr val="tx1"/>
+                </a:solidFill>
+                <a:latin typeface="Arial" panose="020B0604020202020204" pitchFamily="34" charset="0"/>
+                <a:cs typeface="Arial" panose="020B0604020202020204" pitchFamily="34" charset="0"/>
+                <a:sym typeface="Wingdings" pitchFamily="2" charset="2"/>
+              </a:rPr>
+              <a:t>. Simulate for Ka=0.1 for all </a:t>
+            </a:r>
+            <a:r>
+              <a:rPr lang="en-US" sz="1600" dirty="0" err="1">
+                <a:solidFill>
+                  <a:schemeClr val="tx1"/>
+                </a:solidFill>
+                <a:latin typeface="Arial" panose="020B0604020202020204" pitchFamily="34" charset="0"/>
+                <a:cs typeface="Arial" panose="020B0604020202020204" pitchFamily="34" charset="0"/>
+                <a:sym typeface="Wingdings" pitchFamily="2" charset="2"/>
+              </a:rPr>
+              <a:t>wvl</a:t>
+            </a:r>
+            <a:endParaRPr lang="en-US" sz="1600" dirty="0">
+              <a:solidFill>
+                <a:schemeClr val="tx1"/>
+              </a:solidFill>
+              <a:latin typeface="Arial" panose="020B0604020202020204" pitchFamily="34" charset="0"/>
+              <a:cs typeface="Arial" panose="020B0604020202020204" pitchFamily="34" charset="0"/>
+              <a:sym typeface="Wingdings" pitchFamily="2" charset="2"/>
+            </a:endParaRPr>
+          </a:p>
+          <a:p>
+            <a:pPr algn="just"/>
+            <a:r>
+              <a:rPr lang="en-US" sz="1600" dirty="0" err="1">
+                <a:solidFill>
+                  <a:schemeClr val="tx1"/>
+                </a:solidFill>
+                <a:latin typeface="Arial" panose="020B0604020202020204" pitchFamily="34" charset="0"/>
+                <a:cs typeface="Arial" panose="020B0604020202020204" pitchFamily="34" charset="0"/>
+                <a:sym typeface="Wingdings" pitchFamily="2" charset="2"/>
+              </a:rPr>
+              <a:t>Kb</a:t>
+            </a:r>
+            <a:r>
+              <a:rPr lang="en-US" sz="1600" dirty="0">
+                <a:solidFill>
+                  <a:schemeClr val="tx1"/>
+                </a:solidFill>
+                <a:latin typeface="Arial" panose="020B0604020202020204" pitchFamily="34" charset="0"/>
+                <a:cs typeface="Arial" panose="020B0604020202020204" pitchFamily="34" charset="0"/>
+                <a:sym typeface="Wingdings" pitchFamily="2" charset="2"/>
+              </a:rPr>
+              <a:t>=0.5 for all </a:t>
+            </a:r>
+            <a:r>
+              <a:rPr lang="en-US" sz="1600" dirty="0" err="1">
+                <a:solidFill>
+                  <a:schemeClr val="tx1"/>
+                </a:solidFill>
+                <a:latin typeface="Arial" panose="020B0604020202020204" pitchFamily="34" charset="0"/>
+                <a:cs typeface="Arial" panose="020B0604020202020204" pitchFamily="34" charset="0"/>
+                <a:sym typeface="Wingdings" pitchFamily="2" charset="2"/>
+              </a:rPr>
+              <a:t>wvl</a:t>
+            </a:r>
+            <a:endParaRPr lang="en-US" sz="1600" dirty="0">
               <a:solidFill>
                 <a:schemeClr val="tx1"/>
               </a:solidFill>
@@ -7629,181 +8596,14 @@
               <a:cs typeface="Arial" panose="020B0604020202020204" pitchFamily="34" charset="0"/>
             </a:endParaRPr>
           </a:p>
-          <a:p>
-            <a:pPr algn="just"/>
-            <a:r>
-              <a:rPr lang="en-US" sz="1200" dirty="0">
-                <a:solidFill>
-                  <a:schemeClr val="tx1"/>
-                </a:solidFill>
-                <a:latin typeface="Arial" panose="020B0604020202020204" pitchFamily="34" charset="0"/>
-                <a:cs typeface="Arial" panose="020B0604020202020204" pitchFamily="34" charset="0"/>
-              </a:rPr>
-              <a:t>None </a:t>
-            </a:r>
-            <a:r>
-              <a:rPr lang="en-US" sz="1200" dirty="0">
-                <a:solidFill>
-                  <a:schemeClr val="tx1"/>
-                </a:solidFill>
-                <a:latin typeface="Arial" panose="020B0604020202020204" pitchFamily="34" charset="0"/>
-                <a:cs typeface="Arial" panose="020B0604020202020204" pitchFamily="34" charset="0"/>
-                <a:sym typeface="Wingdings" pitchFamily="2" charset="2"/>
-              </a:rPr>
-              <a:t> </a:t>
-            </a:r>
-            <a:endParaRPr lang="en-US" sz="1200" dirty="0">
-              <a:solidFill>
-                <a:schemeClr val="tx1"/>
-              </a:solidFill>
-              <a:latin typeface="Arial" panose="020B0604020202020204" pitchFamily="34" charset="0"/>
-              <a:cs typeface="Arial" panose="020B0604020202020204" pitchFamily="34" charset="0"/>
-            </a:endParaRPr>
-          </a:p>
-          <a:p>
-            <a:pPr algn="just"/>
-            <a:endParaRPr lang="en-US" sz="1200" dirty="0">
-              <a:solidFill>
-                <a:schemeClr val="tx1"/>
-              </a:solidFill>
-              <a:latin typeface="Arial" panose="020B0604020202020204" pitchFamily="34" charset="0"/>
-              <a:cs typeface="Arial" panose="020B0604020202020204" pitchFamily="34" charset="0"/>
-            </a:endParaRPr>
-          </a:p>
-          <a:p>
-            <a:pPr algn="just"/>
-            <a:endParaRPr lang="en-US" sz="1200" dirty="0">
-              <a:solidFill>
-                <a:schemeClr val="tx1"/>
-              </a:solidFill>
-              <a:latin typeface="Arial" panose="020B0604020202020204" pitchFamily="34" charset="0"/>
-              <a:cs typeface="Arial" panose="020B0604020202020204" pitchFamily="34" charset="0"/>
-            </a:endParaRPr>
-          </a:p>
-        </p:txBody>
-      </p:sp>
-      <p:sp>
-        <p:nvSpPr>
-          <p:cNvPr id="14" name="Rectángulo 13">
-            <a:extLst>
-              <a:ext uri="{FF2B5EF4-FFF2-40B4-BE49-F238E27FC236}">
-                <a16:creationId xmlns:a16="http://schemas.microsoft.com/office/drawing/2014/main" id="{6AA857E7-5C39-DCE1-10B5-40300FCF4B26}"/>
-              </a:ext>
-            </a:extLst>
-          </p:cNvPr>
-          <p:cNvSpPr/>
-          <p:nvPr/>
-        </p:nvSpPr>
-        <p:spPr>
-          <a:xfrm>
-            <a:off x="4648200" y="1418373"/>
-            <a:ext cx="3810000" cy="3306028"/>
-          </a:xfrm>
-          <a:prstGeom prst="rect">
-            <a:avLst/>
-          </a:prstGeom>
-          <a:noFill/>
-          <a:ln w="28575">
-            <a:solidFill>
-              <a:srgbClr val="E0700D"/>
-            </a:solidFill>
-          </a:ln>
-        </p:spPr>
-        <p:style>
-          <a:lnRef idx="2">
-            <a:schemeClr val="accent1">
-              <a:shade val="15000"/>
-            </a:schemeClr>
-          </a:lnRef>
-          <a:fillRef idx="1">
-            <a:schemeClr val="accent1"/>
-          </a:fillRef>
-          <a:effectRef idx="0">
-            <a:schemeClr val="accent1"/>
-          </a:effectRef>
-          <a:fontRef idx="minor">
-            <a:schemeClr val="lt1"/>
-          </a:fontRef>
-        </p:style>
-        <p:txBody>
-          <a:bodyPr rtlCol="0" anchor="ctr"/>
-          <a:lstStyle/>
-          <a:p>
-            <a:pPr algn="ctr"/>
-            <a:endParaRPr lang="en-US"/>
-          </a:p>
-        </p:txBody>
-      </p:sp>
-      <p:sp>
-        <p:nvSpPr>
-          <p:cNvPr id="15" name="CuadroTexto 14">
-            <a:extLst>
-              <a:ext uri="{FF2B5EF4-FFF2-40B4-BE49-F238E27FC236}">
-                <a16:creationId xmlns:a16="http://schemas.microsoft.com/office/drawing/2014/main" id="{54CF28B4-1346-F41D-2CD8-EA104ABBFB98}"/>
-              </a:ext>
-            </a:extLst>
-          </p:cNvPr>
-          <p:cNvSpPr txBox="1"/>
-          <p:nvPr/>
-        </p:nvSpPr>
-        <p:spPr>
-          <a:xfrm>
-            <a:off x="1499379" y="2478160"/>
-            <a:ext cx="2033313" cy="1323439"/>
-          </a:xfrm>
-          <a:prstGeom prst="rect">
-            <a:avLst/>
-          </a:prstGeom>
-          <a:noFill/>
-        </p:spPr>
-        <p:txBody>
-          <a:bodyPr wrap="none" rtlCol="0">
-            <a:spAutoFit/>
-          </a:bodyPr>
-          <a:lstStyle/>
-          <a:p>
-            <a:pPr algn="ctr"/>
-            <a:r>
-              <a:rPr lang="es-ES" sz="2000" dirty="0"/>
-              <a:t>Single ring</a:t>
-            </a:r>
-          </a:p>
-          <a:p>
-            <a:pPr algn="ctr"/>
-            <a:r>
-              <a:rPr lang="es-ES" sz="2000" dirty="0"/>
-              <a:t>transfer </a:t>
-            </a:r>
-            <a:r>
-              <a:rPr lang="es-ES" sz="2000" dirty="0" err="1"/>
-              <a:t>functions</a:t>
-            </a:r>
-            <a:endParaRPr lang="es-ES" sz="2000" dirty="0"/>
-          </a:p>
-          <a:p>
-            <a:pPr algn="ctr"/>
-            <a:endParaRPr lang="es-ES" sz="2000" dirty="0"/>
-          </a:p>
-          <a:p>
-            <a:pPr algn="ctr"/>
-            <a:r>
-              <a:rPr lang="es-ES" sz="2000" dirty="0"/>
-              <a:t>Linear </a:t>
-            </a:r>
-            <a:r>
-              <a:rPr lang="es-ES" sz="2000" dirty="0" err="1"/>
-              <a:t>units</a:t>
-            </a:r>
-            <a:endParaRPr lang="en-US" sz="2000" dirty="0"/>
-          </a:p>
         </p:txBody>
       </p:sp>
       <p:pic>
         <p:nvPicPr>
-          <p:cNvPr id="9" name="Gráfico 8">
+          <p:cNvPr id="9" name="Imagen 8">
             <a:extLst>
               <a:ext uri="{FF2B5EF4-FFF2-40B4-BE49-F238E27FC236}">
-                <a16:creationId xmlns:a16="http://schemas.microsoft.com/office/drawing/2014/main" id="{83C716FC-7070-6DA5-E116-195D4CD9BDB4}"/>
+                <a16:creationId xmlns:a16="http://schemas.microsoft.com/office/drawing/2014/main" id="{4158EE58-26CB-9C3A-AA29-FC8E01EAEDAE}"/>
               </a:ext>
             </a:extLst>
           </p:cNvPr>
@@ -7813,97 +8613,25 @@
           <p:nvPr/>
         </p:nvPicPr>
         <p:blipFill>
-          <a:blip>
-            <a:extLst>
-              <a:ext uri="{96DAC541-7B7A-43D3-8B79-37D633B846F1}">
-                <asvg:svgBlip xmlns:asvg="http://schemas.microsoft.com/office/drawing/2016/SVG/main" r:embed="rId2"/>
-              </a:ext>
-            </a:extLst>
-          </a:blip>
+          <a:blip r:embed="rId3"/>
           <a:stretch>
             <a:fillRect/>
           </a:stretch>
         </p:blipFill>
         <p:spPr>
           <a:xfrm>
-            <a:off x="5045006" y="6356057"/>
-            <a:ext cx="6409575" cy="363174"/>
+            <a:off x="990600" y="1346432"/>
+            <a:ext cx="5562600" cy="3292291"/>
           </a:xfrm>
           <a:prstGeom prst="rect">
             <a:avLst/>
           </a:prstGeom>
         </p:spPr>
       </p:pic>
-      <p:sp>
-        <p:nvSpPr>
-          <p:cNvPr id="10" name="object 16">
-            <a:extLst>
-              <a:ext uri="{FF2B5EF4-FFF2-40B4-BE49-F238E27FC236}">
-                <a16:creationId xmlns:a16="http://schemas.microsoft.com/office/drawing/2014/main" id="{C319E249-48A9-70AD-7ACE-23CF9ABF6137}"/>
-              </a:ext>
-            </a:extLst>
-          </p:cNvPr>
-          <p:cNvSpPr txBox="1">
-            <a:spLocks/>
-          </p:cNvSpPr>
-          <p:nvPr/>
-        </p:nvSpPr>
-        <p:spPr>
-          <a:xfrm>
-            <a:off x="685800" y="408883"/>
-            <a:ext cx="10994410" cy="718145"/>
-          </a:xfrm>
-          <a:prstGeom prst="rect">
-            <a:avLst/>
-          </a:prstGeom>
-        </p:spPr>
-        <p:txBody>
-          <a:bodyPr vert="horz" wrap="square" lIns="0" tIns="12700" rIns="0" bIns="0" rtlCol="0">
-            <a:spAutoFit/>
-          </a:bodyPr>
-          <a:lstStyle>
-            <a:lvl1pPr>
-              <a:defRPr sz="2000" b="1" i="0">
-                <a:solidFill>
-                  <a:schemeClr val="tx1"/>
-                </a:solidFill>
-                <a:latin typeface="Calibri"/>
-                <a:ea typeface="+mj-ea"/>
-                <a:cs typeface="Calibri"/>
-              </a:defRPr>
-            </a:lvl1pPr>
-          </a:lstStyle>
-          <a:p>
-            <a:pPr marL="12700">
-              <a:spcBef>
-                <a:spcPts val="100"/>
-              </a:spcBef>
-            </a:pPr>
-            <a:r>
-              <a:rPr lang="en-US" sz="2500" kern="0" dirty="0"/>
-              <a:t>Learning outcome #4 – Ring Resonator</a:t>
-            </a:r>
-          </a:p>
-          <a:p>
-            <a:pPr marL="12700">
-              <a:spcBef>
-                <a:spcPts val="100"/>
-              </a:spcBef>
-            </a:pPr>
-            <a:r>
-              <a:rPr lang="en-US" b="0" kern="0" spc="-5" dirty="0">
-                <a:latin typeface="+mj-lt"/>
-                <a:cs typeface="Lucida Sans"/>
-              </a:rPr>
-              <a:t>Single ring resonator – most simple case Constant coupler K (no wavelength variation)</a:t>
-            </a:r>
-          </a:p>
-        </p:txBody>
-      </p:sp>
     </p:spTree>
     <p:extLst>
       <p:ext uri="{BB962C8B-B14F-4D97-AF65-F5344CB8AC3E}">
-        <p14:creationId xmlns:p14="http://schemas.microsoft.com/office/powerpoint/2010/main" val="543184549"/>
+        <p14:creationId xmlns:p14="http://schemas.microsoft.com/office/powerpoint/2010/main" val="4247119007"/>
       </p:ext>
     </p:extLst>
   </p:cSld>
@@ -7921,7 +8649,7 @@
         <p:cNvPr id="1" name="">
           <a:extLst>
             <a:ext uri="{FF2B5EF4-FFF2-40B4-BE49-F238E27FC236}">
-              <a16:creationId xmlns:a16="http://schemas.microsoft.com/office/drawing/2014/main" id="{960CA2DF-810F-7BDA-CFF3-0CFEE760301A}"/>
+              <a16:creationId xmlns:a16="http://schemas.microsoft.com/office/drawing/2014/main" id="{7A53BFD1-C9F1-793B-6186-D493F1A6852A}"/>
             </a:ext>
           </a:extLst>
         </p:cNvPr>
@@ -7941,7 +8669,7 @@
           <p:cNvPr id="5" name="Marcador de pie de página 4">
             <a:extLst>
               <a:ext uri="{FF2B5EF4-FFF2-40B4-BE49-F238E27FC236}">
-                <a16:creationId xmlns:a16="http://schemas.microsoft.com/office/drawing/2014/main" id="{4915C280-A84A-95DA-94D2-FE062C8ED61F}"/>
+                <a16:creationId xmlns:a16="http://schemas.microsoft.com/office/drawing/2014/main" id="{901E6A3A-9B7D-E09A-C0B2-3A16658EFB5D}"/>
               </a:ext>
             </a:extLst>
           </p:cNvPr>
@@ -7969,7 +8697,7 @@
           <p:cNvPr id="6" name="Marcador de número de diapositiva 5">
             <a:extLst>
               <a:ext uri="{FF2B5EF4-FFF2-40B4-BE49-F238E27FC236}">
-                <a16:creationId xmlns:a16="http://schemas.microsoft.com/office/drawing/2014/main" id="{E919F9EF-02D5-71FC-C2BC-F8EC5B26723E}"/>
+                <a16:creationId xmlns:a16="http://schemas.microsoft.com/office/drawing/2014/main" id="{9B46D0B0-EB2F-9714-F6C0-6986145A35B4}"/>
               </a:ext>
             </a:extLst>
           </p:cNvPr>
@@ -7994,91 +8722,125 @@
           </a:p>
         </p:txBody>
       </p:sp>
-      <p:sp>
-        <p:nvSpPr>
-          <p:cNvPr id="8" name="CuadroTexto 7">
+      <p:pic>
+        <p:nvPicPr>
+          <p:cNvPr id="10" name="Gráfico 9">
             <a:extLst>
               <a:ext uri="{FF2B5EF4-FFF2-40B4-BE49-F238E27FC236}">
-                <a16:creationId xmlns:a16="http://schemas.microsoft.com/office/drawing/2014/main" id="{3BC6D2B9-07F5-E2FA-C9AD-029B63B098DA}"/>
+                <a16:creationId xmlns:a16="http://schemas.microsoft.com/office/drawing/2014/main" id="{7AA9F42E-EDFB-941F-4213-7B143FAE0828}"/>
               </a:ext>
             </a:extLst>
           </p:cNvPr>
-          <p:cNvSpPr txBox="1"/>
+          <p:cNvPicPr>
+            <a:picLocks noChangeAspect="1"/>
+          </p:cNvPicPr>
           <p:nvPr/>
-        </p:nvSpPr>
+        </p:nvPicPr>
+        <p:blipFill>
+          <a:blip>
+            <a:extLst>
+              <a:ext uri="{96DAC541-7B7A-43D3-8B79-37D633B846F1}">
+                <asvg:svgBlip xmlns:asvg="http://schemas.microsoft.com/office/drawing/2016/SVG/main" r:embed="rId2"/>
+              </a:ext>
+            </a:extLst>
+          </a:blip>
+          <a:stretch>
+            <a:fillRect/>
+          </a:stretch>
+        </p:blipFill>
         <p:spPr>
           <a:xfrm>
-            <a:off x="611029" y="4860335"/>
-            <a:ext cx="11199530" cy="1200329"/>
+            <a:off x="5045006" y="6356057"/>
+            <a:ext cx="6409575" cy="363174"/>
           </a:xfrm>
           <a:prstGeom prst="rect">
             <a:avLst/>
           </a:prstGeom>
-          <a:solidFill>
-            <a:schemeClr val="bg1">
-              <a:lumMod val="95000"/>
-            </a:schemeClr>
-          </a:solidFill>
-          <a:ln w="28575">
-            <a:solidFill>
-              <a:srgbClr val="E0700D"/>
-            </a:solidFill>
-          </a:ln>
         </p:spPr>
-        <p:txBody>
-          <a:bodyPr wrap="square" rtlCol="0">
+      </p:pic>
+      <p:sp>
+        <p:nvSpPr>
+          <p:cNvPr id="13" name="object 16">
+            <a:extLst>
+              <a:ext uri="{FF2B5EF4-FFF2-40B4-BE49-F238E27FC236}">
+                <a16:creationId xmlns:a16="http://schemas.microsoft.com/office/drawing/2014/main" id="{D9BDA1B1-E16F-1F55-DF54-A1E2A66ABE26}"/>
+              </a:ext>
+            </a:extLst>
+          </p:cNvPr>
+          <p:cNvSpPr txBox="1">
+            <a:spLocks/>
+          </p:cNvSpPr>
+          <p:nvPr/>
+        </p:nvSpPr>
+        <p:spPr>
+          <a:xfrm>
+            <a:off x="685800" y="408883"/>
+            <a:ext cx="10994410" cy="718145"/>
+          </a:xfrm>
+          <a:prstGeom prst="rect">
+            <a:avLst/>
+          </a:prstGeom>
+        </p:spPr>
+        <p:txBody>
+          <a:bodyPr vert="horz" wrap="square" lIns="0" tIns="12700" rIns="0" bIns="0" rtlCol="0">
             <a:spAutoFit/>
           </a:bodyPr>
-          <a:lstStyle/>
-          <a:p>
-            <a:pPr algn="just"/>
-            <a:r>
-              <a:rPr lang="en-US" sz="1200" dirty="0">
-                <a:latin typeface="Arial" panose="020B0604020202020204" pitchFamily="34" charset="0"/>
-                <a:cs typeface="Arial" panose="020B0604020202020204" pitchFamily="34" charset="0"/>
-              </a:rPr>
-              <a:t>Comment results: describer the transfer function. How’s the dependence on the coupler coefficient? Calculate the Extinction Ratio. How would you achieve critical coupling for the latter design? Justify your answers.</a:t>
-            </a:r>
-          </a:p>
-          <a:p>
-            <a:pPr algn="just"/>
-            <a:endParaRPr lang="en-US" sz="1200" dirty="0">
-              <a:latin typeface="Arial" panose="020B0604020202020204" pitchFamily="34" charset="0"/>
-              <a:cs typeface="Arial" panose="020B0604020202020204" pitchFamily="34" charset="0"/>
+          <a:lstStyle>
+            <a:lvl1pPr>
+              <a:defRPr sz="2000" b="1" i="0">
+                <a:solidFill>
+                  <a:schemeClr val="tx1"/>
+                </a:solidFill>
+                <a:latin typeface="Calibri"/>
+                <a:ea typeface="+mj-ea"/>
+                <a:cs typeface="Calibri"/>
+              </a:defRPr>
+            </a:lvl1pPr>
+          </a:lstStyle>
+          <a:p>
+            <a:pPr marL="12700">
+              <a:spcBef>
+                <a:spcPts val="100"/>
+              </a:spcBef>
+            </a:pPr>
+            <a:r>
+              <a:rPr lang="en-US" sz="2500" kern="0" dirty="0"/>
+              <a:t>Learning outcome #3 – Delay imbalance with loss</a:t>
+            </a:r>
+          </a:p>
+          <a:p>
+            <a:pPr marL="12700">
+              <a:spcBef>
+                <a:spcPts val="100"/>
+              </a:spcBef>
+            </a:pPr>
+            <a:r>
+              <a:rPr lang="en-US" b="0" kern="0" spc="-5" dirty="0">
+                <a:latin typeface="+mj-lt"/>
+                <a:cs typeface="Lucida Sans"/>
+              </a:rPr>
+              <a:t>Fringe visibility. </a:t>
+            </a:r>
+            <a:r>
+              <a:rPr lang="en-US" b="0" kern="0" spc="-5" dirty="0" err="1">
+                <a:latin typeface="+mj-lt"/>
+                <a:cs typeface="Lucida Sans"/>
+              </a:rPr>
+              <a:t>Comparación</a:t>
+            </a:r>
+            <a:endParaRPr lang="en-US" b="0" kern="0" dirty="0">
+              <a:latin typeface="+mj-lt"/>
+              <a:cs typeface="Lucida Sans"/>
             </a:endParaRPr>
           </a:p>
-          <a:p>
-            <a:pPr algn="just"/>
-            <a:endParaRPr lang="en-US" sz="1200" dirty="0">
-              <a:latin typeface="Arial" panose="020B0604020202020204" pitchFamily="34" charset="0"/>
-              <a:cs typeface="Arial" panose="020B0604020202020204" pitchFamily="34" charset="0"/>
-            </a:endParaRPr>
-          </a:p>
-          <a:p>
-            <a:pPr algn="just"/>
-            <a:endParaRPr lang="en-US" sz="1200" dirty="0">
-              <a:latin typeface="Arial" panose="020B0604020202020204" pitchFamily="34" charset="0"/>
-              <a:cs typeface="Arial" panose="020B0604020202020204" pitchFamily="34" charset="0"/>
-            </a:endParaRPr>
-          </a:p>
-          <a:p>
-            <a:pPr algn="just"/>
-            <a:r>
-              <a:rPr lang="en-US" sz="1200" dirty="0">
-                <a:latin typeface="Arial" panose="020B0604020202020204" pitchFamily="34" charset="0"/>
-                <a:cs typeface="Arial" panose="020B0604020202020204" pitchFamily="34" charset="0"/>
-              </a:rPr>
-              <a:t> </a:t>
-            </a:r>
-          </a:p>
-        </p:txBody>
-      </p:sp>
-      <p:sp>
-        <p:nvSpPr>
-          <p:cNvPr id="3" name="Rectángulo 2">
+        </p:txBody>
+      </p:sp>
+      <p:sp>
+        <p:nvSpPr>
+          <p:cNvPr id="7" name="Rectángulo 6">
             <a:extLst>
               <a:ext uri="{FF2B5EF4-FFF2-40B4-BE49-F238E27FC236}">
-                <a16:creationId xmlns:a16="http://schemas.microsoft.com/office/drawing/2014/main" id="{E54DA3AC-DFE0-BB51-7C71-7CD9087359D0}"/>
+                <a16:creationId xmlns:a16="http://schemas.microsoft.com/office/drawing/2014/main" id="{F133B7DB-52E0-A036-2A66-B51C6A4ED594}"/>
               </a:ext>
             </a:extLst>
           </p:cNvPr>
@@ -8087,8 +8849,8 @@
         </p:nvSpPr>
         <p:spPr>
           <a:xfrm>
-            <a:off x="8610601" y="1418373"/>
-            <a:ext cx="3199959" cy="3306028"/>
+            <a:off x="7543800" y="1262961"/>
+            <a:ext cx="4265171" cy="3461440"/>
           </a:xfrm>
           <a:prstGeom prst="rect">
             <a:avLst/>
@@ -8126,7 +8888,7 @@
           <a:p>
             <a:pPr algn="just"/>
             <a:r>
-              <a:rPr lang="en-US" sz="1200" b="1" dirty="0">
+              <a:rPr lang="en-US" sz="1600" b="1" dirty="0">
                 <a:solidFill>
                   <a:schemeClr val="tx1"/>
                 </a:solidFill>
@@ -8135,7 +8897,331 @@
               </a:rPr>
               <a:t>Hints:</a:t>
             </a:r>
-            <a:endParaRPr lang="en-US" sz="1200" dirty="0">
+          </a:p>
+          <a:p>
+            <a:pPr algn="just"/>
+            <a:r>
+              <a:rPr lang="en-US" sz="1600" dirty="0" err="1">
+                <a:solidFill>
+                  <a:schemeClr val="tx1"/>
+                </a:solidFill>
+                <a:latin typeface="Arial" panose="020B0604020202020204" pitchFamily="34" charset="0"/>
+                <a:cs typeface="Arial" panose="020B0604020202020204" pitchFamily="34" charset="0"/>
+                <a:sym typeface="Wingdings" pitchFamily="2" charset="2"/>
+              </a:rPr>
+              <a:t>wvl</a:t>
+            </a:r>
+            <a:r>
+              <a:rPr lang="en-US" sz="1600" dirty="0">
+                <a:solidFill>
+                  <a:schemeClr val="tx1"/>
+                </a:solidFill>
+                <a:latin typeface="Arial" panose="020B0604020202020204" pitchFamily="34" charset="0"/>
+                <a:cs typeface="Arial" panose="020B0604020202020204" pitchFamily="34" charset="0"/>
+                <a:sym typeface="Wingdings" pitchFamily="2" charset="2"/>
+              </a:rPr>
+              <a:t> [1550-1550.5] step 0.0000005</a:t>
+            </a:r>
+          </a:p>
+          <a:p>
+            <a:pPr algn="just"/>
+            <a:r>
+              <a:rPr lang="en-US" sz="1600" dirty="0">
+                <a:solidFill>
+                  <a:schemeClr val="tx1"/>
+                </a:solidFill>
+                <a:latin typeface="Arial" panose="020B0604020202020204" pitchFamily="34" charset="0"/>
+                <a:cs typeface="Arial" panose="020B0604020202020204" pitchFamily="34" charset="0"/>
+                <a:sym typeface="Wingdings" pitchFamily="2" charset="2"/>
+              </a:rPr>
+              <a:t>Silicon waveguide model:</a:t>
+            </a:r>
+          </a:p>
+          <a:p>
+            <a:pPr algn="just"/>
+            <a:r>
+              <a:rPr lang="en-US" sz="1600" dirty="0" err="1">
+                <a:solidFill>
+                  <a:schemeClr val="tx1"/>
+                </a:solidFill>
+                <a:latin typeface="Arial" panose="020B0604020202020204" pitchFamily="34" charset="0"/>
+                <a:cs typeface="Arial" panose="020B0604020202020204" pitchFamily="34" charset="0"/>
+                <a:sym typeface="Wingdings" pitchFamily="2" charset="2"/>
+              </a:rPr>
+              <a:t>n_eff</a:t>
+            </a:r>
+            <a:r>
+              <a:rPr lang="en-US" sz="1600" dirty="0">
+                <a:solidFill>
+                  <a:schemeClr val="tx1"/>
+                </a:solidFill>
+                <a:latin typeface="Arial" panose="020B0604020202020204" pitchFamily="34" charset="0"/>
+                <a:cs typeface="Arial" panose="020B0604020202020204" pitchFamily="34" charset="0"/>
+                <a:sym typeface="Wingdings" pitchFamily="2" charset="2"/>
+              </a:rPr>
+              <a:t> = 2.38, </a:t>
+            </a:r>
+          </a:p>
+          <a:p>
+            <a:pPr algn="just"/>
+            <a:r>
+              <a:rPr lang="en-US" sz="1600" dirty="0" err="1">
+                <a:solidFill>
+                  <a:schemeClr val="tx1"/>
+                </a:solidFill>
+                <a:latin typeface="Arial" panose="020B0604020202020204" pitchFamily="34" charset="0"/>
+                <a:cs typeface="Arial" panose="020B0604020202020204" pitchFamily="34" charset="0"/>
+                <a:sym typeface="Wingdings" pitchFamily="2" charset="2"/>
+              </a:rPr>
+              <a:t>n_g</a:t>
+            </a:r>
+            <a:r>
+              <a:rPr lang="en-US" sz="1600" dirty="0">
+                <a:solidFill>
+                  <a:schemeClr val="tx1"/>
+                </a:solidFill>
+                <a:latin typeface="Arial" panose="020B0604020202020204" pitchFamily="34" charset="0"/>
+                <a:cs typeface="Arial" panose="020B0604020202020204" pitchFamily="34" charset="0"/>
+                <a:sym typeface="Wingdings" pitchFamily="2" charset="2"/>
+              </a:rPr>
+              <a:t> = 4.25, </a:t>
+            </a:r>
+          </a:p>
+          <a:p>
+            <a:pPr algn="just"/>
+            <a:r>
+              <a:rPr lang="en-US" sz="1600" dirty="0">
+                <a:solidFill>
+                  <a:schemeClr val="tx1"/>
+                </a:solidFill>
+                <a:latin typeface="Arial" panose="020B0604020202020204" pitchFamily="34" charset="0"/>
+                <a:cs typeface="Arial" panose="020B0604020202020204" pitchFamily="34" charset="0"/>
+                <a:sym typeface="Wingdings" pitchFamily="2" charset="2"/>
+              </a:rPr>
+              <a:t>D=0,</a:t>
+            </a:r>
+          </a:p>
+          <a:p>
+            <a:pPr algn="just"/>
+            <a:r>
+              <a:rPr lang="en-US" sz="1600" dirty="0" err="1">
+                <a:solidFill>
+                  <a:schemeClr val="tx1"/>
+                </a:solidFill>
+                <a:latin typeface="Arial" panose="020B0604020202020204" pitchFamily="34" charset="0"/>
+                <a:cs typeface="Arial" panose="020B0604020202020204" pitchFamily="34" charset="0"/>
+                <a:sym typeface="Wingdings" pitchFamily="2" charset="2"/>
+              </a:rPr>
+              <a:t>L_base</a:t>
+            </a:r>
+            <a:r>
+              <a:rPr lang="en-US" sz="1600" dirty="0">
+                <a:solidFill>
+                  <a:schemeClr val="tx1"/>
+                </a:solidFill>
+                <a:latin typeface="Arial" panose="020B0604020202020204" pitchFamily="34" charset="0"/>
+                <a:cs typeface="Arial" panose="020B0604020202020204" pitchFamily="34" charset="0"/>
+                <a:sym typeface="Wingdings" pitchFamily="2" charset="2"/>
+              </a:rPr>
+              <a:t>=1000</a:t>
+            </a:r>
+          </a:p>
+          <a:p>
+            <a:pPr algn="just"/>
+            <a:r>
+              <a:rPr lang="en-US" sz="1600" dirty="0">
+                <a:solidFill>
+                  <a:schemeClr val="tx1"/>
+                </a:solidFill>
+                <a:latin typeface="Arial" panose="020B0604020202020204" pitchFamily="34" charset="0"/>
+                <a:cs typeface="Arial" panose="020B0604020202020204" pitchFamily="34" charset="0"/>
+                <a:sym typeface="Wingdings" pitchFamily="2" charset="2"/>
+              </a:rPr>
+              <a:t>dL = </a:t>
+            </a:r>
+            <a:r>
+              <a:rPr lang="en-US" sz="1600" dirty="0" err="1">
+                <a:solidFill>
+                  <a:schemeClr val="tx1"/>
+                </a:solidFill>
+                <a:latin typeface="Arial" panose="020B0604020202020204" pitchFamily="34" charset="0"/>
+                <a:cs typeface="Arial" panose="020B0604020202020204" pitchFamily="34" charset="0"/>
+                <a:sym typeface="Wingdings" pitchFamily="2" charset="2"/>
+              </a:rPr>
+              <a:t>L_base</a:t>
+            </a:r>
+            <a:r>
+              <a:rPr lang="en-US" sz="1600" dirty="0">
+                <a:solidFill>
+                  <a:schemeClr val="tx1"/>
+                </a:solidFill>
+                <a:latin typeface="Arial" panose="020B0604020202020204" pitchFamily="34" charset="0"/>
+                <a:cs typeface="Arial" panose="020B0604020202020204" pitchFamily="34" charset="0"/>
+                <a:sym typeface="Wingdings" pitchFamily="2" charset="2"/>
+              </a:rPr>
+              <a:t> + 55960.0840224255;</a:t>
+            </a:r>
+          </a:p>
+          <a:p>
+            <a:pPr algn="just"/>
+            <a:r>
+              <a:rPr lang="en-US" sz="1600" dirty="0">
+                <a:solidFill>
+                  <a:schemeClr val="tx1"/>
+                </a:solidFill>
+                <a:latin typeface="Arial" panose="020B0604020202020204" pitchFamily="34" charset="0"/>
+                <a:cs typeface="Arial" panose="020B0604020202020204" pitchFamily="34" charset="0"/>
+                <a:sym typeface="Wingdings" pitchFamily="2" charset="2"/>
+              </a:rPr>
+              <a:t>loss = 4 dB / cm</a:t>
+            </a:r>
+          </a:p>
+          <a:p>
+            <a:pPr algn="just"/>
+            <a:r>
+              <a:rPr lang="en-US" sz="1600" b="1" dirty="0">
+                <a:solidFill>
+                  <a:schemeClr val="tx1"/>
+                </a:solidFill>
+                <a:latin typeface="Arial" panose="020B0604020202020204" pitchFamily="34" charset="0"/>
+                <a:cs typeface="Arial" panose="020B0604020202020204" pitchFamily="34" charset="0"/>
+                <a:sym typeface="Wingdings" pitchFamily="2" charset="2"/>
+              </a:rPr>
+              <a:t>Case 1</a:t>
+            </a:r>
+            <a:r>
+              <a:rPr lang="en-US" sz="1600" dirty="0">
+                <a:solidFill>
+                  <a:schemeClr val="tx1"/>
+                </a:solidFill>
+                <a:latin typeface="Arial" panose="020B0604020202020204" pitchFamily="34" charset="0"/>
+                <a:cs typeface="Arial" panose="020B0604020202020204" pitchFamily="34" charset="0"/>
+                <a:sym typeface="Wingdings" pitchFamily="2" charset="2"/>
+              </a:rPr>
+              <a:t>. Simulate for Ka = </a:t>
+            </a:r>
+            <a:r>
+              <a:rPr lang="en-US" sz="1600" dirty="0" err="1">
+                <a:solidFill>
+                  <a:schemeClr val="tx1"/>
+                </a:solidFill>
+                <a:latin typeface="Arial" panose="020B0604020202020204" pitchFamily="34" charset="0"/>
+                <a:cs typeface="Arial" panose="020B0604020202020204" pitchFamily="34" charset="0"/>
+                <a:sym typeface="Wingdings" pitchFamily="2" charset="2"/>
+              </a:rPr>
+              <a:t>Kb</a:t>
+            </a:r>
+            <a:r>
+              <a:rPr lang="en-US" sz="1600" dirty="0">
+                <a:solidFill>
+                  <a:schemeClr val="tx1"/>
+                </a:solidFill>
+                <a:latin typeface="Arial" panose="020B0604020202020204" pitchFamily="34" charset="0"/>
+                <a:cs typeface="Arial" panose="020B0604020202020204" pitchFamily="34" charset="0"/>
+                <a:sym typeface="Wingdings" pitchFamily="2" charset="2"/>
+              </a:rPr>
+              <a:t> = 0.5 for all </a:t>
+            </a:r>
+            <a:r>
+              <a:rPr lang="en-US" sz="1600" dirty="0" err="1">
+                <a:solidFill>
+                  <a:schemeClr val="tx1"/>
+                </a:solidFill>
+                <a:latin typeface="Arial" panose="020B0604020202020204" pitchFamily="34" charset="0"/>
+                <a:cs typeface="Arial" panose="020B0604020202020204" pitchFamily="34" charset="0"/>
+                <a:sym typeface="Wingdings" pitchFamily="2" charset="2"/>
+              </a:rPr>
+              <a:t>wvl</a:t>
+            </a:r>
+            <a:endParaRPr lang="en-US" sz="1600" dirty="0">
+              <a:solidFill>
+                <a:schemeClr val="tx1"/>
+              </a:solidFill>
+              <a:latin typeface="Arial" panose="020B0604020202020204" pitchFamily="34" charset="0"/>
+              <a:cs typeface="Arial" panose="020B0604020202020204" pitchFamily="34" charset="0"/>
+              <a:sym typeface="Wingdings" pitchFamily="2" charset="2"/>
+            </a:endParaRPr>
+          </a:p>
+          <a:p>
+            <a:pPr algn="just"/>
+            <a:r>
+              <a:rPr lang="en-US" sz="1600" b="1" dirty="0">
+                <a:solidFill>
+                  <a:schemeClr val="tx1"/>
+                </a:solidFill>
+                <a:latin typeface="Arial" panose="020B0604020202020204" pitchFamily="34" charset="0"/>
+                <a:cs typeface="Arial" panose="020B0604020202020204" pitchFamily="34" charset="0"/>
+                <a:sym typeface="Wingdings" pitchFamily="2" charset="2"/>
+              </a:rPr>
+              <a:t>Case 2</a:t>
+            </a:r>
+            <a:r>
+              <a:rPr lang="en-US" sz="1600" dirty="0">
+                <a:solidFill>
+                  <a:schemeClr val="tx1"/>
+                </a:solidFill>
+                <a:latin typeface="Arial" panose="020B0604020202020204" pitchFamily="34" charset="0"/>
+                <a:cs typeface="Arial" panose="020B0604020202020204" pitchFamily="34" charset="0"/>
+                <a:sym typeface="Wingdings" pitchFamily="2" charset="2"/>
+              </a:rPr>
+              <a:t>. Simulate for Ka=0.1 for all </a:t>
+            </a:r>
+            <a:r>
+              <a:rPr lang="en-US" sz="1600" dirty="0" err="1">
+                <a:solidFill>
+                  <a:schemeClr val="tx1"/>
+                </a:solidFill>
+                <a:latin typeface="Arial" panose="020B0604020202020204" pitchFamily="34" charset="0"/>
+                <a:cs typeface="Arial" panose="020B0604020202020204" pitchFamily="34" charset="0"/>
+                <a:sym typeface="Wingdings" pitchFamily="2" charset="2"/>
+              </a:rPr>
+              <a:t>wvl</a:t>
+            </a:r>
+            <a:endParaRPr lang="en-US" sz="1600" dirty="0">
+              <a:solidFill>
+                <a:schemeClr val="tx1"/>
+              </a:solidFill>
+              <a:latin typeface="Arial" panose="020B0604020202020204" pitchFamily="34" charset="0"/>
+              <a:cs typeface="Arial" panose="020B0604020202020204" pitchFamily="34" charset="0"/>
+              <a:sym typeface="Wingdings" pitchFamily="2" charset="2"/>
+            </a:endParaRPr>
+          </a:p>
+          <a:p>
+            <a:pPr algn="just"/>
+            <a:r>
+              <a:rPr lang="en-US" sz="1600" dirty="0" err="1">
+                <a:solidFill>
+                  <a:schemeClr val="tx1"/>
+                </a:solidFill>
+                <a:latin typeface="Arial" panose="020B0604020202020204" pitchFamily="34" charset="0"/>
+                <a:cs typeface="Arial" panose="020B0604020202020204" pitchFamily="34" charset="0"/>
+                <a:sym typeface="Wingdings" pitchFamily="2" charset="2"/>
+              </a:rPr>
+              <a:t>Kb</a:t>
+            </a:r>
+            <a:r>
+              <a:rPr lang="en-US" sz="1600" dirty="0">
+                <a:solidFill>
+                  <a:schemeClr val="tx1"/>
+                </a:solidFill>
+                <a:latin typeface="Arial" panose="020B0604020202020204" pitchFamily="34" charset="0"/>
+                <a:cs typeface="Arial" panose="020B0604020202020204" pitchFamily="34" charset="0"/>
+                <a:sym typeface="Wingdings" pitchFamily="2" charset="2"/>
+              </a:rPr>
+              <a:t>=0.5 for all </a:t>
+            </a:r>
+            <a:r>
+              <a:rPr lang="en-US" sz="1600" dirty="0" err="1">
+                <a:solidFill>
+                  <a:schemeClr val="tx1"/>
+                </a:solidFill>
+                <a:latin typeface="Arial" panose="020B0604020202020204" pitchFamily="34" charset="0"/>
+                <a:cs typeface="Arial" panose="020B0604020202020204" pitchFamily="34" charset="0"/>
+                <a:sym typeface="Wingdings" pitchFamily="2" charset="2"/>
+              </a:rPr>
+              <a:t>wvl</a:t>
+            </a:r>
+            <a:endParaRPr lang="en-US" sz="1600" dirty="0">
               <a:solidFill>
                 <a:schemeClr val="tx1"/>
               </a:solidFill>
@@ -8143,426 +9229,71 @@
               <a:cs typeface="Arial" panose="020B0604020202020204" pitchFamily="34" charset="0"/>
             </a:endParaRPr>
           </a:p>
-          <a:p>
-            <a:pPr algn="just"/>
-            <a:endParaRPr lang="en-US" sz="1200" dirty="0">
-              <a:solidFill>
-                <a:schemeClr val="tx1"/>
-              </a:solidFill>
-              <a:latin typeface="Arial" panose="020B0604020202020204" pitchFamily="34" charset="0"/>
-              <a:cs typeface="Arial" panose="020B0604020202020204" pitchFamily="34" charset="0"/>
-            </a:endParaRPr>
-          </a:p>
-          <a:p>
-            <a:pPr algn="just"/>
-            <a:r>
-              <a:rPr lang="en-US" sz="1200" dirty="0">
-                <a:solidFill>
-                  <a:schemeClr val="tx1"/>
-                </a:solidFill>
-                <a:latin typeface="Arial" panose="020B0604020202020204" pitchFamily="34" charset="0"/>
-                <a:cs typeface="Arial" panose="020B0604020202020204" pitchFamily="34" charset="0"/>
-              </a:rPr>
-              <a:t>Design the perimeter for a FSR = 15 nm. </a:t>
-            </a:r>
-          </a:p>
-          <a:p>
-            <a:pPr algn="just"/>
-            <a:endParaRPr lang="en-US" sz="1200" dirty="0">
-              <a:solidFill>
-                <a:schemeClr val="tx1"/>
-              </a:solidFill>
-              <a:latin typeface="Arial" panose="020B0604020202020204" pitchFamily="34" charset="0"/>
-              <a:cs typeface="Arial" panose="020B0604020202020204" pitchFamily="34" charset="0"/>
-            </a:endParaRPr>
-          </a:p>
-          <a:p>
-            <a:pPr algn="just"/>
-            <a:r>
-              <a:rPr lang="en-US" sz="1200" dirty="0">
-                <a:solidFill>
-                  <a:schemeClr val="tx1"/>
-                </a:solidFill>
-                <a:latin typeface="Arial" panose="020B0604020202020204" pitchFamily="34" charset="0"/>
-                <a:cs typeface="Arial" panose="020B0604020202020204" pitchFamily="34" charset="0"/>
-              </a:rPr>
-              <a:t>Use equations given in class that relate FSR and perimeter.</a:t>
-            </a:r>
-          </a:p>
-          <a:p>
-            <a:pPr algn="just"/>
-            <a:endParaRPr lang="en-US" sz="1200" dirty="0">
-              <a:solidFill>
-                <a:schemeClr val="tx1"/>
-              </a:solidFill>
-              <a:latin typeface="Arial" panose="020B0604020202020204" pitchFamily="34" charset="0"/>
-              <a:cs typeface="Arial" panose="020B0604020202020204" pitchFamily="34" charset="0"/>
-            </a:endParaRPr>
-          </a:p>
-          <a:p>
-            <a:pPr algn="just"/>
-            <a:endParaRPr lang="en-US" sz="1200" dirty="0">
-              <a:solidFill>
-                <a:schemeClr val="tx1"/>
-              </a:solidFill>
-              <a:latin typeface="Arial" panose="020B0604020202020204" pitchFamily="34" charset="0"/>
-              <a:cs typeface="Arial" panose="020B0604020202020204" pitchFamily="34" charset="0"/>
-            </a:endParaRPr>
-          </a:p>
-          <a:p>
-            <a:pPr algn="just"/>
-            <a:endParaRPr lang="en-US" sz="1200" dirty="0">
-              <a:solidFill>
-                <a:schemeClr val="tx1"/>
-              </a:solidFill>
-              <a:latin typeface="Arial" panose="020B0604020202020204" pitchFamily="34" charset="0"/>
-              <a:cs typeface="Arial" panose="020B0604020202020204" pitchFamily="34" charset="0"/>
-            </a:endParaRPr>
-          </a:p>
-        </p:txBody>
-      </p:sp>
-      <p:sp>
-        <p:nvSpPr>
-          <p:cNvPr id="10" name="Rectángulo 9">
+        </p:txBody>
+      </p:sp>
+      <p:sp>
+        <p:nvSpPr>
+          <p:cNvPr id="3" name="CuadroTexto 2">
             <a:extLst>
               <a:ext uri="{FF2B5EF4-FFF2-40B4-BE49-F238E27FC236}">
-                <a16:creationId xmlns:a16="http://schemas.microsoft.com/office/drawing/2014/main" id="{82011495-88D4-8787-6CB7-704897D84CF9}"/>
+                <a16:creationId xmlns:a16="http://schemas.microsoft.com/office/drawing/2014/main" id="{1A73B333-A08E-AE91-9823-46E0FE6F3AE2}"/>
               </a:ext>
             </a:extLst>
           </p:cNvPr>
-          <p:cNvSpPr/>
+          <p:cNvSpPr txBox="1"/>
           <p:nvPr/>
         </p:nvSpPr>
         <p:spPr>
           <a:xfrm>
-            <a:off x="611030" y="1418373"/>
-            <a:ext cx="3810000" cy="3306028"/>
+            <a:off x="642500" y="1601966"/>
+            <a:ext cx="6808381" cy="2123658"/>
           </a:xfrm>
           <a:prstGeom prst="rect">
             <a:avLst/>
           </a:prstGeom>
-          <a:noFill/>
+          <a:solidFill>
+            <a:schemeClr val="bg1">
+              <a:lumMod val="95000"/>
+            </a:schemeClr>
+          </a:solidFill>
           <a:ln w="28575">
             <a:solidFill>
               <a:srgbClr val="E0700D"/>
             </a:solidFill>
           </a:ln>
         </p:spPr>
-        <p:style>
-          <a:lnRef idx="2">
-            <a:schemeClr val="accent1">
-              <a:shade val="15000"/>
-            </a:schemeClr>
-          </a:lnRef>
-          <a:fillRef idx="1">
-            <a:schemeClr val="accent1"/>
-          </a:fillRef>
-          <a:effectRef idx="0">
-            <a:schemeClr val="accent1"/>
-          </a:effectRef>
-          <a:fontRef idx="minor">
-            <a:schemeClr val="lt1"/>
-          </a:fontRef>
-        </p:style>
-        <p:txBody>
-          <a:bodyPr rtlCol="0" anchor="ctr"/>
-          <a:lstStyle/>
-          <a:p>
-            <a:pPr algn="ctr"/>
-            <a:endParaRPr lang="en-US"/>
-          </a:p>
-        </p:txBody>
-      </p:sp>
-      <p:sp>
-        <p:nvSpPr>
-          <p:cNvPr id="12" name="CuadroTexto 11">
-            <a:extLst>
-              <a:ext uri="{FF2B5EF4-FFF2-40B4-BE49-F238E27FC236}">
-                <a16:creationId xmlns:a16="http://schemas.microsoft.com/office/drawing/2014/main" id="{3BD35A6E-6540-9761-4128-0E43122290D4}"/>
-              </a:ext>
-            </a:extLst>
-          </p:cNvPr>
-          <p:cNvSpPr txBox="1"/>
-          <p:nvPr/>
-        </p:nvSpPr>
-        <p:spPr>
-          <a:xfrm>
-            <a:off x="5536543" y="2494307"/>
-            <a:ext cx="2033313" cy="1323439"/>
-          </a:xfrm>
-          <a:prstGeom prst="rect">
-            <a:avLst/>
-          </a:prstGeom>
-          <a:noFill/>
-        </p:spPr>
-        <p:txBody>
-          <a:bodyPr wrap="none" rtlCol="0">
+        <p:txBody>
+          <a:bodyPr wrap="square" rtlCol="0">
             <a:spAutoFit/>
           </a:bodyPr>
           <a:lstStyle/>
           <a:p>
-            <a:pPr algn="ctr"/>
-            <a:r>
-              <a:rPr lang="es-ES" sz="2000" dirty="0"/>
-              <a:t>Single ring</a:t>
-            </a:r>
-          </a:p>
-          <a:p>
-            <a:pPr algn="ctr"/>
-            <a:r>
-              <a:rPr lang="es-ES" sz="2000" dirty="0"/>
-              <a:t>transfer </a:t>
-            </a:r>
-            <a:r>
-              <a:rPr lang="es-ES" sz="2000" dirty="0" err="1"/>
-              <a:t>functions</a:t>
-            </a:r>
-            <a:endParaRPr lang="es-ES" sz="2000" dirty="0"/>
-          </a:p>
-          <a:p>
-            <a:pPr algn="ctr"/>
-            <a:endParaRPr lang="es-ES" sz="2000" dirty="0"/>
-          </a:p>
-          <a:p>
-            <a:pPr algn="ctr"/>
-            <a:r>
-              <a:rPr lang="es-ES" sz="2000" dirty="0" err="1"/>
-              <a:t>Logaritmic</a:t>
-            </a:r>
-            <a:r>
-              <a:rPr lang="es-ES" sz="2000" dirty="0"/>
-              <a:t> </a:t>
-            </a:r>
-            <a:r>
-              <a:rPr lang="es-ES" sz="2000" dirty="0" err="1"/>
-              <a:t>units</a:t>
-            </a:r>
-            <a:endParaRPr lang="en-US" sz="2000" dirty="0"/>
-          </a:p>
-        </p:txBody>
-      </p:sp>
-      <p:sp>
-        <p:nvSpPr>
-          <p:cNvPr id="13" name="Rectángulo 12">
-            <a:extLst>
-              <a:ext uri="{FF2B5EF4-FFF2-40B4-BE49-F238E27FC236}">
-                <a16:creationId xmlns:a16="http://schemas.microsoft.com/office/drawing/2014/main" id="{03798D61-1E16-8473-BDCE-1D97F95EF7BE}"/>
-              </a:ext>
-            </a:extLst>
-          </p:cNvPr>
-          <p:cNvSpPr/>
-          <p:nvPr/>
-        </p:nvSpPr>
-        <p:spPr>
-          <a:xfrm>
-            <a:off x="4648200" y="1418373"/>
-            <a:ext cx="3810000" cy="3306028"/>
-          </a:xfrm>
-          <a:prstGeom prst="rect">
-            <a:avLst/>
-          </a:prstGeom>
-          <a:noFill/>
-          <a:ln w="28575">
-            <a:solidFill>
-              <a:srgbClr val="E0700D"/>
-            </a:solidFill>
-          </a:ln>
-        </p:spPr>
-        <p:style>
-          <a:lnRef idx="2">
-            <a:schemeClr val="accent1">
-              <a:shade val="15000"/>
-            </a:schemeClr>
-          </a:lnRef>
-          <a:fillRef idx="1">
-            <a:schemeClr val="accent1"/>
-          </a:fillRef>
-          <a:effectRef idx="0">
-            <a:schemeClr val="accent1"/>
-          </a:effectRef>
-          <a:fontRef idx="minor">
-            <a:schemeClr val="lt1"/>
-          </a:fontRef>
-        </p:style>
-        <p:txBody>
-          <a:bodyPr rtlCol="0" anchor="ctr"/>
-          <a:lstStyle/>
-          <a:p>
-            <a:pPr algn="ctr"/>
-            <a:endParaRPr lang="en-US"/>
-          </a:p>
-        </p:txBody>
-      </p:sp>
-      <p:sp>
-        <p:nvSpPr>
-          <p:cNvPr id="16" name="CuadroTexto 15">
-            <a:extLst>
-              <a:ext uri="{FF2B5EF4-FFF2-40B4-BE49-F238E27FC236}">
-                <a16:creationId xmlns:a16="http://schemas.microsoft.com/office/drawing/2014/main" id="{B49B3613-E785-3FCB-DA8D-2B43EB104C5D}"/>
-              </a:ext>
-            </a:extLst>
-          </p:cNvPr>
-          <p:cNvSpPr txBox="1"/>
-          <p:nvPr/>
-        </p:nvSpPr>
-        <p:spPr>
-          <a:xfrm>
-            <a:off x="1499379" y="2478160"/>
-            <a:ext cx="2033313" cy="1323439"/>
-          </a:xfrm>
-          <a:prstGeom prst="rect">
-            <a:avLst/>
-          </a:prstGeom>
-          <a:noFill/>
-        </p:spPr>
-        <p:txBody>
-          <a:bodyPr wrap="none" rtlCol="0">
-            <a:spAutoFit/>
-          </a:bodyPr>
-          <a:lstStyle/>
-          <a:p>
-            <a:pPr algn="ctr"/>
-            <a:r>
-              <a:rPr lang="es-ES" sz="2000" dirty="0"/>
-              <a:t>Single ring</a:t>
-            </a:r>
-          </a:p>
-          <a:p>
-            <a:pPr algn="ctr"/>
-            <a:r>
-              <a:rPr lang="es-ES" sz="2000" dirty="0"/>
-              <a:t>transfer </a:t>
-            </a:r>
-            <a:r>
-              <a:rPr lang="es-ES" sz="2000" dirty="0" err="1"/>
-              <a:t>functions</a:t>
-            </a:r>
-            <a:endParaRPr lang="es-ES" sz="2000" dirty="0"/>
-          </a:p>
-          <a:p>
-            <a:pPr algn="ctr"/>
-            <a:endParaRPr lang="es-ES" sz="2000" dirty="0"/>
-          </a:p>
-          <a:p>
-            <a:pPr algn="ctr"/>
-            <a:r>
-              <a:rPr lang="es-ES" sz="2000" dirty="0"/>
-              <a:t>Linear </a:t>
-            </a:r>
-            <a:r>
-              <a:rPr lang="es-ES" sz="2000" dirty="0" err="1"/>
-              <a:t>units</a:t>
-            </a:r>
-            <a:endParaRPr lang="en-US" sz="2000" dirty="0"/>
-          </a:p>
-        </p:txBody>
-      </p:sp>
-      <p:pic>
-        <p:nvPicPr>
-          <p:cNvPr id="11" name="Gráfico 10">
-            <a:extLst>
-              <a:ext uri="{FF2B5EF4-FFF2-40B4-BE49-F238E27FC236}">
-                <a16:creationId xmlns:a16="http://schemas.microsoft.com/office/drawing/2014/main" id="{64B3EEA8-5B6A-F628-0B9C-42450CEE9BE1}"/>
-              </a:ext>
-            </a:extLst>
-          </p:cNvPr>
-          <p:cNvPicPr>
-            <a:picLocks noChangeAspect="1"/>
-          </p:cNvPicPr>
-          <p:nvPr/>
-        </p:nvPicPr>
-        <p:blipFill>
-          <a:blip>
-            <a:extLst>
-              <a:ext uri="{96DAC541-7B7A-43D3-8B79-37D633B846F1}">
-                <asvg:svgBlip xmlns:asvg="http://schemas.microsoft.com/office/drawing/2016/SVG/main" r:embed="rId2"/>
-              </a:ext>
-            </a:extLst>
-          </a:blip>
-          <a:stretch>
-            <a:fillRect/>
-          </a:stretch>
-        </p:blipFill>
-        <p:spPr>
-          <a:xfrm>
-            <a:off x="5045006" y="6356057"/>
-            <a:ext cx="6409575" cy="363174"/>
-          </a:xfrm>
-          <a:prstGeom prst="rect">
-            <a:avLst/>
-          </a:prstGeom>
-        </p:spPr>
-      </p:pic>
-      <p:sp>
-        <p:nvSpPr>
-          <p:cNvPr id="14" name="object 16">
-            <a:extLst>
-              <a:ext uri="{FF2B5EF4-FFF2-40B4-BE49-F238E27FC236}">
-                <a16:creationId xmlns:a16="http://schemas.microsoft.com/office/drawing/2014/main" id="{4E9E05B5-9445-DD50-60E9-03B04ED264D4}"/>
-              </a:ext>
-            </a:extLst>
-          </p:cNvPr>
-          <p:cNvSpPr txBox="1">
-            <a:spLocks/>
-          </p:cNvSpPr>
-          <p:nvPr/>
-        </p:nvSpPr>
-        <p:spPr>
-          <a:xfrm>
-            <a:off x="685800" y="408883"/>
-            <a:ext cx="10994410" cy="718145"/>
-          </a:xfrm>
-          <a:prstGeom prst="rect">
-            <a:avLst/>
-          </a:prstGeom>
-        </p:spPr>
-        <p:txBody>
-          <a:bodyPr vert="horz" wrap="square" lIns="0" tIns="12700" rIns="0" bIns="0" rtlCol="0">
-            <a:spAutoFit/>
-          </a:bodyPr>
-          <a:lstStyle>
-            <a:lvl1pPr>
-              <a:defRPr sz="2000" b="1" i="0">
-                <a:solidFill>
-                  <a:schemeClr val="tx1"/>
-                </a:solidFill>
-                <a:latin typeface="Calibri"/>
-                <a:ea typeface="+mj-ea"/>
-                <a:cs typeface="Calibri"/>
-              </a:defRPr>
-            </a:lvl1pPr>
-          </a:lstStyle>
-          <a:p>
-            <a:pPr marL="12700">
-              <a:spcBef>
-                <a:spcPts val="100"/>
-              </a:spcBef>
-            </a:pPr>
-            <a:r>
-              <a:rPr lang="en-US" sz="2500" kern="0" dirty="0"/>
-              <a:t>Learning outcome #5 – Ring resonator design</a:t>
-            </a:r>
-          </a:p>
-          <a:p>
-            <a:pPr marL="12700">
-              <a:spcBef>
-                <a:spcPts val="100"/>
-              </a:spcBef>
-            </a:pPr>
-            <a:r>
-              <a:rPr lang="en-US" b="0" kern="0" spc="-5" dirty="0">
-                <a:latin typeface="+mj-lt"/>
-                <a:cs typeface="Lucida Sans"/>
-              </a:rPr>
-              <a:t>Design the perimeter for a FSR = 15 nm. </a:t>
-            </a:r>
+            <a:pPr algn="just"/>
+            <a:r>
+              <a:rPr lang="es-ES" sz="1200" dirty="0">
+                <a:latin typeface="Arial" panose="020B0604020202020204" pitchFamily="34" charset="0"/>
+                <a:cs typeface="Arial" panose="020B0604020202020204" pitchFamily="34" charset="0"/>
+              </a:rPr>
+              <a:t>La principal diferencia entre ambos casos está en el reparto de potencia realizado por el acoplador de entrada. En el caso 1 (Ka=Kb=0.5), el MZI está balanceado y la potencia se divide de forma simétrica entre los dos brazos. Esto permite que las señales interfieran eficientemente al recombinarse, obteniendo mínimos más profundos y una mayor visibilidad de las franjas de interferencia. La relación de extinción (ER) es mayor, aproximadamente de unos 2.5 dB. En el caso 2 (Ka=0.1, Kb=0.5), el acoplador de entrada reparte la potencia de forma desigual, por lo que una rama transporta mucha más potencia que la otra. Aunque sigue existiendo un patrón de interferencia periódico, la interferencia destructiva es menos eficiente y los mínimos son menos profundos. Como consecuencia, la relación de extinción disminuye notablemente respecto al caso 1.</a:t>
+            </a:r>
+            <a:endParaRPr lang="en-US" sz="1200" dirty="0">
+              <a:latin typeface="Arial" panose="020B0604020202020204" pitchFamily="34" charset="0"/>
+              <a:cs typeface="Arial" panose="020B0604020202020204" pitchFamily="34" charset="0"/>
+            </a:endParaRPr>
+          </a:p>
+          <a:p>
+            <a:pPr algn="just"/>
+            <a:endParaRPr lang="en-US" sz="1200" dirty="0">
+              <a:latin typeface="Arial" panose="020B0604020202020204" pitchFamily="34" charset="0"/>
+              <a:cs typeface="Arial" panose="020B0604020202020204" pitchFamily="34" charset="0"/>
+            </a:endParaRPr>
           </a:p>
         </p:txBody>
       </p:sp>
     </p:spTree>
     <p:extLst>
       <p:ext uri="{BB962C8B-B14F-4D97-AF65-F5344CB8AC3E}">
-        <p14:creationId xmlns:p14="http://schemas.microsoft.com/office/powerpoint/2010/main" val="2915989261"/>
+        <p14:creationId xmlns:p14="http://schemas.microsoft.com/office/powerpoint/2010/main" val="1150117793"/>
       </p:ext>
     </p:extLst>
   </p:cSld>
@@ -8661,8 +9392,8 @@
         </p:nvSpPr>
         <p:spPr>
           <a:xfrm>
-            <a:off x="611029" y="4860335"/>
-            <a:ext cx="11199530" cy="646331"/>
+            <a:off x="7870651" y="2209800"/>
+            <a:ext cx="3809559" cy="2677656"/>
           </a:xfrm>
           <a:prstGeom prst="rect">
             <a:avLst/>
@@ -8686,15 +9417,39 @@
           <a:p>
             <a:pPr algn="just"/>
             <a:r>
-              <a:rPr lang="en-US" sz="1200" dirty="0">
-                <a:latin typeface="Arial" panose="020B0604020202020204" pitchFamily="34" charset="0"/>
-                <a:cs typeface="Arial" panose="020B0604020202020204" pitchFamily="34" charset="0"/>
-              </a:rPr>
-              <a:t>Comment results: Try to classify the resonances, in which case are you close to critical coupling? Why?</a:t>
+              <a:rPr lang="es-ES" sz="1200" dirty="0">
+                <a:latin typeface="Arial" panose="020B0604020202020204" pitchFamily="34" charset="0"/>
+                <a:cs typeface="Arial" panose="020B0604020202020204" pitchFamily="34" charset="0"/>
+              </a:rPr>
+              <a:t>La función de transferencia del resonador en anillo presenta un comportamiento periódico, con mínimos de transmisión en las longitudes de onda de resonancia. En escala lineal se observan los valles de resonancia, mientras que en escala logarítmica se aprecia mejor la profundidad de dichos mínimos. El FSR se calcula como:</a:t>
             </a:r>
           </a:p>
           <a:p>
             <a:pPr algn="just"/>
+            <a:r>
+              <a:rPr lang="es-ES" sz="1200" dirty="0">
+                <a:latin typeface="Arial" panose="020B0604020202020204" pitchFamily="34" charset="0"/>
+                <a:cs typeface="Arial" panose="020B0604020202020204" pitchFamily="34" charset="0"/>
+              </a:rPr>
+              <a:t>	FSR=(lambda)^2/(ng*L)</a:t>
+            </a:r>
+          </a:p>
+          <a:p>
+            <a:pPr algn="just"/>
+            <a:r>
+              <a:rPr lang="es-ES" sz="1200" dirty="0">
+                <a:latin typeface="Arial" panose="020B0604020202020204" pitchFamily="34" charset="0"/>
+                <a:cs typeface="Arial" panose="020B0604020202020204" pitchFamily="34" charset="0"/>
+              </a:rPr>
+              <a:t>	FSR= (1.55um)^2/(2*50nm) = 0,024 </a:t>
+            </a:r>
+            <a:r>
+              <a:rPr lang="es-ES" sz="1200" dirty="0" err="1">
+                <a:latin typeface="Arial" panose="020B0604020202020204" pitchFamily="34" charset="0"/>
+                <a:cs typeface="Arial" panose="020B0604020202020204" pitchFamily="34" charset="0"/>
+              </a:rPr>
+              <a:t>um</a:t>
+            </a:r>
             <a:endParaRPr lang="en-US" sz="1200" dirty="0">
               <a:latin typeface="Arial" panose="020B0604020202020204" pitchFamily="34" charset="0"/>
               <a:cs typeface="Arial" panose="020B0604020202020204" pitchFamily="34" charset="0"/>
@@ -8702,6 +9457,27 @@
           </a:p>
           <a:p>
             <a:pPr algn="just"/>
+            <a:r>
+              <a:rPr lang="es-ES" sz="1200" dirty="0">
+                <a:latin typeface="Arial" panose="020B0604020202020204" pitchFamily="34" charset="0"/>
+                <a:cs typeface="Arial" panose="020B0604020202020204" pitchFamily="34" charset="0"/>
+              </a:rPr>
+              <a:t>Por tanto, al aumentar el perímetro del anillo, las resonancias aparecen más juntas y el FSR disminuye. Para este caso, con un perímetro de aproximadamente L=50 </a:t>
+            </a:r>
+            <a:r>
+              <a:rPr lang="es-ES" sz="1200" dirty="0" err="1">
+                <a:latin typeface="Arial" panose="020B0604020202020204" pitchFamily="34" charset="0"/>
+                <a:cs typeface="Arial" panose="020B0604020202020204" pitchFamily="34" charset="0"/>
+              </a:rPr>
+              <a:t>um</a:t>
+            </a:r>
+            <a:r>
+              <a:rPr lang="es-ES" sz="1200" dirty="0">
+                <a:latin typeface="Arial" panose="020B0604020202020204" pitchFamily="34" charset="0"/>
+                <a:cs typeface="Arial" panose="020B0604020202020204" pitchFamily="34" charset="0"/>
+              </a:rPr>
+              <a:t>, el valor calculado coincide con la separación observada en la gráfica.</a:t>
+            </a:r>
             <a:endParaRPr lang="en-US" sz="1200" dirty="0">
               <a:latin typeface="Arial" panose="020B0604020202020204" pitchFamily="34" charset="0"/>
               <a:cs typeface="Arial" panose="020B0604020202020204" pitchFamily="34" charset="0"/>
@@ -8709,433 +9485,12 @@
           </a:p>
         </p:txBody>
       </p:sp>
-      <p:sp>
-        <p:nvSpPr>
-          <p:cNvPr id="11" name="Rectángulo 10">
-            <a:extLst>
-              <a:ext uri="{FF2B5EF4-FFF2-40B4-BE49-F238E27FC236}">
-                <a16:creationId xmlns:a16="http://schemas.microsoft.com/office/drawing/2014/main" id="{B811A5F9-C0B5-716C-70FB-9472E1BC2CD3}"/>
-              </a:ext>
-            </a:extLst>
-          </p:cNvPr>
-          <p:cNvSpPr/>
-          <p:nvPr/>
-        </p:nvSpPr>
-        <p:spPr>
-          <a:xfrm>
-            <a:off x="611030" y="1418373"/>
-            <a:ext cx="2538552" cy="3306028"/>
-          </a:xfrm>
-          <a:prstGeom prst="rect">
-            <a:avLst/>
-          </a:prstGeom>
-          <a:noFill/>
-          <a:ln w="28575">
-            <a:solidFill>
-              <a:srgbClr val="E0700D"/>
-            </a:solidFill>
-          </a:ln>
-        </p:spPr>
-        <p:style>
-          <a:lnRef idx="2">
-            <a:schemeClr val="accent1">
-              <a:shade val="15000"/>
-            </a:schemeClr>
-          </a:lnRef>
-          <a:fillRef idx="1">
-            <a:schemeClr val="accent1"/>
-          </a:fillRef>
-          <a:effectRef idx="0">
-            <a:schemeClr val="accent1"/>
-          </a:effectRef>
-          <a:fontRef idx="minor">
-            <a:schemeClr val="lt1"/>
-          </a:fontRef>
-        </p:style>
-        <p:txBody>
-          <a:bodyPr rtlCol="0" anchor="ctr"/>
-          <a:lstStyle/>
-          <a:p>
-            <a:pPr algn="ctr"/>
-            <a:endParaRPr lang="en-US"/>
-          </a:p>
-        </p:txBody>
-      </p:sp>
-      <p:sp>
-        <p:nvSpPr>
-          <p:cNvPr id="14" name="Rectángulo 13">
-            <a:extLst>
-              <a:ext uri="{FF2B5EF4-FFF2-40B4-BE49-F238E27FC236}">
-                <a16:creationId xmlns:a16="http://schemas.microsoft.com/office/drawing/2014/main" id="{6AA857E7-5C39-DCE1-10B5-40300FCF4B26}"/>
-              </a:ext>
-            </a:extLst>
-          </p:cNvPr>
-          <p:cNvSpPr/>
-          <p:nvPr/>
-        </p:nvSpPr>
-        <p:spPr>
-          <a:xfrm>
-            <a:off x="3277315" y="1419036"/>
-            <a:ext cx="2538552" cy="3306028"/>
-          </a:xfrm>
-          <a:prstGeom prst="rect">
-            <a:avLst/>
-          </a:prstGeom>
-          <a:noFill/>
-          <a:ln w="28575">
-            <a:solidFill>
-              <a:srgbClr val="E0700D"/>
-            </a:solidFill>
-          </a:ln>
-        </p:spPr>
-        <p:style>
-          <a:lnRef idx="2">
-            <a:schemeClr val="accent1">
-              <a:shade val="15000"/>
-            </a:schemeClr>
-          </a:lnRef>
-          <a:fillRef idx="1">
-            <a:schemeClr val="accent1"/>
-          </a:fillRef>
-          <a:effectRef idx="0">
-            <a:schemeClr val="accent1"/>
-          </a:effectRef>
-          <a:fontRef idx="minor">
-            <a:schemeClr val="lt1"/>
-          </a:fontRef>
-        </p:style>
-        <p:txBody>
-          <a:bodyPr rtlCol="0" anchor="ctr"/>
-          <a:lstStyle/>
-          <a:p>
-            <a:pPr algn="ctr"/>
-            <a:endParaRPr lang="en-US"/>
-          </a:p>
-        </p:txBody>
-      </p:sp>
-      <p:sp>
-        <p:nvSpPr>
-          <p:cNvPr id="15" name="CuadroTexto 14">
-            <a:extLst>
-              <a:ext uri="{FF2B5EF4-FFF2-40B4-BE49-F238E27FC236}">
-                <a16:creationId xmlns:a16="http://schemas.microsoft.com/office/drawing/2014/main" id="{54CF28B4-1346-F41D-2CD8-EA104ABBFB98}"/>
-              </a:ext>
-            </a:extLst>
-          </p:cNvPr>
-          <p:cNvSpPr txBox="1"/>
-          <p:nvPr/>
-        </p:nvSpPr>
-        <p:spPr>
-          <a:xfrm>
-            <a:off x="863650" y="2101891"/>
-            <a:ext cx="2033313" cy="1938992"/>
-          </a:xfrm>
-          <a:prstGeom prst="rect">
-            <a:avLst/>
-          </a:prstGeom>
-          <a:noFill/>
-        </p:spPr>
-        <p:txBody>
-          <a:bodyPr wrap="none" rtlCol="0">
-            <a:spAutoFit/>
-          </a:bodyPr>
-          <a:lstStyle/>
-          <a:p>
-            <a:pPr algn="ctr"/>
-            <a:r>
-              <a:rPr lang="es-ES" sz="2000" dirty="0"/>
-              <a:t>Single ring</a:t>
-            </a:r>
-          </a:p>
-          <a:p>
-            <a:pPr algn="ctr"/>
-            <a:r>
-              <a:rPr lang="es-ES" sz="2000" dirty="0"/>
-              <a:t>transfer </a:t>
-            </a:r>
-            <a:r>
-              <a:rPr lang="es-ES" sz="2000" dirty="0" err="1"/>
-              <a:t>functions</a:t>
-            </a:r>
-            <a:endParaRPr lang="es-ES" sz="2000" dirty="0"/>
-          </a:p>
-          <a:p>
-            <a:pPr algn="ctr"/>
-            <a:endParaRPr lang="es-ES" sz="2000" dirty="0"/>
-          </a:p>
-          <a:p>
-            <a:pPr algn="ctr"/>
-            <a:r>
-              <a:rPr lang="es-ES" sz="2000" dirty="0"/>
-              <a:t>Linear </a:t>
-            </a:r>
-            <a:r>
-              <a:rPr lang="es-ES" sz="2000" dirty="0" err="1"/>
-              <a:t>units</a:t>
-            </a:r>
-            <a:endParaRPr lang="es-ES" sz="2000" dirty="0"/>
-          </a:p>
-          <a:p>
-            <a:pPr algn="ctr"/>
-            <a:endParaRPr lang="es-ES" sz="2000" dirty="0"/>
-          </a:p>
-          <a:p>
-            <a:pPr algn="ctr"/>
-            <a:r>
-              <a:rPr lang="es-ES" sz="2000" dirty="0"/>
-              <a:t>K=</a:t>
-            </a:r>
-            <a:endParaRPr lang="en-US" sz="2000" dirty="0"/>
-          </a:p>
-        </p:txBody>
-      </p:sp>
-      <p:sp>
-        <p:nvSpPr>
-          <p:cNvPr id="9" name="Rectángulo 8">
-            <a:extLst>
-              <a:ext uri="{FF2B5EF4-FFF2-40B4-BE49-F238E27FC236}">
-                <a16:creationId xmlns:a16="http://schemas.microsoft.com/office/drawing/2014/main" id="{11F0F5FC-B571-59FC-7890-3105A6A843BB}"/>
-              </a:ext>
-            </a:extLst>
-          </p:cNvPr>
-          <p:cNvSpPr/>
-          <p:nvPr/>
-        </p:nvSpPr>
-        <p:spPr>
-          <a:xfrm>
-            <a:off x="5943600" y="1418373"/>
-            <a:ext cx="2538552" cy="3306028"/>
-          </a:xfrm>
-          <a:prstGeom prst="rect">
-            <a:avLst/>
-          </a:prstGeom>
-          <a:noFill/>
-          <a:ln w="28575">
-            <a:solidFill>
-              <a:srgbClr val="E0700D"/>
-            </a:solidFill>
-          </a:ln>
-        </p:spPr>
-        <p:style>
-          <a:lnRef idx="2">
-            <a:schemeClr val="accent1">
-              <a:shade val="15000"/>
-            </a:schemeClr>
-          </a:lnRef>
-          <a:fillRef idx="1">
-            <a:schemeClr val="accent1"/>
-          </a:fillRef>
-          <a:effectRef idx="0">
-            <a:schemeClr val="accent1"/>
-          </a:effectRef>
-          <a:fontRef idx="minor">
-            <a:schemeClr val="lt1"/>
-          </a:fontRef>
-        </p:style>
-        <p:txBody>
-          <a:bodyPr rtlCol="0" anchor="ctr"/>
-          <a:lstStyle/>
-          <a:p>
-            <a:pPr algn="ctr"/>
-            <a:endParaRPr lang="en-US"/>
-          </a:p>
-        </p:txBody>
-      </p:sp>
-      <p:sp>
-        <p:nvSpPr>
-          <p:cNvPr id="10" name="CuadroTexto 9">
-            <a:extLst>
-              <a:ext uri="{FF2B5EF4-FFF2-40B4-BE49-F238E27FC236}">
-                <a16:creationId xmlns:a16="http://schemas.microsoft.com/office/drawing/2014/main" id="{3146642F-220B-8F6A-59A8-2D128DDF3BEB}"/>
-              </a:ext>
-            </a:extLst>
-          </p:cNvPr>
-          <p:cNvSpPr txBox="1"/>
-          <p:nvPr/>
-        </p:nvSpPr>
-        <p:spPr>
-          <a:xfrm>
-            <a:off x="3529935" y="2104638"/>
-            <a:ext cx="2033313" cy="1938992"/>
-          </a:xfrm>
-          <a:prstGeom prst="rect">
-            <a:avLst/>
-          </a:prstGeom>
-          <a:noFill/>
-        </p:spPr>
-        <p:txBody>
-          <a:bodyPr wrap="none" rtlCol="0">
-            <a:spAutoFit/>
-          </a:bodyPr>
-          <a:lstStyle/>
-          <a:p>
-            <a:pPr algn="ctr"/>
-            <a:r>
-              <a:rPr lang="es-ES" sz="2000" dirty="0"/>
-              <a:t>Single ring</a:t>
-            </a:r>
-          </a:p>
-          <a:p>
-            <a:pPr algn="ctr"/>
-            <a:r>
-              <a:rPr lang="es-ES" sz="2000" dirty="0"/>
-              <a:t>transfer </a:t>
-            </a:r>
-            <a:r>
-              <a:rPr lang="es-ES" sz="2000" dirty="0" err="1"/>
-              <a:t>functions</a:t>
-            </a:r>
-            <a:endParaRPr lang="es-ES" sz="2000" dirty="0"/>
-          </a:p>
-          <a:p>
-            <a:pPr algn="ctr"/>
-            <a:endParaRPr lang="es-ES" sz="2000" dirty="0"/>
-          </a:p>
-          <a:p>
-            <a:pPr algn="ctr"/>
-            <a:r>
-              <a:rPr lang="es-ES" sz="2000" dirty="0"/>
-              <a:t>Linear </a:t>
-            </a:r>
-            <a:r>
-              <a:rPr lang="es-ES" sz="2000" dirty="0" err="1"/>
-              <a:t>units</a:t>
-            </a:r>
-            <a:endParaRPr lang="es-ES" sz="2000" dirty="0"/>
-          </a:p>
-          <a:p>
-            <a:pPr algn="ctr"/>
-            <a:endParaRPr lang="es-ES" sz="2000" dirty="0"/>
-          </a:p>
-          <a:p>
-            <a:pPr algn="ctr"/>
-            <a:r>
-              <a:rPr lang="es-ES" sz="2000" dirty="0"/>
-              <a:t>K=</a:t>
-            </a:r>
-            <a:endParaRPr lang="en-US" sz="2000" dirty="0"/>
-          </a:p>
-        </p:txBody>
-      </p:sp>
-      <p:sp>
-        <p:nvSpPr>
-          <p:cNvPr id="13" name="CuadroTexto 12">
-            <a:extLst>
-              <a:ext uri="{FF2B5EF4-FFF2-40B4-BE49-F238E27FC236}">
-                <a16:creationId xmlns:a16="http://schemas.microsoft.com/office/drawing/2014/main" id="{057C499E-829F-FB11-9128-843C937CB822}"/>
-              </a:ext>
-            </a:extLst>
-          </p:cNvPr>
-          <p:cNvSpPr txBox="1"/>
-          <p:nvPr/>
-        </p:nvSpPr>
-        <p:spPr>
-          <a:xfrm>
-            <a:off x="6195187" y="2101891"/>
-            <a:ext cx="2033313" cy="1938992"/>
-          </a:xfrm>
-          <a:prstGeom prst="rect">
-            <a:avLst/>
-          </a:prstGeom>
-          <a:noFill/>
-        </p:spPr>
-        <p:txBody>
-          <a:bodyPr wrap="none" rtlCol="0">
-            <a:spAutoFit/>
-          </a:bodyPr>
-          <a:lstStyle/>
-          <a:p>
-            <a:pPr algn="ctr"/>
-            <a:r>
-              <a:rPr lang="es-ES" sz="2000" dirty="0"/>
-              <a:t>Single ring</a:t>
-            </a:r>
-          </a:p>
-          <a:p>
-            <a:pPr algn="ctr"/>
-            <a:r>
-              <a:rPr lang="es-ES" sz="2000" dirty="0"/>
-              <a:t>transfer </a:t>
-            </a:r>
-            <a:r>
-              <a:rPr lang="es-ES" sz="2000" dirty="0" err="1"/>
-              <a:t>functions</a:t>
-            </a:r>
-            <a:endParaRPr lang="es-ES" sz="2000" dirty="0"/>
-          </a:p>
-          <a:p>
-            <a:pPr algn="ctr"/>
-            <a:endParaRPr lang="es-ES" sz="2000" dirty="0"/>
-          </a:p>
-          <a:p>
-            <a:pPr algn="ctr"/>
-            <a:r>
-              <a:rPr lang="es-ES" sz="2000" dirty="0"/>
-              <a:t>Linear </a:t>
-            </a:r>
-            <a:r>
-              <a:rPr lang="es-ES" sz="2000" dirty="0" err="1"/>
-              <a:t>units</a:t>
-            </a:r>
-            <a:endParaRPr lang="es-ES" sz="2000" dirty="0"/>
-          </a:p>
-          <a:p>
-            <a:pPr algn="ctr"/>
-            <a:endParaRPr lang="es-ES" sz="2000" dirty="0"/>
-          </a:p>
-          <a:p>
-            <a:pPr algn="ctr"/>
-            <a:r>
-              <a:rPr lang="es-ES" sz="2000" dirty="0"/>
-              <a:t>K=</a:t>
-            </a:r>
-            <a:endParaRPr lang="en-US" sz="2000" dirty="0"/>
-          </a:p>
-        </p:txBody>
-      </p:sp>
-      <p:sp>
-        <p:nvSpPr>
-          <p:cNvPr id="12" name="CuadroTexto 11">
-            <a:extLst>
-              <a:ext uri="{FF2B5EF4-FFF2-40B4-BE49-F238E27FC236}">
-                <a16:creationId xmlns:a16="http://schemas.microsoft.com/office/drawing/2014/main" id="{4E78CC89-1377-28A4-024D-1B017D551FC5}"/>
-              </a:ext>
-            </a:extLst>
-          </p:cNvPr>
-          <p:cNvSpPr txBox="1"/>
-          <p:nvPr/>
-        </p:nvSpPr>
-        <p:spPr>
-          <a:xfrm>
-            <a:off x="9869875" y="2871332"/>
-            <a:ext cx="360996" cy="400110"/>
-          </a:xfrm>
-          <a:prstGeom prst="rect">
-            <a:avLst/>
-          </a:prstGeom>
-          <a:noFill/>
-        </p:spPr>
-        <p:txBody>
-          <a:bodyPr wrap="none" rtlCol="0">
-            <a:spAutoFit/>
-          </a:bodyPr>
-          <a:lstStyle/>
-          <a:p>
-            <a:pPr algn="ctr"/>
-            <a:r>
-              <a:rPr lang="es-ES" sz="2000" dirty="0"/>
-              <a:t>…</a:t>
-            </a:r>
-            <a:endParaRPr lang="en-US" sz="2000" dirty="0"/>
-          </a:p>
-        </p:txBody>
-      </p:sp>
       <p:pic>
         <p:nvPicPr>
-          <p:cNvPr id="3" name="Gráfico 2">
+          <p:cNvPr id="9" name="Gráfico 8">
             <a:extLst>
               <a:ext uri="{FF2B5EF4-FFF2-40B4-BE49-F238E27FC236}">
-                <a16:creationId xmlns:a16="http://schemas.microsoft.com/office/drawing/2014/main" id="{0B245A9E-6C9A-F3A8-E4B7-661580126414}"/>
+                <a16:creationId xmlns:a16="http://schemas.microsoft.com/office/drawing/2014/main" id="{83C716FC-7070-6DA5-E116-195D4CD9BDB4}"/>
               </a:ext>
             </a:extLst>
           </p:cNvPr>
@@ -9168,10 +9523,10 @@
       </p:pic>
       <p:sp>
         <p:nvSpPr>
-          <p:cNvPr id="16" name="object 16">
+          <p:cNvPr id="10" name="object 16">
             <a:extLst>
               <a:ext uri="{FF2B5EF4-FFF2-40B4-BE49-F238E27FC236}">
-                <a16:creationId xmlns:a16="http://schemas.microsoft.com/office/drawing/2014/main" id="{8266F13B-05F1-81DE-B638-66D10EEB9FA2}"/>
+                <a16:creationId xmlns:a16="http://schemas.microsoft.com/office/drawing/2014/main" id="{C319E249-48A9-70AD-7ACE-23CF9ABF6137}"/>
               </a:ext>
             </a:extLst>
           </p:cNvPr>
@@ -9213,7 +9568,7 @@
             </a:pPr>
             <a:r>
               <a:rPr lang="en-US" sz="2500" kern="0" dirty="0"/>
-              <a:t>Learning outcome #6a – Effect of K </a:t>
+              <a:t>Learning outcome #4 – Ring Resonator</a:t>
             </a:r>
           </a:p>
           <a:p>
@@ -9227,15 +9582,45 @@
                 <a:latin typeface="+mj-lt"/>
                 <a:cs typeface="Lucida Sans"/>
               </a:rPr>
-              <a:t>Change K value between 0.1 and 0.9 in steps of 0.1</a:t>
-            </a:r>
-          </a:p>
-        </p:txBody>
-      </p:sp>
+              <a:t>Single ring resonator – most simple case Constant coupler K (no wavelength variation)</a:t>
+            </a:r>
+          </a:p>
+        </p:txBody>
+      </p:sp>
+      <p:pic>
+        <p:nvPicPr>
+          <p:cNvPr id="4" name="Imagen 3">
+            <a:extLst>
+              <a:ext uri="{FF2B5EF4-FFF2-40B4-BE49-F238E27FC236}">
+                <a16:creationId xmlns:a16="http://schemas.microsoft.com/office/drawing/2014/main" id="{91188B63-ED91-1665-57A2-857345123A2C}"/>
+              </a:ext>
+            </a:extLst>
+          </p:cNvPr>
+          <p:cNvPicPr>
+            <a:picLocks noChangeAspect="1"/>
+          </p:cNvPicPr>
+          <p:nvPr/>
+        </p:nvPicPr>
+        <p:blipFill>
+          <a:blip r:embed="rId3"/>
+          <a:stretch>
+            <a:fillRect/>
+          </a:stretch>
+        </p:blipFill>
+        <p:spPr>
+          <a:xfrm>
+            <a:off x="533400" y="1734642"/>
+            <a:ext cx="7172325" cy="4114800"/>
+          </a:xfrm>
+          <a:prstGeom prst="rect">
+            <a:avLst/>
+          </a:prstGeom>
+        </p:spPr>
+      </p:pic>
     </p:spTree>
     <p:extLst>
       <p:ext uri="{BB962C8B-B14F-4D97-AF65-F5344CB8AC3E}">
-        <p14:creationId xmlns:p14="http://schemas.microsoft.com/office/powerpoint/2010/main" val="1931625216"/>
+        <p14:creationId xmlns:p14="http://schemas.microsoft.com/office/powerpoint/2010/main" val="543184549"/>
       </p:ext>
     </p:extLst>
   </p:cSld>
